--- a/acompanhamento/modelo/apresentacao_semanal.pptx
+++ b/acompanhamento/modelo/apresentacao_semanal.pptx
@@ -5,12 +5,14 @@
     <p:sldMasterId id="2147483660" r:id="rId4"/>
   </p:sldMasterIdLst>
   <p:notesMasterIdLst>
-    <p:notesMasterId r:id="rId8"/>
+    <p:notesMasterId r:id="rId10"/>
   </p:notesMasterIdLst>
   <p:sldIdLst>
     <p:sldId id="271" r:id="rId5"/>
-    <p:sldId id="450" r:id="rId6"/>
-    <p:sldId id="451" r:id="rId7"/>
+    <p:sldId id="436" r:id="rId6"/>
+    <p:sldId id="461" r:id="rId7"/>
+    <p:sldId id="450" r:id="rId8"/>
+    <p:sldId id="451" r:id="rId9"/>
   </p:sldIdLst>
   <p:sldSz cx="12801600" cy="9601200" type="A3"/>
   <p:notesSz cx="6858000" cy="9144000"/>
@@ -121,6 +123,7 @@
 <p1510:revInfo xmlns:a="http://schemas.openxmlformats.org/drawingml/2006/main" xmlns:r="http://schemas.openxmlformats.org/officeDocument/2006/relationships" xmlns:p1510="http://schemas.microsoft.com/office/powerpoint/2015/10/main">
   <p1510:revLst>
     <p1510:client id="{4974446F-31AC-45FB-8CFE-8C42A3ACC035}" v="16" dt="2026-10-27T12:36:20.574"/>
+    <p1510:client id="{53213CEE-C643-4CAB-A5F7-CBB0DD8DFBF4}" v="2" dt="2026-10-27T13:53:53.071"/>
   </p1510:revLst>
 </p1510:revInfo>
 </file>
@@ -129,38 +132,56 @@
 <pc:chgInfo xmlns:a="http://schemas.openxmlformats.org/drawingml/2006/main" xmlns:r="http://schemas.openxmlformats.org/officeDocument/2006/relationships" xmlns:ac="http://schemas.microsoft.com/office/drawing/2013/main/command" xmlns:pc="http://schemas.microsoft.com/office/powerpoint/2013/main/command">
   <pc:docChgLst>
     <pc:chgData name="Talison Claudino Martins do Nascimento" userId="1bf49b2d-35dd-4603-b128-08dab7d336f1" providerId="ADAL" clId="{AF1BA714-5D30-460E-BF17-93D7C12114F0}"/>
-    <pc:docChg chg="delSld">
-      <pc:chgData name="Talison Claudino Martins do Nascimento" userId="1bf49b2d-35dd-4603-b128-08dab7d336f1" providerId="ADAL" clId="{AF1BA714-5D30-460E-BF17-93D7C12114F0}" dt="2026-10-27T17:33:49.053" v="3" actId="47"/>
+    <pc:docChg chg="custSel modSld">
+      <pc:chgData name="Talison Claudino Martins do Nascimento" userId="1bf49b2d-35dd-4603-b128-08dab7d336f1" providerId="ADAL" clId="{AF1BA714-5D30-460E-BF17-93D7C12114F0}" dt="2026-10-27T13:54:21.531" v="13" actId="14100"/>
       <pc:docMkLst>
         <pc:docMk/>
       </pc:docMkLst>
-      <pc:sldChg chg="del">
-        <pc:chgData name="Talison Claudino Martins do Nascimento" userId="1bf49b2d-35dd-4603-b128-08dab7d336f1" providerId="ADAL" clId="{AF1BA714-5D30-460E-BF17-93D7C12114F0}" dt="2026-10-27T17:33:35.799" v="0" actId="47"/>
+      <pc:sldChg chg="addSp delSp modSp mod">
+        <pc:chgData name="Talison Claudino Martins do Nascimento" userId="1bf49b2d-35dd-4603-b128-08dab7d336f1" providerId="ADAL" clId="{AF1BA714-5D30-460E-BF17-93D7C12114F0}" dt="2026-10-27T13:54:21.531" v="13" actId="14100"/>
         <pc:sldMkLst>
           <pc:docMk/>
-          <pc:sldMk cId="3566971557" sldId="433"/>
+          <pc:sldMk cId="2665903669" sldId="451"/>
         </pc:sldMkLst>
+        <pc:graphicFrameChg chg="del">
+          <ac:chgData name="Talison Claudino Martins do Nascimento" userId="1bf49b2d-35dd-4603-b128-08dab7d336f1" providerId="ADAL" clId="{AF1BA714-5D30-460E-BF17-93D7C12114F0}" dt="2026-10-27T13:53:52.096" v="6" actId="478"/>
+          <ac:graphicFrameMkLst>
+            <pc:docMk/>
+            <pc:sldMk cId="2665903669" sldId="451"/>
+            <ac:graphicFrameMk id="2" creationId="{7BFC7B4B-E03C-5571-B267-8CB3EA73B601}"/>
+          </ac:graphicFrameMkLst>
+        </pc:graphicFrameChg>
+        <pc:graphicFrameChg chg="add mod">
+          <ac:chgData name="Talison Claudino Martins do Nascimento" userId="1bf49b2d-35dd-4603-b128-08dab7d336f1" providerId="ADAL" clId="{AF1BA714-5D30-460E-BF17-93D7C12114F0}" dt="2026-10-27T13:54:21.531" v="13" actId="14100"/>
+          <ac:graphicFrameMkLst>
+            <pc:docMk/>
+            <pc:sldMk cId="2665903669" sldId="451"/>
+            <ac:graphicFrameMk id="3" creationId="{7BFC7B4B-E03C-5571-B267-8CB3EA73B601}"/>
+          </ac:graphicFrameMkLst>
+        </pc:graphicFrameChg>
+        <pc:picChg chg="del">
+          <ac:chgData name="Talison Claudino Martins do Nascimento" userId="1bf49b2d-35dd-4603-b128-08dab7d336f1" providerId="ADAL" clId="{AF1BA714-5D30-460E-BF17-93D7C12114F0}" dt="2026-10-27T13:54:14.315" v="11" actId="478"/>
+          <ac:picMkLst>
+            <pc:docMk/>
+            <pc:sldMk cId="2665903669" sldId="451"/>
+            <ac:picMk id="7" creationId="{F935D58C-9D40-745D-F9CE-CA99C186A8C4}"/>
+          </ac:picMkLst>
+        </pc:picChg>
       </pc:sldChg>
-      <pc:sldChg chg="del">
-        <pc:chgData name="Talison Claudino Martins do Nascimento" userId="1bf49b2d-35dd-4603-b128-08dab7d336f1" providerId="ADAL" clId="{AF1BA714-5D30-460E-BF17-93D7C12114F0}" dt="2026-10-27T17:33:46.435" v="2" actId="47"/>
-        <pc:sldMkLst>
-          <pc:docMk/>
-          <pc:sldMk cId="1103941574" sldId="436"/>
-        </pc:sldMkLst>
-      </pc:sldChg>
-      <pc:sldChg chg="del">
-        <pc:chgData name="Talison Claudino Martins do Nascimento" userId="1bf49b2d-35dd-4603-b128-08dab7d336f1" providerId="ADAL" clId="{AF1BA714-5D30-460E-BF17-93D7C12114F0}" dt="2026-10-27T17:33:36.433" v="1" actId="47"/>
-        <pc:sldMkLst>
-          <pc:docMk/>
-          <pc:sldMk cId="1258252159" sldId="459"/>
-        </pc:sldMkLst>
-      </pc:sldChg>
-      <pc:sldChg chg="del">
-        <pc:chgData name="Talison Claudino Martins do Nascimento" userId="1bf49b2d-35dd-4603-b128-08dab7d336f1" providerId="ADAL" clId="{AF1BA714-5D30-460E-BF17-93D7C12114F0}" dt="2026-10-27T17:33:49.053" v="3" actId="47"/>
+      <pc:sldChg chg="modSp mod">
+        <pc:chgData name="Talison Claudino Martins do Nascimento" userId="1bf49b2d-35dd-4603-b128-08dab7d336f1" providerId="ADAL" clId="{AF1BA714-5D30-460E-BF17-93D7C12114F0}" dt="2026-10-27T13:51:59.029" v="5" actId="20577"/>
         <pc:sldMkLst>
           <pc:docMk/>
           <pc:sldMk cId="4034180360" sldId="461"/>
         </pc:sldMkLst>
+        <pc:graphicFrameChg chg="modGraphic">
+          <ac:chgData name="Talison Claudino Martins do Nascimento" userId="1bf49b2d-35dd-4603-b128-08dab7d336f1" providerId="ADAL" clId="{AF1BA714-5D30-460E-BF17-93D7C12114F0}" dt="2026-10-27T13:51:59.029" v="5" actId="20577"/>
+          <ac:graphicFrameMkLst>
+            <pc:docMk/>
+            <pc:sldMk cId="4034180360" sldId="461"/>
+            <ac:graphicFrameMk id="18" creationId="{05C6D86D-AEC3-A9B4-E234-D74939C6F2CB}"/>
+          </ac:graphicFrameMkLst>
+        </pc:graphicFrameChg>
       </pc:sldChg>
     </pc:docChg>
   </pc:docChgLst>
@@ -168,6 +189,949 @@
 </file>
 
 <file path=ppt/charts/chart1.xml><?xml version="1.0" encoding="utf-8"?>
+<c:chartSpace xmlns:c="http://schemas.openxmlformats.org/drawingml/2006/chart" xmlns:a="http://schemas.openxmlformats.org/drawingml/2006/main" xmlns:r="http://schemas.openxmlformats.org/officeDocument/2006/relationships" xmlns:c16r2="http://schemas.microsoft.com/office/drawing/2015/06/chart">
+  <c:date1904 val="1"/>
+  <c:lang val="pt-BR"/>
+  <c:roundedCorners val="0"/>
+  <c:style val="2"/>
+  <c:chart>
+    <c:autoTitleDeleted val="1"/>
+    <c:plotArea>
+      <c:layout>
+        <c:manualLayout>
+          <c:layoutTarget val="inner"/>
+          <c:xMode val="edge"/>
+          <c:yMode val="edge"/>
+          <c:x val="0.13"/>
+          <c:y val="0.01"/>
+          <c:w val="0.55000000000000004"/>
+          <c:h val="0.98"/>
+        </c:manualLayout>
+      </c:layout>
+      <c:barChart>
+        <c:barDir val="bar"/>
+        <c:grouping val="clustered"/>
+        <c:varyColors val="0"/>
+        <c:ser>
+          <c:idx val="0"/>
+          <c:order val="0"/>
+          <c:tx>
+            <c:v>Total</c:v>
+          </c:tx>
+          <c:spPr>
+            <a:solidFill>
+              <a:srgbClr val="E6E8EC"/>
+            </a:solidFill>
+            <a:ln>
+              <a:noFill/>
+            </a:ln>
+          </c:spPr>
+          <c:invertIfNegative val="0"/>
+          <c:dLbls>
+            <c:dLbl>
+              <c:idx val="0"/>
+              <c:tx>
+                <c:rich>
+                  <a:bodyPr/>
+                  <a:lstStyle/>
+                  <a:p>
+                    <a:r>
+                      <a:rPr lang="en-US" sz="900" b="1">
+                        <a:solidFill>
+                          <a:srgbClr val="9A7D0A"/>
+                        </a:solidFill>
+                        <a:latin typeface="Aptos"/>
+                      </a:rPr>
+                      <a:t>74,8%</a:t>
+                    </a:r>
+                    <a:r>
+                      <a:rPr lang="en-US" sz="900" b="0">
+                        <a:solidFill>
+                          <a:srgbClr val="595959"/>
+                        </a:solidFill>
+                        <a:latin typeface="Aptos"/>
+                      </a:rPr>
+                      <a:t>    1.640,00 / 2.192,31 m²</a:t>
+                    </a:r>
+                  </a:p>
+                </c:rich>
+              </c:tx>
+              <c:dLblPos val="outEnd"/>
+              <c:showLegendKey val="0"/>
+              <c:showVal val="1"/>
+              <c:showCatName val="0"/>
+              <c:showSerName val="0"/>
+              <c:showPercent val="0"/>
+              <c:showBubbleSize val="0"/>
+              <c:extLst>
+                <c:ext xmlns:c15="http://schemas.microsoft.com/office/drawing/2012/chart" uri="{CE6537A1-D6FC-4f65-9D91-7224C49458BB}">
+                  <c15:showDataLabelsRange val="0"/>
+                </c:ext>
+                <c:ext xmlns:c16="http://schemas.microsoft.com/office/drawing/2014/chart" uri="{C3380CC4-5D6E-409C-BE32-E72D297353CC}">
+                  <c16:uniqueId val="{00000000-423A-4669-A596-260E420E2567}"/>
+                </c:ext>
+              </c:extLst>
+            </c:dLbl>
+            <c:dLbl>
+              <c:idx val="1"/>
+              <c:tx>
+                <c:rich>
+                  <a:bodyPr/>
+                  <a:lstStyle/>
+                  <a:p>
+                    <a:r>
+                      <a:rPr lang="en-US" sz="900" b="1">
+                        <a:solidFill>
+                          <a:srgbClr val="9A7D0A"/>
+                        </a:solidFill>
+                        <a:latin typeface="Aptos"/>
+                      </a:rPr>
+                      <a:t>0,0%</a:t>
+                    </a:r>
+                    <a:r>
+                      <a:rPr lang="en-US" sz="900" b="0">
+                        <a:solidFill>
+                          <a:srgbClr val="595959"/>
+                        </a:solidFill>
+                        <a:latin typeface="Aptos"/>
+                      </a:rPr>
+                      <a:t>    0,00 / 416,90 m²</a:t>
+                    </a:r>
+                  </a:p>
+                </c:rich>
+              </c:tx>
+              <c:dLblPos val="outEnd"/>
+              <c:showLegendKey val="0"/>
+              <c:showVal val="1"/>
+              <c:showCatName val="0"/>
+              <c:showSerName val="0"/>
+              <c:showPercent val="0"/>
+              <c:showBubbleSize val="0"/>
+              <c:extLst>
+                <c:ext xmlns:c15="http://schemas.microsoft.com/office/drawing/2012/chart" uri="{CE6537A1-D6FC-4f65-9D91-7224C49458BB}">
+                  <c15:showDataLabelsRange val="0"/>
+                </c:ext>
+                <c:ext xmlns:c16="http://schemas.microsoft.com/office/drawing/2014/chart" uri="{C3380CC4-5D6E-409C-BE32-E72D297353CC}">
+                  <c16:uniqueId val="{00000001-423A-4669-A596-260E420E2567}"/>
+                </c:ext>
+              </c:extLst>
+            </c:dLbl>
+            <c:dLbl>
+              <c:idx val="2"/>
+              <c:tx>
+                <c:rich>
+                  <a:bodyPr/>
+                  <a:lstStyle/>
+                  <a:p>
+                    <a:r>
+                      <a:rPr lang="en-US" sz="900" b="1">
+                        <a:solidFill>
+                          <a:srgbClr val="9A7D0A"/>
+                        </a:solidFill>
+                        <a:latin typeface="Aptos"/>
+                      </a:rPr>
+                      <a:t>98,6%</a:t>
+                    </a:r>
+                    <a:r>
+                      <a:rPr lang="en-US" sz="900" b="0">
+                        <a:solidFill>
+                          <a:srgbClr val="595959"/>
+                        </a:solidFill>
+                        <a:latin typeface="Aptos"/>
+                      </a:rPr>
+                      <a:t>    284,30 / 288,30 m²</a:t>
+                    </a:r>
+                  </a:p>
+                </c:rich>
+              </c:tx>
+              <c:dLblPos val="outEnd"/>
+              <c:showLegendKey val="0"/>
+              <c:showVal val="1"/>
+              <c:showCatName val="0"/>
+              <c:showSerName val="0"/>
+              <c:showPercent val="0"/>
+              <c:showBubbleSize val="0"/>
+              <c:extLst>
+                <c:ext xmlns:c15="http://schemas.microsoft.com/office/drawing/2012/chart" uri="{CE6537A1-D6FC-4f65-9D91-7224C49458BB}">
+                  <c15:showDataLabelsRange val="0"/>
+                </c:ext>
+                <c:ext xmlns:c16="http://schemas.microsoft.com/office/drawing/2014/chart" uri="{C3380CC4-5D6E-409C-BE32-E72D297353CC}">
+                  <c16:uniqueId val="{00000002-423A-4669-A596-260E420E2567}"/>
+                </c:ext>
+              </c:extLst>
+            </c:dLbl>
+            <c:dLbl>
+              <c:idx val="3"/>
+              <c:tx>
+                <c:rich>
+                  <a:bodyPr/>
+                  <a:lstStyle/>
+                  <a:p>
+                    <a:r>
+                      <a:rPr lang="en-US" sz="900" b="1">
+                        <a:solidFill>
+                          <a:srgbClr val="9A7D0A"/>
+                        </a:solidFill>
+                        <a:latin typeface="Aptos"/>
+                      </a:rPr>
+                      <a:t>52,6%</a:t>
+                    </a:r>
+                    <a:r>
+                      <a:rPr lang="en-US" sz="900" b="0">
+                        <a:solidFill>
+                          <a:srgbClr val="595959"/>
+                        </a:solidFill>
+                        <a:latin typeface="Aptos"/>
+                      </a:rPr>
+                      <a:t>    635,00 / 1.207,00 m²</a:t>
+                    </a:r>
+                  </a:p>
+                </c:rich>
+              </c:tx>
+              <c:dLblPos val="outEnd"/>
+              <c:showLegendKey val="0"/>
+              <c:showVal val="1"/>
+              <c:showCatName val="0"/>
+              <c:showSerName val="0"/>
+              <c:showPercent val="0"/>
+              <c:showBubbleSize val="0"/>
+              <c:extLst>
+                <c:ext xmlns:c15="http://schemas.microsoft.com/office/drawing/2012/chart" uri="{CE6537A1-D6FC-4f65-9D91-7224C49458BB}">
+                  <c15:showDataLabelsRange val="0"/>
+                </c:ext>
+                <c:ext xmlns:c16="http://schemas.microsoft.com/office/drawing/2014/chart" uri="{C3380CC4-5D6E-409C-BE32-E72D297353CC}">
+                  <c16:uniqueId val="{00000003-423A-4669-A596-260E420E2567}"/>
+                </c:ext>
+              </c:extLst>
+            </c:dLbl>
+            <c:dLbl>
+              <c:idx val="4"/>
+              <c:tx>
+                <c:rich>
+                  <a:bodyPr/>
+                  <a:lstStyle/>
+                  <a:p>
+                    <a:r>
+                      <a:rPr lang="en-US" sz="900" b="1">
+                        <a:solidFill>
+                          <a:srgbClr val="9A7D0A"/>
+                        </a:solidFill>
+                        <a:latin typeface="Aptos"/>
+                      </a:rPr>
+                      <a:t>0,0%</a:t>
+                    </a:r>
+                    <a:r>
+                      <a:rPr lang="en-US" sz="900" b="0">
+                        <a:solidFill>
+                          <a:srgbClr val="595959"/>
+                        </a:solidFill>
+                        <a:latin typeface="Aptos"/>
+                      </a:rPr>
+                      <a:t>    0,00 / 12,33 m²</a:t>
+                    </a:r>
+                  </a:p>
+                </c:rich>
+              </c:tx>
+              <c:dLblPos val="outEnd"/>
+              <c:showLegendKey val="0"/>
+              <c:showVal val="1"/>
+              <c:showCatName val="0"/>
+              <c:showSerName val="0"/>
+              <c:showPercent val="0"/>
+              <c:showBubbleSize val="0"/>
+              <c:extLst>
+                <c:ext xmlns:c15="http://schemas.microsoft.com/office/drawing/2012/chart" uri="{CE6537A1-D6FC-4f65-9D91-7224C49458BB}">
+                  <c15:showDataLabelsRange val="0"/>
+                </c:ext>
+                <c:ext xmlns:c16="http://schemas.microsoft.com/office/drawing/2014/chart" uri="{C3380CC4-5D6E-409C-BE32-E72D297353CC}">
+                  <c16:uniqueId val="{00000004-423A-4669-A596-260E420E2567}"/>
+                </c:ext>
+              </c:extLst>
+            </c:dLbl>
+            <c:dLbl>
+              <c:idx val="5"/>
+              <c:tx>
+                <c:rich>
+                  <a:bodyPr/>
+                  <a:lstStyle/>
+                  <a:p>
+                    <a:r>
+                      <a:rPr lang="en-US" sz="900" b="1">
+                        <a:solidFill>
+                          <a:srgbClr val="9A7D0A"/>
+                        </a:solidFill>
+                        <a:latin typeface="Aptos"/>
+                      </a:rPr>
+                      <a:t>0,0%</a:t>
+                    </a:r>
+                    <a:r>
+                      <a:rPr lang="en-US" sz="900" b="0">
+                        <a:solidFill>
+                          <a:srgbClr val="595959"/>
+                        </a:solidFill>
+                        <a:latin typeface="Aptos"/>
+                      </a:rPr>
+                      <a:t>    0,00 / 228,18 m²</a:t>
+                    </a:r>
+                  </a:p>
+                </c:rich>
+              </c:tx>
+              <c:dLblPos val="outEnd"/>
+              <c:showLegendKey val="0"/>
+              <c:showVal val="1"/>
+              <c:showCatName val="0"/>
+              <c:showSerName val="0"/>
+              <c:showPercent val="0"/>
+              <c:showBubbleSize val="0"/>
+              <c:extLst>
+                <c:ext xmlns:c15="http://schemas.microsoft.com/office/drawing/2012/chart" uri="{CE6537A1-D6FC-4f65-9D91-7224C49458BB}">
+                  <c15:showDataLabelsRange val="0"/>
+                </c:ext>
+                <c:ext xmlns:c16="http://schemas.microsoft.com/office/drawing/2014/chart" uri="{C3380CC4-5D6E-409C-BE32-E72D297353CC}">
+                  <c16:uniqueId val="{00000005-423A-4669-A596-260E420E2567}"/>
+                </c:ext>
+              </c:extLst>
+            </c:dLbl>
+            <c:dLbl>
+              <c:idx val="6"/>
+              <c:tx>
+                <c:rich>
+                  <a:bodyPr/>
+                  <a:lstStyle/>
+                  <a:p>
+                    <a:r>
+                      <a:rPr lang="en-US" sz="900" b="1">
+                        <a:solidFill>
+                          <a:srgbClr val="9A7D0A"/>
+                        </a:solidFill>
+                        <a:latin typeface="Aptos"/>
+                      </a:rPr>
+                      <a:t>90,5%</a:t>
+                    </a:r>
+                    <a:r>
+                      <a:rPr lang="en-US" sz="900" b="0">
+                        <a:solidFill>
+                          <a:srgbClr val="595959"/>
+                        </a:solidFill>
+                        <a:latin typeface="Aptos"/>
+                      </a:rPr>
+                      <a:t>    19,00 / 21,00 m²</a:t>
+                    </a:r>
+                  </a:p>
+                </c:rich>
+              </c:tx>
+              <c:dLblPos val="outEnd"/>
+              <c:showLegendKey val="0"/>
+              <c:showVal val="1"/>
+              <c:showCatName val="0"/>
+              <c:showSerName val="0"/>
+              <c:showPercent val="0"/>
+              <c:showBubbleSize val="0"/>
+              <c:extLst>
+                <c:ext xmlns:c15="http://schemas.microsoft.com/office/drawing/2012/chart" uri="{CE6537A1-D6FC-4f65-9D91-7224C49458BB}">
+                  <c15:showDataLabelsRange val="0"/>
+                </c:ext>
+                <c:ext xmlns:c16="http://schemas.microsoft.com/office/drawing/2014/chart" uri="{C3380CC4-5D6E-409C-BE32-E72D297353CC}">
+                  <c16:uniqueId val="{00000006-423A-4669-A596-260E420E2567}"/>
+                </c:ext>
+              </c:extLst>
+            </c:dLbl>
+            <c:dLbl>
+              <c:idx val="7"/>
+              <c:tx>
+                <c:rich>
+                  <a:bodyPr/>
+                  <a:lstStyle/>
+                  <a:p>
+                    <a:r>
+                      <a:rPr lang="en-US" sz="900" b="1">
+                        <a:solidFill>
+                          <a:srgbClr val="9A7D0A"/>
+                        </a:solidFill>
+                        <a:latin typeface="Aptos"/>
+                      </a:rPr>
+                      <a:t>60,0%</a:t>
+                    </a:r>
+                    <a:r>
+                      <a:rPr lang="en-US" sz="900" b="0">
+                        <a:solidFill>
+                          <a:srgbClr val="595959"/>
+                        </a:solidFill>
+                        <a:latin typeface="Aptos"/>
+                      </a:rPr>
+                      <a:t>    130,00 / 216,63 m²</a:t>
+                    </a:r>
+                  </a:p>
+                </c:rich>
+              </c:tx>
+              <c:dLblPos val="outEnd"/>
+              <c:showLegendKey val="0"/>
+              <c:showVal val="1"/>
+              <c:showCatName val="0"/>
+              <c:showSerName val="0"/>
+              <c:showPercent val="0"/>
+              <c:showBubbleSize val="0"/>
+              <c:extLst>
+                <c:ext xmlns:c15="http://schemas.microsoft.com/office/drawing/2012/chart" uri="{CE6537A1-D6FC-4f65-9D91-7224C49458BB}">
+                  <c15:showDataLabelsRange val="0"/>
+                </c:ext>
+                <c:ext xmlns:c16="http://schemas.microsoft.com/office/drawing/2014/chart" uri="{C3380CC4-5D6E-409C-BE32-E72D297353CC}">
+                  <c16:uniqueId val="{00000007-423A-4669-A596-260E420E2567}"/>
+                </c:ext>
+              </c:extLst>
+            </c:dLbl>
+            <c:dLbl>
+              <c:idx val="8"/>
+              <c:tx>
+                <c:rich>
+                  <a:bodyPr/>
+                  <a:lstStyle/>
+                  <a:p>
+                    <a:r>
+                      <a:rPr lang="en-US" sz="900" b="1">
+                        <a:solidFill>
+                          <a:srgbClr val="9A7D0A"/>
+                        </a:solidFill>
+                        <a:latin typeface="Aptos"/>
+                      </a:rPr>
+                      <a:t>20,8%</a:t>
+                    </a:r>
+                    <a:r>
+                      <a:rPr lang="en-US" sz="900" b="0">
+                        <a:solidFill>
+                          <a:srgbClr val="595959"/>
+                        </a:solidFill>
+                        <a:latin typeface="Aptos"/>
+                      </a:rPr>
+                      <a:t>    42,00 / 201,76 m²</a:t>
+                    </a:r>
+                  </a:p>
+                </c:rich>
+              </c:tx>
+              <c:dLblPos val="outEnd"/>
+              <c:showLegendKey val="0"/>
+              <c:showVal val="1"/>
+              <c:showCatName val="0"/>
+              <c:showSerName val="0"/>
+              <c:showPercent val="0"/>
+              <c:showBubbleSize val="0"/>
+              <c:extLst>
+                <c:ext xmlns:c15="http://schemas.microsoft.com/office/drawing/2012/chart" uri="{CE6537A1-D6FC-4f65-9D91-7224C49458BB}">
+                  <c15:showDataLabelsRange val="0"/>
+                </c:ext>
+                <c:ext xmlns:c16="http://schemas.microsoft.com/office/drawing/2014/chart" uri="{C3380CC4-5D6E-409C-BE32-E72D297353CC}">
+                  <c16:uniqueId val="{00000008-423A-4669-A596-260E420E2567}"/>
+                </c:ext>
+              </c:extLst>
+            </c:dLbl>
+            <c:dLbl>
+              <c:idx val="9"/>
+              <c:tx>
+                <c:rich>
+                  <a:bodyPr/>
+                  <a:lstStyle/>
+                  <a:p>
+                    <a:r>
+                      <a:rPr lang="en-US" sz="900" b="1">
+                        <a:solidFill>
+                          <a:srgbClr val="9A7D0A"/>
+                        </a:solidFill>
+                        <a:latin typeface="Aptos"/>
+                      </a:rPr>
+                      <a:t>32,3%</a:t>
+                    </a:r>
+                    <a:r>
+                      <a:rPr lang="en-US" sz="900" b="0">
+                        <a:solidFill>
+                          <a:srgbClr val="595959"/>
+                        </a:solidFill>
+                        <a:latin typeface="Aptos"/>
+                      </a:rPr>
+                      <a:t>    47,24 / 146,48 m²</a:t>
+                    </a:r>
+                  </a:p>
+                </c:rich>
+              </c:tx>
+              <c:dLblPos val="outEnd"/>
+              <c:showLegendKey val="0"/>
+              <c:showVal val="1"/>
+              <c:showCatName val="0"/>
+              <c:showSerName val="0"/>
+              <c:showPercent val="0"/>
+              <c:showBubbleSize val="0"/>
+              <c:extLst>
+                <c:ext xmlns:c15="http://schemas.microsoft.com/office/drawing/2012/chart" uri="{CE6537A1-D6FC-4f65-9D91-7224C49458BB}">
+                  <c15:showDataLabelsRange val="0"/>
+                </c:ext>
+                <c:ext xmlns:c16="http://schemas.microsoft.com/office/drawing/2014/chart" uri="{C3380CC4-5D6E-409C-BE32-E72D297353CC}">
+                  <c16:uniqueId val="{00000009-423A-4669-A596-260E420E2567}"/>
+                </c:ext>
+              </c:extLst>
+            </c:dLbl>
+            <c:dLbl>
+              <c:idx val="10"/>
+              <c:tx>
+                <c:rich>
+                  <a:bodyPr/>
+                  <a:lstStyle/>
+                  <a:p>
+                    <a:r>
+                      <a:rPr lang="en-US" sz="900" b="1">
+                        <a:solidFill>
+                          <a:srgbClr val="2E7D32"/>
+                        </a:solidFill>
+                        <a:latin typeface="Aptos"/>
+                      </a:rPr>
+                      <a:t>100,0%</a:t>
+                    </a:r>
+                    <a:r>
+                      <a:rPr lang="en-US" sz="900" b="0">
+                        <a:solidFill>
+                          <a:srgbClr val="595959"/>
+                        </a:solidFill>
+                        <a:latin typeface="Aptos"/>
+                      </a:rPr>
+                      <a:t>    11,23 / 11,23 m²</a:t>
+                    </a:r>
+                  </a:p>
+                </c:rich>
+              </c:tx>
+              <c:dLblPos val="outEnd"/>
+              <c:showLegendKey val="0"/>
+              <c:showVal val="1"/>
+              <c:showCatName val="0"/>
+              <c:showSerName val="0"/>
+              <c:showPercent val="0"/>
+              <c:showBubbleSize val="0"/>
+              <c:extLst>
+                <c:ext xmlns:c15="http://schemas.microsoft.com/office/drawing/2012/chart" uri="{CE6537A1-D6FC-4f65-9D91-7224C49458BB}">
+                  <c15:showDataLabelsRange val="0"/>
+                </c:ext>
+                <c:ext xmlns:c16="http://schemas.microsoft.com/office/drawing/2014/chart" uri="{C3380CC4-5D6E-409C-BE32-E72D297353CC}">
+                  <c16:uniqueId val="{0000000A-423A-4669-A596-260E420E2567}"/>
+                </c:ext>
+              </c:extLst>
+            </c:dLbl>
+            <c:spPr>
+              <a:noFill/>
+              <a:ln>
+                <a:noFill/>
+              </a:ln>
+            </c:spPr>
+            <c:dLblPos val="outEnd"/>
+            <c:showLegendKey val="0"/>
+            <c:showVal val="1"/>
+            <c:showCatName val="0"/>
+            <c:showSerName val="0"/>
+            <c:showPercent val="0"/>
+            <c:showBubbleSize val="0"/>
+            <c:showLeaderLines val="0"/>
+            <c:extLst>
+              <c:ext xmlns:c15="http://schemas.microsoft.com/office/drawing/2012/chart" uri="{CE6537A1-D6FC-4f65-9D91-7224C49458BB}">
+                <c15:showLeaderLines val="0"/>
+              </c:ext>
+            </c:extLst>
+          </c:dLbls>
+          <c:cat>
+            <c:strLit>
+              <c:ptCount val="11"/>
+              <c:pt idx="0">
+                <c:v>Área 110</c:v>
+              </c:pt>
+              <c:pt idx="1">
+                <c:v>Área 120</c:v>
+              </c:pt>
+              <c:pt idx="2">
+                <c:v>Área 130</c:v>
+              </c:pt>
+              <c:pt idx="3">
+                <c:v>Área 140</c:v>
+              </c:pt>
+              <c:pt idx="4">
+                <c:v>Área 210</c:v>
+              </c:pt>
+              <c:pt idx="5">
+                <c:v>Área 220</c:v>
+              </c:pt>
+              <c:pt idx="6">
+                <c:v>Área 230</c:v>
+              </c:pt>
+              <c:pt idx="7">
+                <c:v>Área 240</c:v>
+              </c:pt>
+              <c:pt idx="8">
+                <c:v>Área 250</c:v>
+              </c:pt>
+              <c:pt idx="9">
+                <c:v>Área 260</c:v>
+              </c:pt>
+              <c:pt idx="10">
+                <c:v>Área 410</c:v>
+              </c:pt>
+            </c:strLit>
+          </c:cat>
+          <c:val>
+            <c:numLit>
+              <c:formatCode>0.0</c:formatCode>
+              <c:ptCount val="11"/>
+              <c:pt idx="0">
+                <c:v>100</c:v>
+              </c:pt>
+              <c:pt idx="1">
+                <c:v>100</c:v>
+              </c:pt>
+              <c:pt idx="2">
+                <c:v>100</c:v>
+              </c:pt>
+              <c:pt idx="3">
+                <c:v>100</c:v>
+              </c:pt>
+              <c:pt idx="4">
+                <c:v>100</c:v>
+              </c:pt>
+              <c:pt idx="5">
+                <c:v>100</c:v>
+              </c:pt>
+              <c:pt idx="6">
+                <c:v>100</c:v>
+              </c:pt>
+              <c:pt idx="7">
+                <c:v>100</c:v>
+              </c:pt>
+              <c:pt idx="8">
+                <c:v>100</c:v>
+              </c:pt>
+              <c:pt idx="9">
+                <c:v>100</c:v>
+              </c:pt>
+              <c:pt idx="10">
+                <c:v>100</c:v>
+              </c:pt>
+            </c:numLit>
+          </c:val>
+          <c:extLst>
+            <c:ext xmlns:c16="http://schemas.microsoft.com/office/drawing/2014/chart" uri="{C3380CC4-5D6E-409C-BE32-E72D297353CC}">
+              <c16:uniqueId val="{0000000B-423A-4669-A596-260E420E2567}"/>
+            </c:ext>
+          </c:extLst>
+        </c:ser>
+        <c:ser>
+          <c:idx val="1"/>
+          <c:order val="1"/>
+          <c:tx>
+            <c:v>Executado</c:v>
+          </c:tx>
+          <c:spPr>
+            <a:solidFill>
+              <a:srgbClr val="D9C56B"/>
+            </a:solidFill>
+            <a:ln>
+              <a:noFill/>
+            </a:ln>
+          </c:spPr>
+          <c:invertIfNegative val="0"/>
+          <c:dPt>
+            <c:idx val="0"/>
+            <c:invertIfNegative val="0"/>
+            <c:bubble3D val="0"/>
+            <c:extLst>
+              <c:ext xmlns:c16="http://schemas.microsoft.com/office/drawing/2014/chart" uri="{C3380CC4-5D6E-409C-BE32-E72D297353CC}">
+                <c16:uniqueId val="{0000000D-423A-4669-A596-260E420E2567}"/>
+              </c:ext>
+            </c:extLst>
+          </c:dPt>
+          <c:dPt>
+            <c:idx val="1"/>
+            <c:invertIfNegative val="0"/>
+            <c:bubble3D val="0"/>
+            <c:extLst>
+              <c:ext xmlns:c16="http://schemas.microsoft.com/office/drawing/2014/chart" uri="{C3380CC4-5D6E-409C-BE32-E72D297353CC}">
+                <c16:uniqueId val="{0000000F-423A-4669-A596-260E420E2567}"/>
+              </c:ext>
+            </c:extLst>
+          </c:dPt>
+          <c:dPt>
+            <c:idx val="2"/>
+            <c:invertIfNegative val="0"/>
+            <c:bubble3D val="0"/>
+            <c:extLst>
+              <c:ext xmlns:c16="http://schemas.microsoft.com/office/drawing/2014/chart" uri="{C3380CC4-5D6E-409C-BE32-E72D297353CC}">
+                <c16:uniqueId val="{00000011-423A-4669-A596-260E420E2567}"/>
+              </c:ext>
+            </c:extLst>
+          </c:dPt>
+          <c:dPt>
+            <c:idx val="3"/>
+            <c:invertIfNegative val="0"/>
+            <c:bubble3D val="0"/>
+            <c:extLst>
+              <c:ext xmlns:c16="http://schemas.microsoft.com/office/drawing/2014/chart" uri="{C3380CC4-5D6E-409C-BE32-E72D297353CC}">
+                <c16:uniqueId val="{00000013-423A-4669-A596-260E420E2567}"/>
+              </c:ext>
+            </c:extLst>
+          </c:dPt>
+          <c:dPt>
+            <c:idx val="4"/>
+            <c:invertIfNegative val="0"/>
+            <c:bubble3D val="0"/>
+            <c:extLst>
+              <c:ext xmlns:c16="http://schemas.microsoft.com/office/drawing/2014/chart" uri="{C3380CC4-5D6E-409C-BE32-E72D297353CC}">
+                <c16:uniqueId val="{00000015-423A-4669-A596-260E420E2567}"/>
+              </c:ext>
+            </c:extLst>
+          </c:dPt>
+          <c:dPt>
+            <c:idx val="5"/>
+            <c:invertIfNegative val="0"/>
+            <c:bubble3D val="0"/>
+            <c:extLst>
+              <c:ext xmlns:c16="http://schemas.microsoft.com/office/drawing/2014/chart" uri="{C3380CC4-5D6E-409C-BE32-E72D297353CC}">
+                <c16:uniqueId val="{00000017-423A-4669-A596-260E420E2567}"/>
+              </c:ext>
+            </c:extLst>
+          </c:dPt>
+          <c:dPt>
+            <c:idx val="6"/>
+            <c:invertIfNegative val="0"/>
+            <c:bubble3D val="0"/>
+            <c:extLst>
+              <c:ext xmlns:c16="http://schemas.microsoft.com/office/drawing/2014/chart" uri="{C3380CC4-5D6E-409C-BE32-E72D297353CC}">
+                <c16:uniqueId val="{00000019-423A-4669-A596-260E420E2567}"/>
+              </c:ext>
+            </c:extLst>
+          </c:dPt>
+          <c:dPt>
+            <c:idx val="7"/>
+            <c:invertIfNegative val="0"/>
+            <c:bubble3D val="0"/>
+            <c:extLst>
+              <c:ext xmlns:c16="http://schemas.microsoft.com/office/drawing/2014/chart" uri="{C3380CC4-5D6E-409C-BE32-E72D297353CC}">
+                <c16:uniqueId val="{0000001B-423A-4669-A596-260E420E2567}"/>
+              </c:ext>
+            </c:extLst>
+          </c:dPt>
+          <c:dPt>
+            <c:idx val="8"/>
+            <c:invertIfNegative val="0"/>
+            <c:bubble3D val="0"/>
+            <c:extLst>
+              <c:ext xmlns:c16="http://schemas.microsoft.com/office/drawing/2014/chart" uri="{C3380CC4-5D6E-409C-BE32-E72D297353CC}">
+                <c16:uniqueId val="{0000001D-423A-4669-A596-260E420E2567}"/>
+              </c:ext>
+            </c:extLst>
+          </c:dPt>
+          <c:dPt>
+            <c:idx val="9"/>
+            <c:invertIfNegative val="0"/>
+            <c:bubble3D val="0"/>
+            <c:extLst>
+              <c:ext xmlns:c16="http://schemas.microsoft.com/office/drawing/2014/chart" uri="{C3380CC4-5D6E-409C-BE32-E72D297353CC}">
+                <c16:uniqueId val="{0000001F-423A-4669-A596-260E420E2567}"/>
+              </c:ext>
+            </c:extLst>
+          </c:dPt>
+          <c:dPt>
+            <c:idx val="10"/>
+            <c:invertIfNegative val="0"/>
+            <c:bubble3D val="0"/>
+            <c:spPr>
+              <a:solidFill>
+                <a:srgbClr val="A9D5A3"/>
+              </a:solidFill>
+              <a:ln>
+                <a:noFill/>
+              </a:ln>
+            </c:spPr>
+            <c:extLst>
+              <c:ext xmlns:c16="http://schemas.microsoft.com/office/drawing/2014/chart" uri="{C3380CC4-5D6E-409C-BE32-E72D297353CC}">
+                <c16:uniqueId val="{00000021-423A-4669-A596-260E420E2567}"/>
+              </c:ext>
+            </c:extLst>
+          </c:dPt>
+          <c:cat>
+            <c:strLit>
+              <c:ptCount val="11"/>
+              <c:pt idx="0">
+                <c:v>Área 110</c:v>
+              </c:pt>
+              <c:pt idx="1">
+                <c:v>Área 120</c:v>
+              </c:pt>
+              <c:pt idx="2">
+                <c:v>Área 130</c:v>
+              </c:pt>
+              <c:pt idx="3">
+                <c:v>Área 140</c:v>
+              </c:pt>
+              <c:pt idx="4">
+                <c:v>Área 210</c:v>
+              </c:pt>
+              <c:pt idx="5">
+                <c:v>Área 220</c:v>
+              </c:pt>
+              <c:pt idx="6">
+                <c:v>Área 230</c:v>
+              </c:pt>
+              <c:pt idx="7">
+                <c:v>Área 240</c:v>
+              </c:pt>
+              <c:pt idx="8">
+                <c:v>Área 250</c:v>
+              </c:pt>
+              <c:pt idx="9">
+                <c:v>Área 260</c:v>
+              </c:pt>
+              <c:pt idx="10">
+                <c:v>Área 410</c:v>
+              </c:pt>
+            </c:strLit>
+          </c:cat>
+          <c:val>
+            <c:numLit>
+              <c:formatCode>0.0</c:formatCode>
+              <c:ptCount val="11"/>
+              <c:pt idx="0">
+                <c:v>74.8</c:v>
+              </c:pt>
+              <c:pt idx="1">
+                <c:v>0</c:v>
+              </c:pt>
+              <c:pt idx="2">
+                <c:v>98.6</c:v>
+              </c:pt>
+              <c:pt idx="3">
+                <c:v>52.6</c:v>
+              </c:pt>
+              <c:pt idx="4">
+                <c:v>0</c:v>
+              </c:pt>
+              <c:pt idx="5">
+                <c:v>0</c:v>
+              </c:pt>
+              <c:pt idx="6">
+                <c:v>90.5</c:v>
+              </c:pt>
+              <c:pt idx="7">
+                <c:v>60</c:v>
+              </c:pt>
+              <c:pt idx="8">
+                <c:v>20.8</c:v>
+              </c:pt>
+              <c:pt idx="9">
+                <c:v>32.299999999999997</c:v>
+              </c:pt>
+              <c:pt idx="10">
+                <c:v>100</c:v>
+              </c:pt>
+            </c:numLit>
+          </c:val>
+          <c:extLst>
+            <c:ext xmlns:c16="http://schemas.microsoft.com/office/drawing/2014/chart" uri="{C3380CC4-5D6E-409C-BE32-E72D297353CC}">
+              <c16:uniqueId val="{00000022-423A-4669-A596-260E420E2567}"/>
+            </c:ext>
+          </c:extLst>
+        </c:ser>
+        <c:dLbls>
+          <c:showLegendKey val="0"/>
+          <c:showVal val="0"/>
+          <c:showCatName val="0"/>
+          <c:showSerName val="0"/>
+          <c:showPercent val="0"/>
+          <c:showBubbleSize val="0"/>
+        </c:dLbls>
+        <c:gapWidth val="35"/>
+        <c:overlap val="100"/>
+        <c:axId val="111"/>
+        <c:axId val="222"/>
+      </c:barChart>
+      <c:catAx>
+        <c:axId val="111"/>
+        <c:scaling>
+          <c:orientation val="maxMin"/>
+        </c:scaling>
+        <c:delete val="0"/>
+        <c:axPos val="l"/>
+        <c:numFmt formatCode="General" sourceLinked="0"/>
+        <c:majorTickMark val="none"/>
+        <c:minorTickMark val="none"/>
+        <c:tickLblPos val="nextTo"/>
+        <c:spPr>
+          <a:ln>
+            <a:noFill/>
+          </a:ln>
+        </c:spPr>
+        <c:txPr>
+          <a:bodyPr/>
+          <a:lstStyle/>
+          <a:p>
+            <a:pPr>
+              <a:defRPr sz="900">
+                <a:solidFill>
+                  <a:srgbClr val="404040"/>
+                </a:solidFill>
+                <a:latin typeface="Aptos"/>
+              </a:defRPr>
+            </a:pPr>
+            <a:endParaRPr lang="pt-BR"/>
+          </a:p>
+        </c:txPr>
+        <c:crossAx val="222"/>
+        <c:crosses val="autoZero"/>
+        <c:auto val="1"/>
+        <c:lblAlgn val="ctr"/>
+        <c:lblOffset val="100"/>
+        <c:noMultiLvlLbl val="0"/>
+      </c:catAx>
+      <c:valAx>
+        <c:axId val="222"/>
+        <c:scaling>
+          <c:orientation val="minMax"/>
+          <c:max val="100"/>
+          <c:min val="0"/>
+        </c:scaling>
+        <c:delete val="1"/>
+        <c:axPos val="t"/>
+        <c:numFmt formatCode="0" sourceLinked="0"/>
+        <c:majorTickMark val="none"/>
+        <c:minorTickMark val="none"/>
+        <c:tickLblPos val="nextTo"/>
+        <c:crossAx val="111"/>
+        <c:crosses val="autoZero"/>
+        <c:crossBetween val="between"/>
+      </c:valAx>
+      <c:spPr>
+        <a:noFill/>
+        <a:ln>
+          <a:noFill/>
+        </a:ln>
+      </c:spPr>
+    </c:plotArea>
+    <c:plotVisOnly val="1"/>
+    <c:dispBlanksAs val="gap"/>
+    <c:showDLblsOverMax val="1"/>
+  </c:chart>
+  <c:spPr>
+    <a:noFill/>
+    <a:ln>
+      <a:noFill/>
+    </a:ln>
+  </c:spPr>
+  <c:txPr>
+    <a:bodyPr/>
+    <a:lstStyle/>
+    <a:p>
+      <a:pPr>
+        <a:defRPr sz="900">
+          <a:latin typeface="Aptos"/>
+        </a:defRPr>
+      </a:pPr>
+      <a:endParaRPr lang="pt-BR"/>
+    </a:p>
+  </c:txPr>
+</c:chartSpace>
+</file>
+
+<file path=ppt/charts/chart2.xml><?xml version="1.0" encoding="utf-8"?>
 <c:chartSpace xmlns:c="http://schemas.openxmlformats.org/drawingml/2006/chart" xmlns:a="http://schemas.openxmlformats.org/drawingml/2006/main" xmlns:r="http://schemas.openxmlformats.org/officeDocument/2006/relationships" xmlns:c16r2="http://schemas.microsoft.com/office/drawing/2015/06/chart">
   <c:date1904 val="0"/>
   <c:lang val="pt-BR"/>
@@ -181,7 +1145,62 @@
     </mc:Fallback>
   </mc:AlternateContent>
   <c:chart>
-    <c:autoTitleDeleted val="1"/>
+    <c:title>
+      <c:tx>
+        <c:rich>
+          <a:bodyPr rot="0" spcFirstLastPara="1" vertOverflow="ellipsis" vert="horz" wrap="square" anchor="ctr" anchorCtr="1"/>
+          <a:lstStyle/>
+          <a:p>
+            <a:pPr>
+              <a:defRPr sz="1400" b="1" i="0" u="none" strike="noStrike" kern="1200" spc="0" baseline="0">
+                <a:solidFill>
+                  <a:schemeClr val="tx1">
+                    <a:lumMod val="65000"/>
+                    <a:lumOff val="35000"/>
+                  </a:schemeClr>
+                </a:solidFill>
+                <a:latin typeface="+mn-lt"/>
+                <a:ea typeface="+mn-ea"/>
+                <a:cs typeface="+mn-cs"/>
+              </a:defRPr>
+            </a:pPr>
+            <a:r>
+              <a:rPr lang="en-US"/>
+              <a:t>Avanço por SOP</a:t>
+            </a:r>
+          </a:p>
+        </c:rich>
+      </c:tx>
+      <c:overlay val="0"/>
+      <c:spPr>
+        <a:noFill/>
+        <a:ln>
+          <a:noFill/>
+        </a:ln>
+        <a:effectLst/>
+      </c:spPr>
+      <c:txPr>
+        <a:bodyPr rot="0" spcFirstLastPara="1" vertOverflow="ellipsis" vert="horz" wrap="square" anchor="ctr" anchorCtr="1"/>
+        <a:lstStyle/>
+        <a:p>
+          <a:pPr>
+            <a:defRPr sz="1400" b="1" i="0" u="none" strike="noStrike" kern="1200" spc="0" baseline="0">
+              <a:solidFill>
+                <a:schemeClr val="tx1">
+                  <a:lumMod val="65000"/>
+                  <a:lumOff val="35000"/>
+                </a:schemeClr>
+              </a:solidFill>
+              <a:latin typeface="+mn-lt"/>
+              <a:ea typeface="+mn-ea"/>
+              <a:cs typeface="+mn-cs"/>
+            </a:defRPr>
+          </a:pPr>
+          <a:endParaRPr lang="pt-BR"/>
+        </a:p>
+      </c:txPr>
+    </c:title>
+    <c:autoTitleDeleted val="0"/>
     <c:plotArea>
       <c:layout/>
       <c:barChart>
@@ -216,7 +1235,7 @@
             <c:strRef>
               <c:f>'[CURVA ISOLAMENTO TUBULAÇÃO_STH_REUNIAO_COORDENAÇÃO.xlsx]Avanço por SOP'!$AA$4:$AA$48</c:f>
               <c:strCache>
-                <c:ptCount val="45"/>
+                <c:ptCount val="43"/>
                 <c:pt idx="0">
                   <c:v>0012-0001-0069</c:v>
                 </c:pt>
@@ -346,13 +1365,8 @@
                 <c:pt idx="42">
                   <c:v>1200-5550-0016</c:v>
                 </c:pt>
-                <c:pt idx="43">
-                  <c:v>LINHA NÃO CADASTRADA NO CT</c:v>
-                </c:pt>
-                <c:pt idx="44">
-                  <c:v>NÃO DEFINIDO</c:v>
-                </c:pt>
               </c:strCache>
+              <c:extLst/>
             </c:strRef>
           </c:cat>
           <c:val>
@@ -360,7 +1374,7 @@
               <c:f>'[CURVA ISOLAMENTO TUBULAÇÃO_STH_REUNIAO_COORDENAÇÃO.xlsx]Avanço por SOP'!$AB$4:$AB$48</c:f>
               <c:numCache>
                 <c:formatCode>0.0%</c:formatCode>
-                <c:ptCount val="45"/>
+                <c:ptCount val="43"/>
                 <c:pt idx="0">
                   <c:v>0</c:v>
                 </c:pt>
@@ -490,18 +1504,13 @@
                 <c:pt idx="42">
                   <c:v>0</c:v>
                 </c:pt>
-                <c:pt idx="43">
-                  <c:v>0</c:v>
-                </c:pt>
-                <c:pt idx="44">
-                  <c:v>0</c:v>
-                </c:pt>
               </c:numCache>
+              <c:extLst/>
             </c:numRef>
           </c:val>
           <c:extLst>
             <c:ext xmlns:c16="http://schemas.microsoft.com/office/drawing/2014/chart" uri="{C3380CC4-5D6E-409C-BE32-E72D297353CC}">
-              <c16:uniqueId val="{00000000-0A4F-4F2F-BF3F-226CF29ADE08}"/>
+              <c16:uniqueId val="{00000000-3E2C-4E16-BF92-9663EE46DEFA}"/>
             </c:ext>
           </c:extLst>
         </c:ser>
@@ -533,7 +1542,7 @@
             <c:strRef>
               <c:f>'[CURVA ISOLAMENTO TUBULAÇÃO_STH_REUNIAO_COORDENAÇÃO.xlsx]Avanço por SOP'!$AA$4:$AA$48</c:f>
               <c:strCache>
-                <c:ptCount val="45"/>
+                <c:ptCount val="43"/>
                 <c:pt idx="0">
                   <c:v>0012-0001-0069</c:v>
                 </c:pt>
@@ -663,13 +1672,8 @@
                 <c:pt idx="42">
                   <c:v>1200-5550-0016</c:v>
                 </c:pt>
-                <c:pt idx="43">
-                  <c:v>LINHA NÃO CADASTRADA NO CT</c:v>
-                </c:pt>
-                <c:pt idx="44">
-                  <c:v>NÃO DEFINIDO</c:v>
-                </c:pt>
               </c:strCache>
+              <c:extLst/>
             </c:strRef>
           </c:cat>
           <c:val>
@@ -677,7 +1681,7 @@
               <c:f>'[CURVA ISOLAMENTO TUBULAÇÃO_STH_REUNIAO_COORDENAÇÃO.xlsx]Avanço por SOP'!$AC$4:$AC$48</c:f>
               <c:numCache>
                 <c:formatCode>0.0%</c:formatCode>
-                <c:ptCount val="45"/>
+                <c:ptCount val="43"/>
                 <c:pt idx="0">
                   <c:v>0</c:v>
                 </c:pt>
@@ -807,18 +1811,13 @@
                 <c:pt idx="42">
                   <c:v>0</c:v>
                 </c:pt>
-                <c:pt idx="43">
-                  <c:v>0</c:v>
-                </c:pt>
-                <c:pt idx="44">
-                  <c:v>0</c:v>
-                </c:pt>
               </c:numCache>
+              <c:extLst/>
             </c:numRef>
           </c:val>
           <c:extLst>
             <c:ext xmlns:c16="http://schemas.microsoft.com/office/drawing/2014/chart" uri="{C3380CC4-5D6E-409C-BE32-E72D297353CC}">
-              <c16:uniqueId val="{00000001-0A4F-4F2F-BF3F-226CF29ADE08}"/>
+              <c16:uniqueId val="{00000001-3E2C-4E16-BF92-9663EE46DEFA}"/>
             </c:ext>
           </c:extLst>
         </c:ser>
@@ -850,7 +1849,7 @@
             <c:strRef>
               <c:f>'[CURVA ISOLAMENTO TUBULAÇÃO_STH_REUNIAO_COORDENAÇÃO.xlsx]Avanço por SOP'!$AA$4:$AA$48</c:f>
               <c:strCache>
-                <c:ptCount val="45"/>
+                <c:ptCount val="43"/>
                 <c:pt idx="0">
                   <c:v>0012-0001-0069</c:v>
                 </c:pt>
@@ -980,13 +1979,8 @@
                 <c:pt idx="42">
                   <c:v>1200-5550-0016</c:v>
                 </c:pt>
-                <c:pt idx="43">
-                  <c:v>LINHA NÃO CADASTRADA NO CT</c:v>
-                </c:pt>
-                <c:pt idx="44">
-                  <c:v>NÃO DEFINIDO</c:v>
-                </c:pt>
               </c:strCache>
+              <c:extLst/>
             </c:strRef>
           </c:cat>
           <c:val>
@@ -994,7 +1988,7 @@
               <c:f>'[CURVA ISOLAMENTO TUBULAÇÃO_STH_REUNIAO_COORDENAÇÃO.xlsx]Avanço por SOP'!$AD$4:$AD$48</c:f>
               <c:numCache>
                 <c:formatCode>0.0%</c:formatCode>
-                <c:ptCount val="45"/>
+                <c:ptCount val="43"/>
                 <c:pt idx="0">
                   <c:v>1</c:v>
                 </c:pt>
@@ -1124,18 +2118,13 @@
                 <c:pt idx="42">
                   <c:v>1</c:v>
                 </c:pt>
-                <c:pt idx="43">
-                  <c:v>1</c:v>
-                </c:pt>
-                <c:pt idx="44">
-                  <c:v>1</c:v>
-                </c:pt>
               </c:numCache>
+              <c:extLst/>
             </c:numRef>
           </c:val>
           <c:extLst>
             <c:ext xmlns:c16="http://schemas.microsoft.com/office/drawing/2014/chart" uri="{C3380CC4-5D6E-409C-BE32-E72D297353CC}">
-              <c16:uniqueId val="{00000002-0A4F-4F2F-BF3F-226CF29ADE08}"/>
+              <c16:uniqueId val="{00000002-3E2C-4E16-BF92-9663EE46DEFA}"/>
             </c:ext>
           </c:extLst>
         </c:ser>
@@ -1186,7 +2175,7 @@
                 <c:ext xmlns:c15="http://schemas.microsoft.com/office/drawing/2012/chart" uri="{CE6537A1-D6FC-4f65-9D91-7224C49458BB}">
                   <c15:dlblFieldTable>
                     <c15:dlblFTEntry>
-                      <c15:txfldGUID>{14C03EAA-A008-4BAE-AB4D-CDBA4C9C163C}</c15:txfldGUID>
+                      <c15:txfldGUID>{BDC190AD-C354-4206-A084-D8CBF570CF96}</c15:txfldGUID>
                       <c15:f>'[CURVA ISOLAMENTO TUBULAÇÃO_STH_REUNIAO_COORDENAÇÃO.xlsx]Avanço por SOP'!$AG$4</c15:f>
                       <c15:dlblFieldTableCache>
                         <c:ptCount val="1"/>
@@ -1199,7 +2188,7 @@
                   <c15:showDataLabelsRange val="0"/>
                 </c:ext>
                 <c:ext xmlns:c16="http://schemas.microsoft.com/office/drawing/2014/chart" uri="{C3380CC4-5D6E-409C-BE32-E72D297353CC}">
-                  <c16:uniqueId val="{00000003-0A4F-4F2F-BF3F-226CF29ADE08}"/>
+                  <c16:uniqueId val="{00000003-3E2C-4E16-BF92-9663EE46DEFA}"/>
                 </c:ext>
               </c:extLst>
             </c:dLbl>
@@ -1227,7 +2216,7 @@
                 <c:ext xmlns:c15="http://schemas.microsoft.com/office/drawing/2012/chart" uri="{CE6537A1-D6FC-4f65-9D91-7224C49458BB}">
                   <c15:dlblFieldTable>
                     <c15:dlblFTEntry>
-                      <c15:txfldGUID>{47D50A7D-633C-42ED-BB75-2140081B43E4}</c15:txfldGUID>
+                      <c15:txfldGUID>{6D1C8B21-7DD0-44A0-8EC8-869F4E5C48D7}</c15:txfldGUID>
                       <c15:f>'[CURVA ISOLAMENTO TUBULAÇÃO_STH_REUNIAO_COORDENAÇÃO.xlsx]Avanço por SOP'!$AG$5</c15:f>
                       <c15:dlblFieldTableCache>
                         <c:ptCount val="1"/>
@@ -1240,7 +2229,7 @@
                   <c15:showDataLabelsRange val="0"/>
                 </c:ext>
                 <c:ext xmlns:c16="http://schemas.microsoft.com/office/drawing/2014/chart" uri="{C3380CC4-5D6E-409C-BE32-E72D297353CC}">
-                  <c16:uniqueId val="{00000004-0A4F-4F2F-BF3F-226CF29ADE08}"/>
+                  <c16:uniqueId val="{00000004-3E2C-4E16-BF92-9663EE46DEFA}"/>
                 </c:ext>
               </c:extLst>
             </c:dLbl>
@@ -1268,7 +2257,7 @@
                 <c:ext xmlns:c15="http://schemas.microsoft.com/office/drawing/2012/chart" uri="{CE6537A1-D6FC-4f65-9D91-7224C49458BB}">
                   <c15:dlblFieldTable>
                     <c15:dlblFTEntry>
-                      <c15:txfldGUID>{C985FFE0-6EAA-4E51-BFA5-CB6EB2EADD1D}</c15:txfldGUID>
+                      <c15:txfldGUID>{41F96DDA-E4C5-48D1-A458-E2599702E2E0}</c15:txfldGUID>
                       <c15:f>'[CURVA ISOLAMENTO TUBULAÇÃO_STH_REUNIAO_COORDENAÇÃO.xlsx]Avanço por SOP'!$AG$6</c15:f>
                       <c15:dlblFieldTableCache>
                         <c:ptCount val="1"/>
@@ -1281,7 +2270,7 @@
                   <c15:showDataLabelsRange val="0"/>
                 </c:ext>
                 <c:ext xmlns:c16="http://schemas.microsoft.com/office/drawing/2014/chart" uri="{C3380CC4-5D6E-409C-BE32-E72D297353CC}">
-                  <c16:uniqueId val="{00000005-0A4F-4F2F-BF3F-226CF29ADE08}"/>
+                  <c16:uniqueId val="{00000005-3E2C-4E16-BF92-9663EE46DEFA}"/>
                 </c:ext>
               </c:extLst>
             </c:dLbl>
@@ -1309,7 +2298,7 @@
                 <c:ext xmlns:c15="http://schemas.microsoft.com/office/drawing/2012/chart" uri="{CE6537A1-D6FC-4f65-9D91-7224C49458BB}">
                   <c15:dlblFieldTable>
                     <c15:dlblFTEntry>
-                      <c15:txfldGUID>{5EC9A069-BECB-4D52-BEA4-6A2A8407CB3C}</c15:txfldGUID>
+                      <c15:txfldGUID>{5FD24155-ABD6-46D7-9454-EA7D75FFB343}</c15:txfldGUID>
                       <c15:f>'[CURVA ISOLAMENTO TUBULAÇÃO_STH_REUNIAO_COORDENAÇÃO.xlsx]Avanço por SOP'!$AG$7</c15:f>
                       <c15:dlblFieldTableCache>
                         <c:ptCount val="1"/>
@@ -1322,7 +2311,7 @@
                   <c15:showDataLabelsRange val="0"/>
                 </c:ext>
                 <c:ext xmlns:c16="http://schemas.microsoft.com/office/drawing/2014/chart" uri="{C3380CC4-5D6E-409C-BE32-E72D297353CC}">
-                  <c16:uniqueId val="{00000006-0A4F-4F2F-BF3F-226CF29ADE08}"/>
+                  <c16:uniqueId val="{00000006-3E2C-4E16-BF92-9663EE46DEFA}"/>
                 </c:ext>
               </c:extLst>
             </c:dLbl>
@@ -1350,7 +2339,7 @@
                 <c:ext xmlns:c15="http://schemas.microsoft.com/office/drawing/2012/chart" uri="{CE6537A1-D6FC-4f65-9D91-7224C49458BB}">
                   <c15:dlblFieldTable>
                     <c15:dlblFTEntry>
-                      <c15:txfldGUID>{78A64C39-139F-494C-A6E7-72C730612EEC}</c15:txfldGUID>
+                      <c15:txfldGUID>{2D87C1C4-A78F-4597-9CD4-E61CE5A1B846}</c15:txfldGUID>
                       <c15:f>'[CURVA ISOLAMENTO TUBULAÇÃO_STH_REUNIAO_COORDENAÇÃO.xlsx]Avanço por SOP'!$AG$8</c15:f>
                       <c15:dlblFieldTableCache>
                         <c:ptCount val="1"/>
@@ -1363,7 +2352,7 @@
                   <c15:showDataLabelsRange val="0"/>
                 </c:ext>
                 <c:ext xmlns:c16="http://schemas.microsoft.com/office/drawing/2014/chart" uri="{C3380CC4-5D6E-409C-BE32-E72D297353CC}">
-                  <c16:uniqueId val="{00000007-0A4F-4F2F-BF3F-226CF29ADE08}"/>
+                  <c16:uniqueId val="{00000007-3E2C-4E16-BF92-9663EE46DEFA}"/>
                 </c:ext>
               </c:extLst>
             </c:dLbl>
@@ -1391,7 +2380,7 @@
                 <c:ext xmlns:c15="http://schemas.microsoft.com/office/drawing/2012/chart" uri="{CE6537A1-D6FC-4f65-9D91-7224C49458BB}">
                   <c15:dlblFieldTable>
                     <c15:dlblFTEntry>
-                      <c15:txfldGUID>{CABCA520-DA27-4BC1-B4BA-33AC146833CC}</c15:txfldGUID>
+                      <c15:txfldGUID>{92ADA917-402B-41C6-BA68-04EB1EEA0ED5}</c15:txfldGUID>
                       <c15:f>'[CURVA ISOLAMENTO TUBULAÇÃO_STH_REUNIAO_COORDENAÇÃO.xlsx]Avanço por SOP'!$AG$9</c15:f>
                       <c15:dlblFieldTableCache>
                         <c:ptCount val="1"/>
@@ -1404,7 +2393,7 @@
                   <c15:showDataLabelsRange val="0"/>
                 </c:ext>
                 <c:ext xmlns:c16="http://schemas.microsoft.com/office/drawing/2014/chart" uri="{C3380CC4-5D6E-409C-BE32-E72D297353CC}">
-                  <c16:uniqueId val="{00000008-0A4F-4F2F-BF3F-226CF29ADE08}"/>
+                  <c16:uniqueId val="{00000008-3E2C-4E16-BF92-9663EE46DEFA}"/>
                 </c:ext>
               </c:extLst>
             </c:dLbl>
@@ -1432,7 +2421,7 @@
                 <c:ext xmlns:c15="http://schemas.microsoft.com/office/drawing/2012/chart" uri="{CE6537A1-D6FC-4f65-9D91-7224C49458BB}">
                   <c15:dlblFieldTable>
                     <c15:dlblFTEntry>
-                      <c15:txfldGUID>{C8078BDA-B7A2-4126-BBA6-AC4870D94F2A}</c15:txfldGUID>
+                      <c15:txfldGUID>{093C8F2F-9DF5-4BA3-9C0B-F047A882CDFD}</c15:txfldGUID>
                       <c15:f>'[CURVA ISOLAMENTO TUBULAÇÃO_STH_REUNIAO_COORDENAÇÃO.xlsx]Avanço por SOP'!$AG$10</c15:f>
                       <c15:dlblFieldTableCache>
                         <c:ptCount val="1"/>
@@ -1445,7 +2434,7 @@
                   <c15:showDataLabelsRange val="0"/>
                 </c:ext>
                 <c:ext xmlns:c16="http://schemas.microsoft.com/office/drawing/2014/chart" uri="{C3380CC4-5D6E-409C-BE32-E72D297353CC}">
-                  <c16:uniqueId val="{00000009-0A4F-4F2F-BF3F-226CF29ADE08}"/>
+                  <c16:uniqueId val="{00000009-3E2C-4E16-BF92-9663EE46DEFA}"/>
                 </c:ext>
               </c:extLst>
             </c:dLbl>
@@ -1473,7 +2462,7 @@
                 <c:ext xmlns:c15="http://schemas.microsoft.com/office/drawing/2012/chart" uri="{CE6537A1-D6FC-4f65-9D91-7224C49458BB}">
                   <c15:dlblFieldTable>
                     <c15:dlblFTEntry>
-                      <c15:txfldGUID>{DDB273D0-807B-4E33-A53F-4BACC9CDFA39}</c15:txfldGUID>
+                      <c15:txfldGUID>{BEC33CD6-B17A-4282-82E7-5ED6B5EE0C59}</c15:txfldGUID>
                       <c15:f>'[CURVA ISOLAMENTO TUBULAÇÃO_STH_REUNIAO_COORDENAÇÃO.xlsx]Avanço por SOP'!$AG$11</c15:f>
                       <c15:dlblFieldTableCache>
                         <c:ptCount val="1"/>
@@ -1486,7 +2475,7 @@
                   <c15:showDataLabelsRange val="0"/>
                 </c:ext>
                 <c:ext xmlns:c16="http://schemas.microsoft.com/office/drawing/2014/chart" uri="{C3380CC4-5D6E-409C-BE32-E72D297353CC}">
-                  <c16:uniqueId val="{0000000A-0A4F-4F2F-BF3F-226CF29ADE08}"/>
+                  <c16:uniqueId val="{0000000A-3E2C-4E16-BF92-9663EE46DEFA}"/>
                 </c:ext>
               </c:extLst>
             </c:dLbl>
@@ -1514,7 +2503,7 @@
                 <c:ext xmlns:c15="http://schemas.microsoft.com/office/drawing/2012/chart" uri="{CE6537A1-D6FC-4f65-9D91-7224C49458BB}">
                   <c15:dlblFieldTable>
                     <c15:dlblFTEntry>
-                      <c15:txfldGUID>{6463958D-F7AF-4790-A089-2C2FB39BA5B4}</c15:txfldGUID>
+                      <c15:txfldGUID>{1626DCF6-CDD1-44CD-865B-3E45131D5329}</c15:txfldGUID>
                       <c15:f>'[CURVA ISOLAMENTO TUBULAÇÃO_STH_REUNIAO_COORDENAÇÃO.xlsx]Avanço por SOP'!$AG$12</c15:f>
                       <c15:dlblFieldTableCache>
                         <c:ptCount val="1"/>
@@ -1527,7 +2516,7 @@
                   <c15:showDataLabelsRange val="0"/>
                 </c:ext>
                 <c:ext xmlns:c16="http://schemas.microsoft.com/office/drawing/2014/chart" uri="{C3380CC4-5D6E-409C-BE32-E72D297353CC}">
-                  <c16:uniqueId val="{0000000B-0A4F-4F2F-BF3F-226CF29ADE08}"/>
+                  <c16:uniqueId val="{0000000B-3E2C-4E16-BF92-9663EE46DEFA}"/>
                 </c:ext>
               </c:extLst>
             </c:dLbl>
@@ -1555,7 +2544,7 @@
                 <c:ext xmlns:c15="http://schemas.microsoft.com/office/drawing/2012/chart" uri="{CE6537A1-D6FC-4f65-9D91-7224C49458BB}">
                   <c15:dlblFieldTable>
                     <c15:dlblFTEntry>
-                      <c15:txfldGUID>{1E5F8848-A04D-49FE-A4FB-6165311E9A34}</c15:txfldGUID>
+                      <c15:txfldGUID>{F7C06370-6109-428F-956F-771AC9A2A75A}</c15:txfldGUID>
                       <c15:f>'[CURVA ISOLAMENTO TUBULAÇÃO_STH_REUNIAO_COORDENAÇÃO.xlsx]Avanço por SOP'!$AG$13</c15:f>
                       <c15:dlblFieldTableCache>
                         <c:ptCount val="1"/>
@@ -1568,7 +2557,7 @@
                   <c15:showDataLabelsRange val="0"/>
                 </c:ext>
                 <c:ext xmlns:c16="http://schemas.microsoft.com/office/drawing/2014/chart" uri="{C3380CC4-5D6E-409C-BE32-E72D297353CC}">
-                  <c16:uniqueId val="{0000000C-0A4F-4F2F-BF3F-226CF29ADE08}"/>
+                  <c16:uniqueId val="{0000000C-3E2C-4E16-BF92-9663EE46DEFA}"/>
                 </c:ext>
               </c:extLst>
             </c:dLbl>
@@ -1596,7 +2585,7 @@
                 <c:ext xmlns:c15="http://schemas.microsoft.com/office/drawing/2012/chart" uri="{CE6537A1-D6FC-4f65-9D91-7224C49458BB}">
                   <c15:dlblFieldTable>
                     <c15:dlblFTEntry>
-                      <c15:txfldGUID>{8347D315-4D10-4B5B-B650-7C019DEBC413}</c15:txfldGUID>
+                      <c15:txfldGUID>{5171A9C5-7555-432A-BF4E-6C39BD3D11E0}</c15:txfldGUID>
                       <c15:f>'[CURVA ISOLAMENTO TUBULAÇÃO_STH_REUNIAO_COORDENAÇÃO.xlsx]Avanço por SOP'!$AG$14</c15:f>
                       <c15:dlblFieldTableCache>
                         <c:ptCount val="1"/>
@@ -1609,7 +2598,7 @@
                   <c15:showDataLabelsRange val="0"/>
                 </c:ext>
                 <c:ext xmlns:c16="http://schemas.microsoft.com/office/drawing/2014/chart" uri="{C3380CC4-5D6E-409C-BE32-E72D297353CC}">
-                  <c16:uniqueId val="{0000000D-0A4F-4F2F-BF3F-226CF29ADE08}"/>
+                  <c16:uniqueId val="{0000000D-3E2C-4E16-BF92-9663EE46DEFA}"/>
                 </c:ext>
               </c:extLst>
             </c:dLbl>
@@ -1637,7 +2626,7 @@
                 <c:ext xmlns:c15="http://schemas.microsoft.com/office/drawing/2012/chart" uri="{CE6537A1-D6FC-4f65-9D91-7224C49458BB}">
                   <c15:dlblFieldTable>
                     <c15:dlblFTEntry>
-                      <c15:txfldGUID>{DE146697-506A-410A-9933-06387EEBFBAE}</c15:txfldGUID>
+                      <c15:txfldGUID>{B0FFFD8B-9D3C-42E4-A478-B624AD68E68D}</c15:txfldGUID>
                       <c15:f>'[CURVA ISOLAMENTO TUBULAÇÃO_STH_REUNIAO_COORDENAÇÃO.xlsx]Avanço por SOP'!$AG$15</c15:f>
                       <c15:dlblFieldTableCache>
                         <c:ptCount val="1"/>
@@ -1650,7 +2639,7 @@
                   <c15:showDataLabelsRange val="0"/>
                 </c:ext>
                 <c:ext xmlns:c16="http://schemas.microsoft.com/office/drawing/2014/chart" uri="{C3380CC4-5D6E-409C-BE32-E72D297353CC}">
-                  <c16:uniqueId val="{0000000E-0A4F-4F2F-BF3F-226CF29ADE08}"/>
+                  <c16:uniqueId val="{0000000E-3E2C-4E16-BF92-9663EE46DEFA}"/>
                 </c:ext>
               </c:extLst>
             </c:dLbl>
@@ -1678,7 +2667,7 @@
                 <c:ext xmlns:c15="http://schemas.microsoft.com/office/drawing/2012/chart" uri="{CE6537A1-D6FC-4f65-9D91-7224C49458BB}">
                   <c15:dlblFieldTable>
                     <c15:dlblFTEntry>
-                      <c15:txfldGUID>{36A1913D-D30A-4610-BC4A-3C4164775652}</c15:txfldGUID>
+                      <c15:txfldGUID>{9773D579-4975-4F51-950B-1DEBC994B78C}</c15:txfldGUID>
                       <c15:f>'[CURVA ISOLAMENTO TUBULAÇÃO_STH_REUNIAO_COORDENAÇÃO.xlsx]Avanço por SOP'!$AG$16</c15:f>
                       <c15:dlblFieldTableCache>
                         <c:ptCount val="1"/>
@@ -1691,7 +2680,7 @@
                   <c15:showDataLabelsRange val="0"/>
                 </c:ext>
                 <c:ext xmlns:c16="http://schemas.microsoft.com/office/drawing/2014/chart" uri="{C3380CC4-5D6E-409C-BE32-E72D297353CC}">
-                  <c16:uniqueId val="{0000000F-0A4F-4F2F-BF3F-226CF29ADE08}"/>
+                  <c16:uniqueId val="{0000000F-3E2C-4E16-BF92-9663EE46DEFA}"/>
                 </c:ext>
               </c:extLst>
             </c:dLbl>
@@ -1719,7 +2708,7 @@
                 <c:ext xmlns:c15="http://schemas.microsoft.com/office/drawing/2012/chart" uri="{CE6537A1-D6FC-4f65-9D91-7224C49458BB}">
                   <c15:dlblFieldTable>
                     <c15:dlblFTEntry>
-                      <c15:txfldGUID>{BB662102-4196-42ED-A207-A6621C6C2C9C}</c15:txfldGUID>
+                      <c15:txfldGUID>{09F8C401-E576-445A-A46C-1BCDB7BA0E3C}</c15:txfldGUID>
                       <c15:f>'[CURVA ISOLAMENTO TUBULAÇÃO_STH_REUNIAO_COORDENAÇÃO.xlsx]Avanço por SOP'!$AG$17</c15:f>
                       <c15:dlblFieldTableCache>
                         <c:ptCount val="1"/>
@@ -1732,7 +2721,7 @@
                   <c15:showDataLabelsRange val="0"/>
                 </c:ext>
                 <c:ext xmlns:c16="http://schemas.microsoft.com/office/drawing/2014/chart" uri="{C3380CC4-5D6E-409C-BE32-E72D297353CC}">
-                  <c16:uniqueId val="{00000010-0A4F-4F2F-BF3F-226CF29ADE08}"/>
+                  <c16:uniqueId val="{00000010-3E2C-4E16-BF92-9663EE46DEFA}"/>
                 </c:ext>
               </c:extLst>
             </c:dLbl>
@@ -1760,7 +2749,7 @@
                 <c:ext xmlns:c15="http://schemas.microsoft.com/office/drawing/2012/chart" uri="{CE6537A1-D6FC-4f65-9D91-7224C49458BB}">
                   <c15:dlblFieldTable>
                     <c15:dlblFTEntry>
-                      <c15:txfldGUID>{47155266-50B6-4B24-B7B5-8DD86AB33B08}</c15:txfldGUID>
+                      <c15:txfldGUID>{FBD024BE-D3C9-4C73-8F72-9104022CD214}</c15:txfldGUID>
                       <c15:f>'[CURVA ISOLAMENTO TUBULAÇÃO_STH_REUNIAO_COORDENAÇÃO.xlsx]Avanço por SOP'!$AG$18</c15:f>
                       <c15:dlblFieldTableCache>
                         <c:ptCount val="1"/>
@@ -1773,7 +2762,7 @@
                   <c15:showDataLabelsRange val="0"/>
                 </c:ext>
                 <c:ext xmlns:c16="http://schemas.microsoft.com/office/drawing/2014/chart" uri="{C3380CC4-5D6E-409C-BE32-E72D297353CC}">
-                  <c16:uniqueId val="{00000011-0A4F-4F2F-BF3F-226CF29ADE08}"/>
+                  <c16:uniqueId val="{00000011-3E2C-4E16-BF92-9663EE46DEFA}"/>
                 </c:ext>
               </c:extLst>
             </c:dLbl>
@@ -1801,7 +2790,7 @@
                 <c:ext xmlns:c15="http://schemas.microsoft.com/office/drawing/2012/chart" uri="{CE6537A1-D6FC-4f65-9D91-7224C49458BB}">
                   <c15:dlblFieldTable>
                     <c15:dlblFTEntry>
-                      <c15:txfldGUID>{0E7711DD-9EDF-4156-ABDE-B9579D7C2B2E}</c15:txfldGUID>
+                      <c15:txfldGUID>{D3BFEF25-CED9-4D6C-98A4-B71219EC92FB}</c15:txfldGUID>
                       <c15:f>'[CURVA ISOLAMENTO TUBULAÇÃO_STH_REUNIAO_COORDENAÇÃO.xlsx]Avanço por SOP'!$AG$19</c15:f>
                       <c15:dlblFieldTableCache>
                         <c:ptCount val="1"/>
@@ -1814,7 +2803,7 @@
                   <c15:showDataLabelsRange val="0"/>
                 </c:ext>
                 <c:ext xmlns:c16="http://schemas.microsoft.com/office/drawing/2014/chart" uri="{C3380CC4-5D6E-409C-BE32-E72D297353CC}">
-                  <c16:uniqueId val="{00000012-0A4F-4F2F-BF3F-226CF29ADE08}"/>
+                  <c16:uniqueId val="{00000012-3E2C-4E16-BF92-9663EE46DEFA}"/>
                 </c:ext>
               </c:extLst>
             </c:dLbl>
@@ -1842,7 +2831,7 @@
                 <c:ext xmlns:c15="http://schemas.microsoft.com/office/drawing/2012/chart" uri="{CE6537A1-D6FC-4f65-9D91-7224C49458BB}">
                   <c15:dlblFieldTable>
                     <c15:dlblFTEntry>
-                      <c15:txfldGUID>{1B7BBF64-E8D1-4B9B-95B6-967029FE557D}</c15:txfldGUID>
+                      <c15:txfldGUID>{6F18B865-1439-404A-BAC1-7ED50C4196FA}</c15:txfldGUID>
                       <c15:f>'[CURVA ISOLAMENTO TUBULAÇÃO_STH_REUNIAO_COORDENAÇÃO.xlsx]Avanço por SOP'!$AG$20</c15:f>
                       <c15:dlblFieldTableCache>
                         <c:ptCount val="1"/>
@@ -1855,7 +2844,7 @@
                   <c15:showDataLabelsRange val="0"/>
                 </c:ext>
                 <c:ext xmlns:c16="http://schemas.microsoft.com/office/drawing/2014/chart" uri="{C3380CC4-5D6E-409C-BE32-E72D297353CC}">
-                  <c16:uniqueId val="{00000013-0A4F-4F2F-BF3F-226CF29ADE08}"/>
+                  <c16:uniqueId val="{00000013-3E2C-4E16-BF92-9663EE46DEFA}"/>
                 </c:ext>
               </c:extLst>
             </c:dLbl>
@@ -1883,7 +2872,7 @@
                 <c:ext xmlns:c15="http://schemas.microsoft.com/office/drawing/2012/chart" uri="{CE6537A1-D6FC-4f65-9D91-7224C49458BB}">
                   <c15:dlblFieldTable>
                     <c15:dlblFTEntry>
-                      <c15:txfldGUID>{B7BEB707-332F-4A91-892B-56D7EAD4889A}</c15:txfldGUID>
+                      <c15:txfldGUID>{EB87D6AE-34C3-4006-9A61-09EB7AC7A298}</c15:txfldGUID>
                       <c15:f>'[CURVA ISOLAMENTO TUBULAÇÃO_STH_REUNIAO_COORDENAÇÃO.xlsx]Avanço por SOP'!$AG$21</c15:f>
                       <c15:dlblFieldTableCache>
                         <c:ptCount val="1"/>
@@ -1896,7 +2885,7 @@
                   <c15:showDataLabelsRange val="0"/>
                 </c:ext>
                 <c:ext xmlns:c16="http://schemas.microsoft.com/office/drawing/2014/chart" uri="{C3380CC4-5D6E-409C-BE32-E72D297353CC}">
-                  <c16:uniqueId val="{00000014-0A4F-4F2F-BF3F-226CF29ADE08}"/>
+                  <c16:uniqueId val="{00000014-3E2C-4E16-BF92-9663EE46DEFA}"/>
                 </c:ext>
               </c:extLst>
             </c:dLbl>
@@ -1924,7 +2913,7 @@
                 <c:ext xmlns:c15="http://schemas.microsoft.com/office/drawing/2012/chart" uri="{CE6537A1-D6FC-4f65-9D91-7224C49458BB}">
                   <c15:dlblFieldTable>
                     <c15:dlblFTEntry>
-                      <c15:txfldGUID>{89C423D2-CF30-42F7-8475-3769ECC104FA}</c15:txfldGUID>
+                      <c15:txfldGUID>{412A27DC-36D0-4C02-B1EB-35009CD19B42}</c15:txfldGUID>
                       <c15:f>'[CURVA ISOLAMENTO TUBULAÇÃO_STH_REUNIAO_COORDENAÇÃO.xlsx]Avanço por SOP'!$AG$22</c15:f>
                       <c15:dlblFieldTableCache>
                         <c:ptCount val="1"/>
@@ -1937,7 +2926,7 @@
                   <c15:showDataLabelsRange val="0"/>
                 </c:ext>
                 <c:ext xmlns:c16="http://schemas.microsoft.com/office/drawing/2014/chart" uri="{C3380CC4-5D6E-409C-BE32-E72D297353CC}">
-                  <c16:uniqueId val="{00000015-0A4F-4F2F-BF3F-226CF29ADE08}"/>
+                  <c16:uniqueId val="{00000015-3E2C-4E16-BF92-9663EE46DEFA}"/>
                 </c:ext>
               </c:extLst>
             </c:dLbl>
@@ -1965,7 +2954,7 @@
                 <c:ext xmlns:c15="http://schemas.microsoft.com/office/drawing/2012/chart" uri="{CE6537A1-D6FC-4f65-9D91-7224C49458BB}">
                   <c15:dlblFieldTable>
                     <c15:dlblFTEntry>
-                      <c15:txfldGUID>{199D5B06-8138-4574-9EE1-9D5A09CB6E6F}</c15:txfldGUID>
+                      <c15:txfldGUID>{05B6B18D-F200-4A06-8F0B-FADF954AB417}</c15:txfldGUID>
                       <c15:f>'[CURVA ISOLAMENTO TUBULAÇÃO_STH_REUNIAO_COORDENAÇÃO.xlsx]Avanço por SOP'!$AG$23</c15:f>
                       <c15:dlblFieldTableCache>
                         <c:ptCount val="1"/>
@@ -1978,7 +2967,7 @@
                   <c15:showDataLabelsRange val="0"/>
                 </c:ext>
                 <c:ext xmlns:c16="http://schemas.microsoft.com/office/drawing/2014/chart" uri="{C3380CC4-5D6E-409C-BE32-E72D297353CC}">
-                  <c16:uniqueId val="{00000016-0A4F-4F2F-BF3F-226CF29ADE08}"/>
+                  <c16:uniqueId val="{00000016-3E2C-4E16-BF92-9663EE46DEFA}"/>
                 </c:ext>
               </c:extLst>
             </c:dLbl>
@@ -2006,7 +2995,7 @@
                 <c:ext xmlns:c15="http://schemas.microsoft.com/office/drawing/2012/chart" uri="{CE6537A1-D6FC-4f65-9D91-7224C49458BB}">
                   <c15:dlblFieldTable>
                     <c15:dlblFTEntry>
-                      <c15:txfldGUID>{D3F15265-6D3F-4955-921C-93286E04492E}</c15:txfldGUID>
+                      <c15:txfldGUID>{1A654C54-CC98-4B4C-A790-FFD2C9226ACE}</c15:txfldGUID>
                       <c15:f>'[CURVA ISOLAMENTO TUBULAÇÃO_STH_REUNIAO_COORDENAÇÃO.xlsx]Avanço por SOP'!$AG$24</c15:f>
                       <c15:dlblFieldTableCache>
                         <c:ptCount val="1"/>
@@ -2019,7 +3008,7 @@
                   <c15:showDataLabelsRange val="0"/>
                 </c:ext>
                 <c:ext xmlns:c16="http://schemas.microsoft.com/office/drawing/2014/chart" uri="{C3380CC4-5D6E-409C-BE32-E72D297353CC}">
-                  <c16:uniqueId val="{00000017-0A4F-4F2F-BF3F-226CF29ADE08}"/>
+                  <c16:uniqueId val="{00000017-3E2C-4E16-BF92-9663EE46DEFA}"/>
                 </c:ext>
               </c:extLst>
             </c:dLbl>
@@ -2047,7 +3036,7 @@
                 <c:ext xmlns:c15="http://schemas.microsoft.com/office/drawing/2012/chart" uri="{CE6537A1-D6FC-4f65-9D91-7224C49458BB}">
                   <c15:dlblFieldTable>
                     <c15:dlblFTEntry>
-                      <c15:txfldGUID>{CA775C8A-9F8A-47A7-B4D2-074158454E14}</c15:txfldGUID>
+                      <c15:txfldGUID>{84F22288-A32A-414F-8B69-4F5CF88B3D28}</c15:txfldGUID>
                       <c15:f>'[CURVA ISOLAMENTO TUBULAÇÃO_STH_REUNIAO_COORDENAÇÃO.xlsx]Avanço por SOP'!$AG$25</c15:f>
                       <c15:dlblFieldTableCache>
                         <c:ptCount val="1"/>
@@ -2060,7 +3049,7 @@
                   <c15:showDataLabelsRange val="0"/>
                 </c:ext>
                 <c:ext xmlns:c16="http://schemas.microsoft.com/office/drawing/2014/chart" uri="{C3380CC4-5D6E-409C-BE32-E72D297353CC}">
-                  <c16:uniqueId val="{00000018-0A4F-4F2F-BF3F-226CF29ADE08}"/>
+                  <c16:uniqueId val="{00000018-3E2C-4E16-BF92-9663EE46DEFA}"/>
                 </c:ext>
               </c:extLst>
             </c:dLbl>
@@ -2088,7 +3077,7 @@
                 <c:ext xmlns:c15="http://schemas.microsoft.com/office/drawing/2012/chart" uri="{CE6537A1-D6FC-4f65-9D91-7224C49458BB}">
                   <c15:dlblFieldTable>
                     <c15:dlblFTEntry>
-                      <c15:txfldGUID>{BDF4B0C8-8D74-4932-9B5C-0F1AAAD7A7C8}</c15:txfldGUID>
+                      <c15:txfldGUID>{900995BD-766B-44E4-9F9E-D87095624083}</c15:txfldGUID>
                       <c15:f>'[CURVA ISOLAMENTO TUBULAÇÃO_STH_REUNIAO_COORDENAÇÃO.xlsx]Avanço por SOP'!$AG$26</c15:f>
                       <c15:dlblFieldTableCache>
                         <c:ptCount val="1"/>
@@ -2101,7 +3090,7 @@
                   <c15:showDataLabelsRange val="0"/>
                 </c:ext>
                 <c:ext xmlns:c16="http://schemas.microsoft.com/office/drawing/2014/chart" uri="{C3380CC4-5D6E-409C-BE32-E72D297353CC}">
-                  <c16:uniqueId val="{00000019-0A4F-4F2F-BF3F-226CF29ADE08}"/>
+                  <c16:uniqueId val="{00000019-3E2C-4E16-BF92-9663EE46DEFA}"/>
                 </c:ext>
               </c:extLst>
             </c:dLbl>
@@ -2129,7 +3118,7 @@
                 <c:ext xmlns:c15="http://schemas.microsoft.com/office/drawing/2012/chart" uri="{CE6537A1-D6FC-4f65-9D91-7224C49458BB}">
                   <c15:dlblFieldTable>
                     <c15:dlblFTEntry>
-                      <c15:txfldGUID>{154FDE9E-DE0B-4BCA-8E46-62F09F1BE2A5}</c15:txfldGUID>
+                      <c15:txfldGUID>{A585876F-0261-4C2E-8807-1582B757A966}</c15:txfldGUID>
                       <c15:f>'[CURVA ISOLAMENTO TUBULAÇÃO_STH_REUNIAO_COORDENAÇÃO.xlsx]Avanço por SOP'!$AG$27</c15:f>
                       <c15:dlblFieldTableCache>
                         <c:ptCount val="1"/>
@@ -2142,7 +3131,7 @@
                   <c15:showDataLabelsRange val="0"/>
                 </c:ext>
                 <c:ext xmlns:c16="http://schemas.microsoft.com/office/drawing/2014/chart" uri="{C3380CC4-5D6E-409C-BE32-E72D297353CC}">
-                  <c16:uniqueId val="{0000001A-0A4F-4F2F-BF3F-226CF29ADE08}"/>
+                  <c16:uniqueId val="{0000001A-3E2C-4E16-BF92-9663EE46DEFA}"/>
                 </c:ext>
               </c:extLst>
             </c:dLbl>
@@ -2170,7 +3159,7 @@
                 <c:ext xmlns:c15="http://schemas.microsoft.com/office/drawing/2012/chart" uri="{CE6537A1-D6FC-4f65-9D91-7224C49458BB}">
                   <c15:dlblFieldTable>
                     <c15:dlblFTEntry>
-                      <c15:txfldGUID>{3C6C3975-5775-41EA-B7C7-2FD483D2B7DA}</c15:txfldGUID>
+                      <c15:txfldGUID>{2363D300-A358-4418-A499-F4E1095CCDB0}</c15:txfldGUID>
                       <c15:f>'[CURVA ISOLAMENTO TUBULAÇÃO_STH_REUNIAO_COORDENAÇÃO.xlsx]Avanço por SOP'!$AG$28</c15:f>
                       <c15:dlblFieldTableCache>
                         <c:ptCount val="1"/>
@@ -2183,7 +3172,7 @@
                   <c15:showDataLabelsRange val="0"/>
                 </c:ext>
                 <c:ext xmlns:c16="http://schemas.microsoft.com/office/drawing/2014/chart" uri="{C3380CC4-5D6E-409C-BE32-E72D297353CC}">
-                  <c16:uniqueId val="{0000001B-0A4F-4F2F-BF3F-226CF29ADE08}"/>
+                  <c16:uniqueId val="{0000001B-3E2C-4E16-BF92-9663EE46DEFA}"/>
                 </c:ext>
               </c:extLst>
             </c:dLbl>
@@ -2211,7 +3200,7 @@
                 <c:ext xmlns:c15="http://schemas.microsoft.com/office/drawing/2012/chart" uri="{CE6537A1-D6FC-4f65-9D91-7224C49458BB}">
                   <c15:dlblFieldTable>
                     <c15:dlblFTEntry>
-                      <c15:txfldGUID>{5A58538D-2998-48CF-9F0C-B3BE1FD02440}</c15:txfldGUID>
+                      <c15:txfldGUID>{2B1DF31F-3DCE-4701-8C2D-FCD66D881782}</c15:txfldGUID>
                       <c15:f>'[CURVA ISOLAMENTO TUBULAÇÃO_STH_REUNIAO_COORDENAÇÃO.xlsx]Avanço por SOP'!$AG$29</c15:f>
                       <c15:dlblFieldTableCache>
                         <c:ptCount val="1"/>
@@ -2224,7 +3213,7 @@
                   <c15:showDataLabelsRange val="0"/>
                 </c:ext>
                 <c:ext xmlns:c16="http://schemas.microsoft.com/office/drawing/2014/chart" uri="{C3380CC4-5D6E-409C-BE32-E72D297353CC}">
-                  <c16:uniqueId val="{0000001C-0A4F-4F2F-BF3F-226CF29ADE08}"/>
+                  <c16:uniqueId val="{0000001C-3E2C-4E16-BF92-9663EE46DEFA}"/>
                 </c:ext>
               </c:extLst>
             </c:dLbl>
@@ -2252,7 +3241,7 @@
                 <c:ext xmlns:c15="http://schemas.microsoft.com/office/drawing/2012/chart" uri="{CE6537A1-D6FC-4f65-9D91-7224C49458BB}">
                   <c15:dlblFieldTable>
                     <c15:dlblFTEntry>
-                      <c15:txfldGUID>{F6D06062-9FB5-4EA5-9772-F1CDCB7A2E4E}</c15:txfldGUID>
+                      <c15:txfldGUID>{B60CC2E1-8B25-4937-8EEF-1A63DF1BEA77}</c15:txfldGUID>
                       <c15:f>'[CURVA ISOLAMENTO TUBULAÇÃO_STH_REUNIAO_COORDENAÇÃO.xlsx]Avanço por SOP'!$AG$30</c15:f>
                       <c15:dlblFieldTableCache>
                         <c:ptCount val="1"/>
@@ -2265,7 +3254,7 @@
                   <c15:showDataLabelsRange val="0"/>
                 </c:ext>
                 <c:ext xmlns:c16="http://schemas.microsoft.com/office/drawing/2014/chart" uri="{C3380CC4-5D6E-409C-BE32-E72D297353CC}">
-                  <c16:uniqueId val="{0000001D-0A4F-4F2F-BF3F-226CF29ADE08}"/>
+                  <c16:uniqueId val="{0000001D-3E2C-4E16-BF92-9663EE46DEFA}"/>
                 </c:ext>
               </c:extLst>
             </c:dLbl>
@@ -2293,7 +3282,7 @@
                 <c:ext xmlns:c15="http://schemas.microsoft.com/office/drawing/2012/chart" uri="{CE6537A1-D6FC-4f65-9D91-7224C49458BB}">
                   <c15:dlblFieldTable>
                     <c15:dlblFTEntry>
-                      <c15:txfldGUID>{BEE9CE66-1452-4C01-93EB-4A61EFEB3C48}</c15:txfldGUID>
+                      <c15:txfldGUID>{6881C02A-7712-4382-9564-EA4D2AEBC085}</c15:txfldGUID>
                       <c15:f>'[CURVA ISOLAMENTO TUBULAÇÃO_STH_REUNIAO_COORDENAÇÃO.xlsx]Avanço por SOP'!$AG$31</c15:f>
                       <c15:dlblFieldTableCache>
                         <c:ptCount val="1"/>
@@ -2306,7 +3295,7 @@
                   <c15:showDataLabelsRange val="0"/>
                 </c:ext>
                 <c:ext xmlns:c16="http://schemas.microsoft.com/office/drawing/2014/chart" uri="{C3380CC4-5D6E-409C-BE32-E72D297353CC}">
-                  <c16:uniqueId val="{0000001E-0A4F-4F2F-BF3F-226CF29ADE08}"/>
+                  <c16:uniqueId val="{0000001E-3E2C-4E16-BF92-9663EE46DEFA}"/>
                 </c:ext>
               </c:extLst>
             </c:dLbl>
@@ -2334,7 +3323,7 @@
                 <c:ext xmlns:c15="http://schemas.microsoft.com/office/drawing/2012/chart" uri="{CE6537A1-D6FC-4f65-9D91-7224C49458BB}">
                   <c15:dlblFieldTable>
                     <c15:dlblFTEntry>
-                      <c15:txfldGUID>{1FD9AD3D-2592-466A-A770-AC3D35231477}</c15:txfldGUID>
+                      <c15:txfldGUID>{27848A8F-AABC-44C1-A9B9-6B17F8C85A88}</c15:txfldGUID>
                       <c15:f>'[CURVA ISOLAMENTO TUBULAÇÃO_STH_REUNIAO_COORDENAÇÃO.xlsx]Avanço por SOP'!$AG$32</c15:f>
                       <c15:dlblFieldTableCache>
                         <c:ptCount val="1"/>
@@ -2347,7 +3336,7 @@
                   <c15:showDataLabelsRange val="0"/>
                 </c:ext>
                 <c:ext xmlns:c16="http://schemas.microsoft.com/office/drawing/2014/chart" uri="{C3380CC4-5D6E-409C-BE32-E72D297353CC}">
-                  <c16:uniqueId val="{0000001F-0A4F-4F2F-BF3F-226CF29ADE08}"/>
+                  <c16:uniqueId val="{0000001F-3E2C-4E16-BF92-9663EE46DEFA}"/>
                 </c:ext>
               </c:extLst>
             </c:dLbl>
@@ -2375,7 +3364,7 @@
                 <c:ext xmlns:c15="http://schemas.microsoft.com/office/drawing/2012/chart" uri="{CE6537A1-D6FC-4f65-9D91-7224C49458BB}">
                   <c15:dlblFieldTable>
                     <c15:dlblFTEntry>
-                      <c15:txfldGUID>{0CB67725-223C-467C-B4C1-89186B47E74E}</c15:txfldGUID>
+                      <c15:txfldGUID>{CD1F176A-D75E-4B52-B8B5-25D43ABF00FE}</c15:txfldGUID>
                       <c15:f>'[CURVA ISOLAMENTO TUBULAÇÃO_STH_REUNIAO_COORDENAÇÃO.xlsx]Avanço por SOP'!$AG$33</c15:f>
                       <c15:dlblFieldTableCache>
                         <c:ptCount val="1"/>
@@ -2388,7 +3377,7 @@
                   <c15:showDataLabelsRange val="0"/>
                 </c:ext>
                 <c:ext xmlns:c16="http://schemas.microsoft.com/office/drawing/2014/chart" uri="{C3380CC4-5D6E-409C-BE32-E72D297353CC}">
-                  <c16:uniqueId val="{00000020-0A4F-4F2F-BF3F-226CF29ADE08}"/>
+                  <c16:uniqueId val="{00000020-3E2C-4E16-BF92-9663EE46DEFA}"/>
                 </c:ext>
               </c:extLst>
             </c:dLbl>
@@ -2416,7 +3405,7 @@
                 <c:ext xmlns:c15="http://schemas.microsoft.com/office/drawing/2012/chart" uri="{CE6537A1-D6FC-4f65-9D91-7224C49458BB}">
                   <c15:dlblFieldTable>
                     <c15:dlblFTEntry>
-                      <c15:txfldGUID>{D3C4A06A-5EF8-44A2-B6B1-B47023824260}</c15:txfldGUID>
+                      <c15:txfldGUID>{34DE8E49-4648-467F-8B99-DF6404E01D3B}</c15:txfldGUID>
                       <c15:f>'[CURVA ISOLAMENTO TUBULAÇÃO_STH_REUNIAO_COORDENAÇÃO.xlsx]Avanço por SOP'!$AG$34</c15:f>
                       <c15:dlblFieldTableCache>
                         <c:ptCount val="1"/>
@@ -2429,7 +3418,7 @@
                   <c15:showDataLabelsRange val="0"/>
                 </c:ext>
                 <c:ext xmlns:c16="http://schemas.microsoft.com/office/drawing/2014/chart" uri="{C3380CC4-5D6E-409C-BE32-E72D297353CC}">
-                  <c16:uniqueId val="{00000021-0A4F-4F2F-BF3F-226CF29ADE08}"/>
+                  <c16:uniqueId val="{00000021-3E2C-4E16-BF92-9663EE46DEFA}"/>
                 </c:ext>
               </c:extLst>
             </c:dLbl>
@@ -2457,7 +3446,7 @@
                 <c:ext xmlns:c15="http://schemas.microsoft.com/office/drawing/2012/chart" uri="{CE6537A1-D6FC-4f65-9D91-7224C49458BB}">
                   <c15:dlblFieldTable>
                     <c15:dlblFTEntry>
-                      <c15:txfldGUID>{15B1EAD8-26C1-48CD-B4CC-744A875B8AB7}</c15:txfldGUID>
+                      <c15:txfldGUID>{03CA6F1A-961E-49B8-9240-AB85BAA228E9}</c15:txfldGUID>
                       <c15:f>'[CURVA ISOLAMENTO TUBULAÇÃO_STH_REUNIAO_COORDENAÇÃO.xlsx]Avanço por SOP'!$AG$35</c15:f>
                       <c15:dlblFieldTableCache>
                         <c:ptCount val="1"/>
@@ -2470,7 +3459,7 @@
                   <c15:showDataLabelsRange val="0"/>
                 </c:ext>
                 <c:ext xmlns:c16="http://schemas.microsoft.com/office/drawing/2014/chart" uri="{C3380CC4-5D6E-409C-BE32-E72D297353CC}">
-                  <c16:uniqueId val="{00000022-0A4F-4F2F-BF3F-226CF29ADE08}"/>
+                  <c16:uniqueId val="{00000022-3E2C-4E16-BF92-9663EE46DEFA}"/>
                 </c:ext>
               </c:extLst>
             </c:dLbl>
@@ -2498,7 +3487,7 @@
                 <c:ext xmlns:c15="http://schemas.microsoft.com/office/drawing/2012/chart" uri="{CE6537A1-D6FC-4f65-9D91-7224C49458BB}">
                   <c15:dlblFieldTable>
                     <c15:dlblFTEntry>
-                      <c15:txfldGUID>{673FF33F-A063-4E77-A419-2925F7964DD7}</c15:txfldGUID>
+                      <c15:txfldGUID>{96464816-E047-4628-AFE2-1AB580A9C1DC}</c15:txfldGUID>
                       <c15:f>'[CURVA ISOLAMENTO TUBULAÇÃO_STH_REUNIAO_COORDENAÇÃO.xlsx]Avanço por SOP'!$AG$36</c15:f>
                       <c15:dlblFieldTableCache>
                         <c:ptCount val="1"/>
@@ -2511,7 +3500,7 @@
                   <c15:showDataLabelsRange val="0"/>
                 </c:ext>
                 <c:ext xmlns:c16="http://schemas.microsoft.com/office/drawing/2014/chart" uri="{C3380CC4-5D6E-409C-BE32-E72D297353CC}">
-                  <c16:uniqueId val="{00000023-0A4F-4F2F-BF3F-226CF29ADE08}"/>
+                  <c16:uniqueId val="{00000023-3E2C-4E16-BF92-9663EE46DEFA}"/>
                 </c:ext>
               </c:extLst>
             </c:dLbl>
@@ -2539,7 +3528,7 @@
                 <c:ext xmlns:c15="http://schemas.microsoft.com/office/drawing/2012/chart" uri="{CE6537A1-D6FC-4f65-9D91-7224C49458BB}">
                   <c15:dlblFieldTable>
                     <c15:dlblFTEntry>
-                      <c15:txfldGUID>{C74B9AE8-2534-45AD-9D11-F4EF4DD04BCA}</c15:txfldGUID>
+                      <c15:txfldGUID>{81AD955D-E383-4F15-AB35-D443D917D4AE}</c15:txfldGUID>
                       <c15:f>'[CURVA ISOLAMENTO TUBULAÇÃO_STH_REUNIAO_COORDENAÇÃO.xlsx]Avanço por SOP'!$AG$37</c15:f>
                       <c15:dlblFieldTableCache>
                         <c:ptCount val="1"/>
@@ -2552,7 +3541,7 @@
                   <c15:showDataLabelsRange val="0"/>
                 </c:ext>
                 <c:ext xmlns:c16="http://schemas.microsoft.com/office/drawing/2014/chart" uri="{C3380CC4-5D6E-409C-BE32-E72D297353CC}">
-                  <c16:uniqueId val="{00000024-0A4F-4F2F-BF3F-226CF29ADE08}"/>
+                  <c16:uniqueId val="{00000024-3E2C-4E16-BF92-9663EE46DEFA}"/>
                 </c:ext>
               </c:extLst>
             </c:dLbl>
@@ -2580,7 +3569,7 @@
                 <c:ext xmlns:c15="http://schemas.microsoft.com/office/drawing/2012/chart" uri="{CE6537A1-D6FC-4f65-9D91-7224C49458BB}">
                   <c15:dlblFieldTable>
                     <c15:dlblFTEntry>
-                      <c15:txfldGUID>{8B974745-E205-48B0-8191-7CD581BD29EC}</c15:txfldGUID>
+                      <c15:txfldGUID>{B2A64804-7420-4733-95A4-568BA6B130BB}</c15:txfldGUID>
                       <c15:f>'[CURVA ISOLAMENTO TUBULAÇÃO_STH_REUNIAO_COORDENAÇÃO.xlsx]Avanço por SOP'!$AG$38</c15:f>
                       <c15:dlblFieldTableCache>
                         <c:ptCount val="1"/>
@@ -2593,7 +3582,7 @@
                   <c15:showDataLabelsRange val="0"/>
                 </c:ext>
                 <c:ext xmlns:c16="http://schemas.microsoft.com/office/drawing/2014/chart" uri="{C3380CC4-5D6E-409C-BE32-E72D297353CC}">
-                  <c16:uniqueId val="{00000025-0A4F-4F2F-BF3F-226CF29ADE08}"/>
+                  <c16:uniqueId val="{00000025-3E2C-4E16-BF92-9663EE46DEFA}"/>
                 </c:ext>
               </c:extLst>
             </c:dLbl>
@@ -2621,7 +3610,7 @@
                 <c:ext xmlns:c15="http://schemas.microsoft.com/office/drawing/2012/chart" uri="{CE6537A1-D6FC-4f65-9D91-7224C49458BB}">
                   <c15:dlblFieldTable>
                     <c15:dlblFTEntry>
-                      <c15:txfldGUID>{E6486CFA-7880-4088-B987-42CEF4B30C0B}</c15:txfldGUID>
+                      <c15:txfldGUID>{AE000F69-BF1F-452F-B27B-E8AC06EBF2ED}</c15:txfldGUID>
                       <c15:f>'[CURVA ISOLAMENTO TUBULAÇÃO_STH_REUNIAO_COORDENAÇÃO.xlsx]Avanço por SOP'!$AG$39</c15:f>
                       <c15:dlblFieldTableCache>
                         <c:ptCount val="1"/>
@@ -2634,7 +3623,7 @@
                   <c15:showDataLabelsRange val="0"/>
                 </c:ext>
                 <c:ext xmlns:c16="http://schemas.microsoft.com/office/drawing/2014/chart" uri="{C3380CC4-5D6E-409C-BE32-E72D297353CC}">
-                  <c16:uniqueId val="{00000026-0A4F-4F2F-BF3F-226CF29ADE08}"/>
+                  <c16:uniqueId val="{00000026-3E2C-4E16-BF92-9663EE46DEFA}"/>
                 </c:ext>
               </c:extLst>
             </c:dLbl>
@@ -2662,7 +3651,7 @@
                 <c:ext xmlns:c15="http://schemas.microsoft.com/office/drawing/2012/chart" uri="{CE6537A1-D6FC-4f65-9D91-7224C49458BB}">
                   <c15:dlblFieldTable>
                     <c15:dlblFTEntry>
-                      <c15:txfldGUID>{129DCBF0-19FE-46A3-B4C2-7ABB971025A3}</c15:txfldGUID>
+                      <c15:txfldGUID>{9614A2BB-A6A9-42E5-99BB-913AD7977F40}</c15:txfldGUID>
                       <c15:f>'[CURVA ISOLAMENTO TUBULAÇÃO_STH_REUNIAO_COORDENAÇÃO.xlsx]Avanço por SOP'!$AG$40</c15:f>
                       <c15:dlblFieldTableCache>
                         <c:ptCount val="1"/>
@@ -2675,7 +3664,7 @@
                   <c15:showDataLabelsRange val="0"/>
                 </c:ext>
                 <c:ext xmlns:c16="http://schemas.microsoft.com/office/drawing/2014/chart" uri="{C3380CC4-5D6E-409C-BE32-E72D297353CC}">
-                  <c16:uniqueId val="{00000027-0A4F-4F2F-BF3F-226CF29ADE08}"/>
+                  <c16:uniqueId val="{00000027-3E2C-4E16-BF92-9663EE46DEFA}"/>
                 </c:ext>
               </c:extLst>
             </c:dLbl>
@@ -2703,7 +3692,7 @@
                 <c:ext xmlns:c15="http://schemas.microsoft.com/office/drawing/2012/chart" uri="{CE6537A1-D6FC-4f65-9D91-7224C49458BB}">
                   <c15:dlblFieldTable>
                     <c15:dlblFTEntry>
-                      <c15:txfldGUID>{191A016D-73DF-40CC-B6DA-2ACFA684DB54}</c15:txfldGUID>
+                      <c15:txfldGUID>{4F7CE7FA-9C28-4453-8C99-6BB42D78D293}</c15:txfldGUID>
                       <c15:f>'[CURVA ISOLAMENTO TUBULAÇÃO_STH_REUNIAO_COORDENAÇÃO.xlsx]Avanço por SOP'!$AG$41</c15:f>
                       <c15:dlblFieldTableCache>
                         <c:ptCount val="1"/>
@@ -2716,7 +3705,7 @@
                   <c15:showDataLabelsRange val="0"/>
                 </c:ext>
                 <c:ext xmlns:c16="http://schemas.microsoft.com/office/drawing/2014/chart" uri="{C3380CC4-5D6E-409C-BE32-E72D297353CC}">
-                  <c16:uniqueId val="{00000028-0A4F-4F2F-BF3F-226CF29ADE08}"/>
+                  <c16:uniqueId val="{00000028-3E2C-4E16-BF92-9663EE46DEFA}"/>
                 </c:ext>
               </c:extLst>
             </c:dLbl>
@@ -2744,7 +3733,7 @@
                 <c:ext xmlns:c15="http://schemas.microsoft.com/office/drawing/2012/chart" uri="{CE6537A1-D6FC-4f65-9D91-7224C49458BB}">
                   <c15:dlblFieldTable>
                     <c15:dlblFTEntry>
-                      <c15:txfldGUID>{0F3BEC20-64AB-45EF-9848-7F86E53AFFD6}</c15:txfldGUID>
+                      <c15:txfldGUID>{BD625A32-1D48-47A0-859B-9BDB9AC56AB6}</c15:txfldGUID>
                       <c15:f>'[CURVA ISOLAMENTO TUBULAÇÃO_STH_REUNIAO_COORDENAÇÃO.xlsx]Avanço por SOP'!$AG$42</c15:f>
                       <c15:dlblFieldTableCache>
                         <c:ptCount val="1"/>
@@ -2757,7 +3746,7 @@
                   <c15:showDataLabelsRange val="0"/>
                 </c:ext>
                 <c:ext xmlns:c16="http://schemas.microsoft.com/office/drawing/2014/chart" uri="{C3380CC4-5D6E-409C-BE32-E72D297353CC}">
-                  <c16:uniqueId val="{00000029-0A4F-4F2F-BF3F-226CF29ADE08}"/>
+                  <c16:uniqueId val="{00000029-3E2C-4E16-BF92-9663EE46DEFA}"/>
                 </c:ext>
               </c:extLst>
             </c:dLbl>
@@ -2785,7 +3774,7 @@
                 <c:ext xmlns:c15="http://schemas.microsoft.com/office/drawing/2012/chart" uri="{CE6537A1-D6FC-4f65-9D91-7224C49458BB}">
                   <c15:dlblFieldTable>
                     <c15:dlblFTEntry>
-                      <c15:txfldGUID>{D775A80C-C115-4D81-832D-50BD0D378377}</c15:txfldGUID>
+                      <c15:txfldGUID>{7539241B-2BAE-431E-9537-D63342F6C9BB}</c15:txfldGUID>
                       <c15:f>'[CURVA ISOLAMENTO TUBULAÇÃO_STH_REUNIAO_COORDENAÇÃO.xlsx]Avanço por SOP'!$AG$43</c15:f>
                       <c15:dlblFieldTableCache>
                         <c:ptCount val="1"/>
@@ -2798,7 +3787,7 @@
                   <c15:showDataLabelsRange val="0"/>
                 </c:ext>
                 <c:ext xmlns:c16="http://schemas.microsoft.com/office/drawing/2014/chart" uri="{C3380CC4-5D6E-409C-BE32-E72D297353CC}">
-                  <c16:uniqueId val="{0000002A-0A4F-4F2F-BF3F-226CF29ADE08}"/>
+                  <c16:uniqueId val="{0000002A-3E2C-4E16-BF92-9663EE46DEFA}"/>
                 </c:ext>
               </c:extLst>
             </c:dLbl>
@@ -2826,7 +3815,7 @@
                 <c:ext xmlns:c15="http://schemas.microsoft.com/office/drawing/2012/chart" uri="{CE6537A1-D6FC-4f65-9D91-7224C49458BB}">
                   <c15:dlblFieldTable>
                     <c15:dlblFTEntry>
-                      <c15:txfldGUID>{011D73DE-FFA0-4157-8611-0A1AA6DF1C64}</c15:txfldGUID>
+                      <c15:txfldGUID>{44F12592-E386-4FCD-9489-33F862054565}</c15:txfldGUID>
                       <c15:f>'[CURVA ISOLAMENTO TUBULAÇÃO_STH_REUNIAO_COORDENAÇÃO.xlsx]Avanço por SOP'!$AG$44</c15:f>
                       <c15:dlblFieldTableCache>
                         <c:ptCount val="1"/>
@@ -2839,7 +3828,7 @@
                   <c15:showDataLabelsRange val="0"/>
                 </c:ext>
                 <c:ext xmlns:c16="http://schemas.microsoft.com/office/drawing/2014/chart" uri="{C3380CC4-5D6E-409C-BE32-E72D297353CC}">
-                  <c16:uniqueId val="{0000002B-0A4F-4F2F-BF3F-226CF29ADE08}"/>
+                  <c16:uniqueId val="{0000002B-3E2C-4E16-BF92-9663EE46DEFA}"/>
                 </c:ext>
               </c:extLst>
             </c:dLbl>
@@ -2867,7 +3856,7 @@
                 <c:ext xmlns:c15="http://schemas.microsoft.com/office/drawing/2012/chart" uri="{CE6537A1-D6FC-4f65-9D91-7224C49458BB}">
                   <c15:dlblFieldTable>
                     <c15:dlblFTEntry>
-                      <c15:txfldGUID>{40F79D68-172B-41C3-BC1C-B6FE11FBD0AD}</c15:txfldGUID>
+                      <c15:txfldGUID>{B2644342-7DA4-4371-85EF-37435AC5CD23}</c15:txfldGUID>
                       <c15:f>'[CURVA ISOLAMENTO TUBULAÇÃO_STH_REUNIAO_COORDENAÇÃO.xlsx]Avanço por SOP'!$AG$45</c15:f>
                       <c15:dlblFieldTableCache>
                         <c:ptCount val="1"/>
@@ -2880,7 +3869,7 @@
                   <c15:showDataLabelsRange val="0"/>
                 </c:ext>
                 <c:ext xmlns:c16="http://schemas.microsoft.com/office/drawing/2014/chart" uri="{C3380CC4-5D6E-409C-BE32-E72D297353CC}">
-                  <c16:uniqueId val="{0000002C-0A4F-4F2F-BF3F-226CF29ADE08}"/>
+                  <c16:uniqueId val="{0000002C-3E2C-4E16-BF92-9663EE46DEFA}"/>
                 </c:ext>
               </c:extLst>
             </c:dLbl>
@@ -2908,7 +3897,7 @@
                 <c:ext xmlns:c15="http://schemas.microsoft.com/office/drawing/2012/chart" uri="{CE6537A1-D6FC-4f65-9D91-7224C49458BB}">
                   <c15:dlblFieldTable>
                     <c15:dlblFTEntry>
-                      <c15:txfldGUID>{B97590ED-FE05-4C67-9233-8B08FB0B4DE6}</c15:txfldGUID>
+                      <c15:txfldGUID>{2D861AA6-1305-4EB4-B7BD-9F95D72CEAC4}</c15:txfldGUID>
                       <c15:f>'[CURVA ISOLAMENTO TUBULAÇÃO_STH_REUNIAO_COORDENAÇÃO.xlsx]Avanço por SOP'!$AG$46</c15:f>
                       <c15:dlblFieldTableCache>
                         <c:ptCount val="1"/>
@@ -2921,89 +3910,7 @@
                   <c15:showDataLabelsRange val="0"/>
                 </c:ext>
                 <c:ext xmlns:c16="http://schemas.microsoft.com/office/drawing/2014/chart" uri="{C3380CC4-5D6E-409C-BE32-E72D297353CC}">
-                  <c16:uniqueId val="{0000002D-0A4F-4F2F-BF3F-226CF29ADE08}"/>
-                </c:ext>
-              </c:extLst>
-            </c:dLbl>
-            <c:dLbl>
-              <c:idx val="43"/>
-              <c:tx>
-                <c:strRef>
-                  <c:f>'[CURVA ISOLAMENTO TUBULAÇÃO_STH_REUNIAO_COORDENAÇÃO.xlsx]Avanço por SOP'!$AG$47</c:f>
-                  <c:strCache>
-                    <c:ptCount val="1"/>
-                    <c:pt idx="0">
-                      <c:v>0,0%     0,00/6,47 m</c:v>
-                    </c:pt>
-                  </c:strCache>
-                </c:strRef>
-              </c:tx>
-              <c:dLblPos val="inBase"/>
-              <c:showLegendKey val="0"/>
-              <c:showVal val="1"/>
-              <c:showCatName val="0"/>
-              <c:showSerName val="0"/>
-              <c:showPercent val="0"/>
-              <c:showBubbleSize val="0"/>
-              <c:extLst>
-                <c:ext xmlns:c15="http://schemas.microsoft.com/office/drawing/2012/chart" uri="{CE6537A1-D6FC-4f65-9D91-7224C49458BB}">
-                  <c15:dlblFieldTable>
-                    <c15:dlblFTEntry>
-                      <c15:txfldGUID>{965B9713-8E1B-44BC-A857-94D1E557C651}</c15:txfldGUID>
-                      <c15:f>'[CURVA ISOLAMENTO TUBULAÇÃO_STH_REUNIAO_COORDENAÇÃO.xlsx]Avanço por SOP'!$AG$47</c15:f>
-                      <c15:dlblFieldTableCache>
-                        <c:ptCount val="1"/>
-                        <c:pt idx="0">
-                          <c:v>0,0%     0,00/6,47 m</c:v>
-                        </c:pt>
-                      </c15:dlblFieldTableCache>
-                    </c15:dlblFTEntry>
-                  </c15:dlblFieldTable>
-                  <c15:showDataLabelsRange val="0"/>
-                </c:ext>
-                <c:ext xmlns:c16="http://schemas.microsoft.com/office/drawing/2014/chart" uri="{C3380CC4-5D6E-409C-BE32-E72D297353CC}">
-                  <c16:uniqueId val="{0000002E-0A4F-4F2F-BF3F-226CF29ADE08}"/>
-                </c:ext>
-              </c:extLst>
-            </c:dLbl>
-            <c:dLbl>
-              <c:idx val="44"/>
-              <c:tx>
-                <c:strRef>
-                  <c:f>'[CURVA ISOLAMENTO TUBULAÇÃO_STH_REUNIAO_COORDENAÇÃO.xlsx]Avanço por SOP'!$AG$48</c:f>
-                  <c:strCache>
-                    <c:ptCount val="1"/>
-                    <c:pt idx="0">
-                      <c:v>0,0%     0,00/67,58 m</c:v>
-                    </c:pt>
-                  </c:strCache>
-                </c:strRef>
-              </c:tx>
-              <c:dLblPos val="inBase"/>
-              <c:showLegendKey val="0"/>
-              <c:showVal val="1"/>
-              <c:showCatName val="0"/>
-              <c:showSerName val="0"/>
-              <c:showPercent val="0"/>
-              <c:showBubbleSize val="0"/>
-              <c:extLst>
-                <c:ext xmlns:c15="http://schemas.microsoft.com/office/drawing/2012/chart" uri="{CE6537A1-D6FC-4f65-9D91-7224C49458BB}">
-                  <c15:dlblFieldTable>
-                    <c15:dlblFTEntry>
-                      <c15:txfldGUID>{066127A6-C290-4A2B-BE93-50E5C6E0C472}</c15:txfldGUID>
-                      <c15:f>'[CURVA ISOLAMENTO TUBULAÇÃO_STH_REUNIAO_COORDENAÇÃO.xlsx]Avanço por SOP'!$AG$48</c15:f>
-                      <c15:dlblFieldTableCache>
-                        <c:ptCount val="1"/>
-                        <c:pt idx="0">
-                          <c:v>0,0%     0,00/67,58 m</c:v>
-                        </c:pt>
-                      </c15:dlblFieldTableCache>
-                    </c15:dlblFTEntry>
-                  </c15:dlblFieldTable>
-                  <c15:showDataLabelsRange val="0"/>
-                </c:ext>
-                <c:ext xmlns:c16="http://schemas.microsoft.com/office/drawing/2014/chart" uri="{C3380CC4-5D6E-409C-BE32-E72D297353CC}">
-                  <c16:uniqueId val="{0000002F-0A4F-4F2F-BF3F-226CF29ADE08}"/>
+                  <c16:uniqueId val="{0000002D-3E2C-4E16-BF92-9663EE46DEFA}"/>
                 </c:ext>
               </c:extLst>
             </c:dLbl>
@@ -3065,7 +3972,7 @@
             <c:strRef>
               <c:f>'[CURVA ISOLAMENTO TUBULAÇÃO_STH_REUNIAO_COORDENAÇÃO.xlsx]Avanço por SOP'!$AA$4:$AA$48</c:f>
               <c:strCache>
-                <c:ptCount val="45"/>
+                <c:ptCount val="43"/>
                 <c:pt idx="0">
                   <c:v>0012-0001-0069</c:v>
                 </c:pt>
@@ -3195,13 +4102,8 @@
                 <c:pt idx="42">
                   <c:v>1200-5550-0016</c:v>
                 </c:pt>
-                <c:pt idx="43">
-                  <c:v>LINHA NÃO CADASTRADA NO CT</c:v>
-                </c:pt>
-                <c:pt idx="44">
-                  <c:v>NÃO DEFINIDO</c:v>
-                </c:pt>
               </c:strCache>
+              <c:extLst/>
             </c:strRef>
           </c:cat>
           <c:val>
@@ -3209,7 +4111,7 @@
               <c:f>'[CURVA ISOLAMENTO TUBULAÇÃO_STH_REUNIAO_COORDENAÇÃO.xlsx]Avanço por SOP'!$AE$4:$AE$48</c:f>
               <c:numCache>
                 <c:formatCode>0.0%</c:formatCode>
-                <c:ptCount val="45"/>
+                <c:ptCount val="43"/>
                 <c:pt idx="0">
                   <c:v>0.55000000000000004</c:v>
                 </c:pt>
@@ -3339,18 +4241,13 @@
                 <c:pt idx="42">
                   <c:v>0.55000000000000004</c:v>
                 </c:pt>
-                <c:pt idx="43">
-                  <c:v>0.55000000000000004</c:v>
-                </c:pt>
-                <c:pt idx="44">
-                  <c:v>0.55000000000000004</c:v>
-                </c:pt>
               </c:numCache>
+              <c:extLst/>
             </c:numRef>
           </c:val>
           <c:extLst>
             <c:ext xmlns:c16="http://schemas.microsoft.com/office/drawing/2014/chart" uri="{C3380CC4-5D6E-409C-BE32-E72D297353CC}">
-              <c16:uniqueId val="{00000030-0A4F-4F2F-BF3F-226CF29ADE08}"/>
+              <c16:uniqueId val="{0000002E-3E2C-4E16-BF92-9663EE46DEFA}"/>
             </c:ext>
           </c:extLst>
         </c:ser>
@@ -4432,6 +5329,222 @@
         <p:cNvPr id="1" name="">
           <a:extLst>
             <a:ext uri="{FF2B5EF4-FFF2-40B4-BE49-F238E27FC236}">
+              <a16:creationId xmlns:a16="http://schemas.microsoft.com/office/drawing/2014/main" id="{C397DAD2-1F17-A821-131E-1DEF22AC9941}"/>
+            </a:ext>
+          </a:extLst>
+        </p:cNvPr>
+        <p:cNvGrpSpPr/>
+        <p:nvPr/>
+      </p:nvGrpSpPr>
+      <p:grpSpPr>
+        <a:xfrm>
+          <a:off x="0" y="0"/>
+          <a:ext cx="0" cy="0"/>
+          <a:chOff x="0" y="0"/>
+          <a:chExt cx="0" cy="0"/>
+        </a:xfrm>
+      </p:grpSpPr>
+      <p:sp>
+        <p:nvSpPr>
+          <p:cNvPr id="2" name="Espaço Reservado para Imagem de Slide 1">
+            <a:extLst>
+              <a:ext uri="{FF2B5EF4-FFF2-40B4-BE49-F238E27FC236}">
+                <a16:creationId xmlns:a16="http://schemas.microsoft.com/office/drawing/2014/main" id="{EFD4BC9F-591A-9308-B088-70E23A5E0EE6}"/>
+              </a:ext>
+            </a:extLst>
+          </p:cNvPr>
+          <p:cNvSpPr>
+            <a:spLocks noGrp="1" noRot="1" noChangeAspect="1"/>
+          </p:cNvSpPr>
+          <p:nvPr>
+            <p:ph type="sldImg"/>
+          </p:nvPr>
+        </p:nvSpPr>
+        <p:spPr/>
+      </p:sp>
+      <p:sp>
+        <p:nvSpPr>
+          <p:cNvPr id="3" name="Espaço Reservado para Anotações 2">
+            <a:extLst>
+              <a:ext uri="{FF2B5EF4-FFF2-40B4-BE49-F238E27FC236}">
+                <a16:creationId xmlns:a16="http://schemas.microsoft.com/office/drawing/2014/main" id="{9E9D673A-1F42-B91F-AF62-1EE2663D3747}"/>
+              </a:ext>
+            </a:extLst>
+          </p:cNvPr>
+          <p:cNvSpPr>
+            <a:spLocks noGrp="1"/>
+          </p:cNvSpPr>
+          <p:nvPr>
+            <p:ph type="body" idx="1"/>
+          </p:nvPr>
+        </p:nvSpPr>
+        <p:spPr/>
+        <p:txBody>
+          <a:bodyPr/>
+          <a:lstStyle/>
+          <a:p>
+            <a:endParaRPr lang="pt-BR"/>
+          </a:p>
+        </p:txBody>
+      </p:sp>
+      <p:sp>
+        <p:nvSpPr>
+          <p:cNvPr id="4" name="Espaço Reservado para Número de Slide 3">
+            <a:extLst>
+              <a:ext uri="{FF2B5EF4-FFF2-40B4-BE49-F238E27FC236}">
+                <a16:creationId xmlns:a16="http://schemas.microsoft.com/office/drawing/2014/main" id="{09FA2F42-7F3E-4389-EA38-22D9AE55EEEE}"/>
+              </a:ext>
+            </a:extLst>
+          </p:cNvPr>
+          <p:cNvSpPr>
+            <a:spLocks noGrp="1"/>
+          </p:cNvSpPr>
+          <p:nvPr>
+            <p:ph type="sldNum" sz="quarter" idx="5"/>
+          </p:nvPr>
+        </p:nvSpPr>
+        <p:spPr/>
+        <p:txBody>
+          <a:bodyPr/>
+          <a:lstStyle/>
+          <a:p>
+            <a:fld id="{37B43C06-5457-4973-B6D0-46A4EF89BDD0}" type="slidenum">
+              <a:rPr lang="pt-BR" smtClean="0"/>
+              <a:t>2</a:t>
+            </a:fld>
+            <a:endParaRPr lang="pt-BR"/>
+          </a:p>
+        </p:txBody>
+      </p:sp>
+    </p:spTree>
+    <p:extLst>
+      <p:ext uri="{BB962C8B-B14F-4D97-AF65-F5344CB8AC3E}">
+        <p14:creationId xmlns:p14="http://schemas.microsoft.com/office/powerpoint/2010/main" val="3462205135"/>
+      </p:ext>
+    </p:extLst>
+  </p:cSld>
+  <p:clrMapOvr>
+    <a:masterClrMapping/>
+  </p:clrMapOvr>
+</p:notes>
+</file>
+
+<file path=ppt/notesSlides/notesSlide3.xml><?xml version="1.0" encoding="utf-8"?>
+<p:notes xmlns:a="http://schemas.openxmlformats.org/drawingml/2006/main" xmlns:r="http://schemas.openxmlformats.org/officeDocument/2006/relationships" xmlns:p="http://schemas.openxmlformats.org/presentationml/2006/main">
+  <p:cSld>
+    <p:spTree>
+      <p:nvGrpSpPr>
+        <p:cNvPr id="1" name="">
+          <a:extLst>
+            <a:ext uri="{FF2B5EF4-FFF2-40B4-BE49-F238E27FC236}">
+              <a16:creationId xmlns:a16="http://schemas.microsoft.com/office/drawing/2014/main" id="{A7A581F4-4BF1-0838-3D65-2EFFCC946092}"/>
+            </a:ext>
+          </a:extLst>
+        </p:cNvPr>
+        <p:cNvGrpSpPr/>
+        <p:nvPr/>
+      </p:nvGrpSpPr>
+      <p:grpSpPr>
+        <a:xfrm>
+          <a:off x="0" y="0"/>
+          <a:ext cx="0" cy="0"/>
+          <a:chOff x="0" y="0"/>
+          <a:chExt cx="0" cy="0"/>
+        </a:xfrm>
+      </p:grpSpPr>
+      <p:sp>
+        <p:nvSpPr>
+          <p:cNvPr id="2" name="Espaço Reservado para Imagem de Slide 1">
+            <a:extLst>
+              <a:ext uri="{FF2B5EF4-FFF2-40B4-BE49-F238E27FC236}">
+                <a16:creationId xmlns:a16="http://schemas.microsoft.com/office/drawing/2014/main" id="{46A42089-21C9-A8B2-C0CD-70BFE576CDA2}"/>
+              </a:ext>
+            </a:extLst>
+          </p:cNvPr>
+          <p:cNvSpPr>
+            <a:spLocks noGrp="1" noRot="1" noChangeAspect="1"/>
+          </p:cNvSpPr>
+          <p:nvPr>
+            <p:ph type="sldImg"/>
+          </p:nvPr>
+        </p:nvSpPr>
+        <p:spPr/>
+      </p:sp>
+      <p:sp>
+        <p:nvSpPr>
+          <p:cNvPr id="3" name="Espaço Reservado para Anotações 2">
+            <a:extLst>
+              <a:ext uri="{FF2B5EF4-FFF2-40B4-BE49-F238E27FC236}">
+                <a16:creationId xmlns:a16="http://schemas.microsoft.com/office/drawing/2014/main" id="{40880D6D-9F69-3052-A82A-0557AE8761DC}"/>
+              </a:ext>
+            </a:extLst>
+          </p:cNvPr>
+          <p:cNvSpPr>
+            <a:spLocks noGrp="1"/>
+          </p:cNvSpPr>
+          <p:nvPr>
+            <p:ph type="body" idx="1"/>
+          </p:nvPr>
+        </p:nvSpPr>
+        <p:spPr/>
+        <p:txBody>
+          <a:bodyPr/>
+          <a:lstStyle/>
+          <a:p>
+            <a:endParaRPr lang="pt-BR"/>
+          </a:p>
+        </p:txBody>
+      </p:sp>
+      <p:sp>
+        <p:nvSpPr>
+          <p:cNvPr id="4" name="Espaço Reservado para Número de Slide 3">
+            <a:extLst>
+              <a:ext uri="{FF2B5EF4-FFF2-40B4-BE49-F238E27FC236}">
+                <a16:creationId xmlns:a16="http://schemas.microsoft.com/office/drawing/2014/main" id="{0C156691-DAC4-4B01-C3F5-6CE7D56F3591}"/>
+              </a:ext>
+            </a:extLst>
+          </p:cNvPr>
+          <p:cNvSpPr>
+            <a:spLocks noGrp="1"/>
+          </p:cNvSpPr>
+          <p:nvPr>
+            <p:ph type="sldNum" sz="quarter" idx="5"/>
+          </p:nvPr>
+        </p:nvSpPr>
+        <p:spPr/>
+        <p:txBody>
+          <a:bodyPr/>
+          <a:lstStyle/>
+          <a:p>
+            <a:fld id="{37B43C06-5457-4973-B6D0-46A4EF89BDD0}" type="slidenum">
+              <a:rPr lang="pt-BR" smtClean="0"/>
+              <a:t>3</a:t>
+            </a:fld>
+            <a:endParaRPr lang="pt-BR"/>
+          </a:p>
+        </p:txBody>
+      </p:sp>
+    </p:spTree>
+    <p:extLst>
+      <p:ext uri="{BB962C8B-B14F-4D97-AF65-F5344CB8AC3E}">
+        <p14:creationId xmlns:p14="http://schemas.microsoft.com/office/powerpoint/2010/main" val="3537749129"/>
+      </p:ext>
+    </p:extLst>
+  </p:cSld>
+  <p:clrMapOvr>
+    <a:masterClrMapping/>
+  </p:clrMapOvr>
+</p:notes>
+</file>
+
+<file path=ppt/notesSlides/notesSlide4.xml><?xml version="1.0" encoding="utf-8"?>
+<p:notes xmlns:a="http://schemas.openxmlformats.org/drawingml/2006/main" xmlns:r="http://schemas.openxmlformats.org/officeDocument/2006/relationships" xmlns:p="http://schemas.openxmlformats.org/presentationml/2006/main">
+  <p:cSld>
+    <p:spTree>
+      <p:nvGrpSpPr>
+        <p:cNvPr id="1" name="">
+          <a:extLst>
+            <a:ext uri="{FF2B5EF4-FFF2-40B4-BE49-F238E27FC236}">
               <a16:creationId xmlns:a16="http://schemas.microsoft.com/office/drawing/2014/main" id="{0787358D-1A93-05BE-C696-BEFEB292EF5D}"/>
             </a:ext>
           </a:extLst>
@@ -4513,7 +5626,7 @@
           <a:p>
             <a:fld id="{37B43C06-5457-4973-B6D0-46A4EF89BDD0}" type="slidenum">
               <a:rPr lang="pt-BR" smtClean="0"/>
-              <a:t>2</a:t>
+              <a:t>4</a:t>
             </a:fld>
             <a:endParaRPr lang="pt-BR"/>
           </a:p>
@@ -4532,7 +5645,7 @@
 </p:notes>
 </file>
 
-<file path=ppt/notesSlides/notesSlide3.xml><?xml version="1.0" encoding="utf-8"?>
+<file path=ppt/notesSlides/notesSlide5.xml><?xml version="1.0" encoding="utf-8"?>
 <p:notes xmlns:a="http://schemas.openxmlformats.org/drawingml/2006/main" xmlns:r="http://schemas.openxmlformats.org/officeDocument/2006/relationships" xmlns:p="http://schemas.openxmlformats.org/presentationml/2006/main">
   <p:cSld>
     <p:spTree>
@@ -4621,7 +5734,7 @@
           <a:p>
             <a:fld id="{37B43C06-5457-4973-B6D0-46A4EF89BDD0}" type="slidenum">
               <a:rPr lang="pt-BR" smtClean="0"/>
-              <a:t>3</a:t>
+              <a:t>5</a:t>
             </a:fld>
             <a:endParaRPr lang="pt-BR"/>
           </a:p>
@@ -8726,6 +9839,4208 @@
         <p:cNvPr id="1" name="">
           <a:extLst>
             <a:ext uri="{FF2B5EF4-FFF2-40B4-BE49-F238E27FC236}">
+              <a16:creationId xmlns:a16="http://schemas.microsoft.com/office/drawing/2014/main" id="{6261104D-2B6A-38A3-91E0-213E3859583E}"/>
+            </a:ext>
+          </a:extLst>
+        </p:cNvPr>
+        <p:cNvGrpSpPr/>
+        <p:nvPr/>
+      </p:nvGrpSpPr>
+      <p:grpSpPr>
+        <a:xfrm>
+          <a:off x="0" y="0"/>
+          <a:ext cx="0" cy="0"/>
+          <a:chOff x="0" y="0"/>
+          <a:chExt cx="0" cy="0"/>
+        </a:xfrm>
+      </p:grpSpPr>
+      <p:sp>
+        <p:nvSpPr>
+          <p:cNvPr id="141" name="Retângulo 140">
+            <a:extLst>
+              <a:ext uri="{FF2B5EF4-FFF2-40B4-BE49-F238E27FC236}">
+                <a16:creationId xmlns:a16="http://schemas.microsoft.com/office/drawing/2014/main" id="{E1266D5E-50D8-9D8A-DF80-7106A948D0AD}"/>
+              </a:ext>
+            </a:extLst>
+          </p:cNvPr>
+          <p:cNvSpPr/>
+          <p:nvPr/>
+        </p:nvSpPr>
+        <p:spPr>
+          <a:xfrm>
+            <a:off x="1207408" y="195362"/>
+            <a:ext cx="10373545" cy="523220"/>
+          </a:xfrm>
+          <a:prstGeom prst="rect">
+            <a:avLst/>
+          </a:prstGeom>
+          <a:noFill/>
+        </p:spPr>
+        <p:txBody>
+          <a:bodyPr wrap="none" lIns="91440" tIns="45720" rIns="91440" bIns="45720">
+            <a:spAutoFit/>
+          </a:bodyPr>
+          <a:lstStyle/>
+          <a:p>
+            <a:pPr algn="ctr"/>
+            <a:r>
+              <a:rPr lang="pt-BR" sz="2800" b="1">
+                <a:ln w="0"/>
+                <a:solidFill>
+                  <a:schemeClr val="accent1"/>
+                </a:solidFill>
+                <a:effectLst>
+                  <a:outerShdw blurRad="38100" dist="25400" dir="5400000" algn="ctr" rotWithShape="0">
+                    <a:srgbClr val="6E747A">
+                      <a:alpha val="43000"/>
+                    </a:srgbClr>
+                  </a:outerShdw>
+                </a:effectLst>
+              </a:rPr>
+              <a:t>ACOMPANHAMENTO VISUAL ISOLAMENTO DE EQUIPAMENTOS</a:t>
+            </a:r>
+          </a:p>
+        </p:txBody>
+      </p:sp>
+      <p:sp>
+        <p:nvSpPr>
+          <p:cNvPr id="142" name="CaixaDeTexto 141">
+            <a:extLst>
+              <a:ext uri="{FF2B5EF4-FFF2-40B4-BE49-F238E27FC236}">
+                <a16:creationId xmlns:a16="http://schemas.microsoft.com/office/drawing/2014/main" id="{4419DFE9-4F24-3206-DC8D-0E7F1BE5F753}"/>
+              </a:ext>
+            </a:extLst>
+          </p:cNvPr>
+          <p:cNvSpPr txBox="1"/>
+          <p:nvPr/>
+        </p:nvSpPr>
+        <p:spPr>
+          <a:xfrm>
+            <a:off x="11554537" y="0"/>
+            <a:ext cx="1247063" cy="584775"/>
+          </a:xfrm>
+          <a:prstGeom prst="rect">
+            <a:avLst/>
+          </a:prstGeom>
+          <a:noFill/>
+        </p:spPr>
+        <p:txBody>
+          <a:bodyPr wrap="square" lIns="91440" tIns="45720" rIns="91440" bIns="45720" rtlCol="0" anchor="t">
+            <a:spAutoFit/>
+          </a:bodyPr>
+          <a:lstStyle/>
+          <a:p>
+            <a:r>
+              <a:rPr lang="pt-BR" sz="1600" b="1" dirty="0">
+                <a:ln w="0"/>
+                <a:solidFill>
+                  <a:schemeClr val="accent1"/>
+                </a:solidFill>
+                <a:effectLst>
+                  <a:outerShdw blurRad="38100" dist="25400" dir="5400000" algn="ctr" rotWithShape="0">
+                    <a:srgbClr val="6E747A">
+                      <a:alpha val="43000"/>
+                    </a:srgbClr>
+                  </a:outerShdw>
+                </a:effectLst>
+              </a:rPr>
+              <a:t>      DATA</a:t>
+            </a:r>
+            <a:r>
+              <a:rPr lang="pt-BR" sz="1600" b="1" dirty="0"/>
+              <a:t>         </a:t>
+            </a:r>
+            <a:r>
+              <a:rPr lang="pt-BR" sz="1600" b="1" dirty="0">
+                <a:ln w="0"/>
+                <a:solidFill>
+                  <a:schemeClr val="accent1"/>
+                </a:solidFill>
+                <a:effectLst>
+                  <a:outerShdw blurRad="38100" dist="25400" dir="5400000" algn="ctr" rotWithShape="0">
+                    <a:srgbClr val="6E747A">
+                      <a:alpha val="43000"/>
+                    </a:srgbClr>
+                  </a:outerShdw>
+                </a:effectLst>
+              </a:rPr>
+              <a:t>27/10/2026</a:t>
+            </a:r>
+          </a:p>
+        </p:txBody>
+      </p:sp>
+      <p:pic>
+        <p:nvPicPr>
+          <p:cNvPr id="25" name="Imagem 24">
+            <a:extLst>
+              <a:ext uri="{FF2B5EF4-FFF2-40B4-BE49-F238E27FC236}">
+                <a16:creationId xmlns:a16="http://schemas.microsoft.com/office/drawing/2014/main" id="{8284EC50-346A-2727-3B84-A80EF8AAF38F}"/>
+              </a:ext>
+            </a:extLst>
+          </p:cNvPr>
+          <p:cNvPicPr/>
+          <p:nvPr/>
+        </p:nvPicPr>
+        <p:blipFill>
+          <a:blip r:embed="rId3">
+            <a:extLst>
+              <a:ext uri="{28A0092B-C50C-407E-A947-70E740481C1C}">
+                <a14:useLocalDpi xmlns:a14="http://schemas.microsoft.com/office/drawing/2010/main" val="0"/>
+              </a:ext>
+            </a:extLst>
+          </a:blip>
+          <a:srcRect/>
+          <a:stretch/>
+        </p:blipFill>
+        <p:spPr>
+          <a:xfrm>
+            <a:off x="0" y="8807117"/>
+            <a:ext cx="2305935" cy="794083"/>
+          </a:xfrm>
+          <a:prstGeom prst="rect">
+            <a:avLst/>
+          </a:prstGeom>
+        </p:spPr>
+      </p:pic>
+      <p:sp>
+        <p:nvSpPr>
+          <p:cNvPr id="32" name="CaixaDeTexto 31">
+            <a:extLst>
+              <a:ext uri="{FF2B5EF4-FFF2-40B4-BE49-F238E27FC236}">
+                <a16:creationId xmlns:a16="http://schemas.microsoft.com/office/drawing/2014/main" id="{E9983EEB-93C0-F9FD-9DB2-DECBCB7A126E}"/>
+              </a:ext>
+            </a:extLst>
+          </p:cNvPr>
+          <p:cNvSpPr txBox="1"/>
+          <p:nvPr/>
+        </p:nvSpPr>
+        <p:spPr>
+          <a:xfrm>
+            <a:off x="0" y="8499340"/>
+            <a:ext cx="3167357" cy="307777"/>
+          </a:xfrm>
+          <a:prstGeom prst="rect">
+            <a:avLst/>
+          </a:prstGeom>
+          <a:noFill/>
+        </p:spPr>
+        <p:txBody>
+          <a:bodyPr wrap="square" rtlCol="0">
+            <a:spAutoFit/>
+          </a:bodyPr>
+          <a:lstStyle/>
+          <a:p>
+            <a:r>
+              <a:rPr lang="pt-BR" sz="1400" b="1"/>
+              <a:t>LEGENDA:</a:t>
+            </a:r>
+          </a:p>
+        </p:txBody>
+      </p:sp>
+      <p:pic>
+        <p:nvPicPr>
+          <p:cNvPr id="3" name="Imagem 2">
+            <a:extLst>
+              <a:ext uri="{FF2B5EF4-FFF2-40B4-BE49-F238E27FC236}">
+                <a16:creationId xmlns:a16="http://schemas.microsoft.com/office/drawing/2014/main" id="{D98D23A1-CBF2-64DC-DFE6-D50564CD0364}"/>
+              </a:ext>
+            </a:extLst>
+          </p:cNvPr>
+          <p:cNvPicPr>
+            <a:picLocks noChangeAspect="1"/>
+          </p:cNvPicPr>
+          <p:nvPr/>
+        </p:nvPicPr>
+        <p:blipFill>
+          <a:blip r:embed="rId4">
+            <a:extLst>
+              <a:ext uri="{28A0092B-C50C-407E-A947-70E740481C1C}">
+                <a14:useLocalDpi xmlns:a14="http://schemas.microsoft.com/office/drawing/2010/main" val="0"/>
+              </a:ext>
+            </a:extLst>
+          </a:blip>
+          <a:stretch>
+            <a:fillRect/>
+          </a:stretch>
+        </p:blipFill>
+        <p:spPr>
+          <a:xfrm>
+            <a:off x="0" y="1167713"/>
+            <a:ext cx="12801600" cy="7265773"/>
+          </a:xfrm>
+          <a:prstGeom prst="rect">
+            <a:avLst/>
+          </a:prstGeom>
+        </p:spPr>
+      </p:pic>
+    </p:spTree>
+    <p:extLst>
+      <p:ext uri="{BB962C8B-B14F-4D97-AF65-F5344CB8AC3E}">
+        <p14:creationId xmlns:p14="http://schemas.microsoft.com/office/powerpoint/2010/main" val="1103941574"/>
+      </p:ext>
+    </p:extLst>
+  </p:cSld>
+  <p:clrMapOvr>
+    <a:masterClrMapping/>
+  </p:clrMapOvr>
+</p:sld>
+</file>
+
+<file path=ppt/slides/slide3.xml><?xml version="1.0" encoding="utf-8"?>
+<p:sld xmlns:a="http://schemas.openxmlformats.org/drawingml/2006/main" xmlns:r="http://schemas.openxmlformats.org/officeDocument/2006/relationships" xmlns:p="http://schemas.openxmlformats.org/presentationml/2006/main">
+  <p:cSld>
+    <p:spTree>
+      <p:nvGrpSpPr>
+        <p:cNvPr id="1" name="">
+          <a:extLst>
+            <a:ext uri="{FF2B5EF4-FFF2-40B4-BE49-F238E27FC236}">
+              <a16:creationId xmlns:a16="http://schemas.microsoft.com/office/drawing/2014/main" id="{CE72B194-3343-835D-5FB5-6A225F55D9EA}"/>
+            </a:ext>
+          </a:extLst>
+        </p:cNvPr>
+        <p:cNvGrpSpPr/>
+        <p:nvPr/>
+      </p:nvGrpSpPr>
+      <p:grpSpPr>
+        <a:xfrm>
+          <a:off x="0" y="0"/>
+          <a:ext cx="0" cy="0"/>
+          <a:chOff x="0" y="0"/>
+          <a:chExt cx="0" cy="0"/>
+        </a:xfrm>
+      </p:grpSpPr>
+      <p:sp>
+        <p:nvSpPr>
+          <p:cNvPr id="141" name="Retângulo 140">
+            <a:extLst>
+              <a:ext uri="{FF2B5EF4-FFF2-40B4-BE49-F238E27FC236}">
+                <a16:creationId xmlns:a16="http://schemas.microsoft.com/office/drawing/2014/main" id="{C5D020E4-F8BA-A993-5912-3495E7BDAEBC}"/>
+              </a:ext>
+            </a:extLst>
+          </p:cNvPr>
+          <p:cNvSpPr/>
+          <p:nvPr/>
+        </p:nvSpPr>
+        <p:spPr>
+          <a:xfrm>
+            <a:off x="1141190" y="20310"/>
+            <a:ext cx="10474279" cy="523220"/>
+          </a:xfrm>
+          <a:prstGeom prst="rect">
+            <a:avLst/>
+          </a:prstGeom>
+          <a:noFill/>
+        </p:spPr>
+        <p:txBody>
+          <a:bodyPr wrap="none" lIns="91440" tIns="45720" rIns="91440" bIns="45720">
+            <a:spAutoFit/>
+          </a:bodyPr>
+          <a:lstStyle/>
+          <a:p>
+            <a:pPr algn="ctr"/>
+            <a:r>
+              <a:rPr lang="pt-BR" sz="2800" b="1">
+                <a:ln w="0"/>
+                <a:solidFill>
+                  <a:schemeClr val="accent1"/>
+                </a:solidFill>
+                <a:effectLst>
+                  <a:outerShdw blurRad="38100" dist="25400" dir="5400000" algn="ctr" rotWithShape="0">
+                    <a:srgbClr val="6E747A">
+                      <a:alpha val="43000"/>
+                    </a:srgbClr>
+                  </a:outerShdw>
+                </a:effectLst>
+              </a:rPr>
+              <a:t>MAPA VISUAL DE AVANÇO DE ISOLAMENTO DE EQUIPAMENTOS </a:t>
+            </a:r>
+          </a:p>
+        </p:txBody>
+      </p:sp>
+      <p:sp>
+        <p:nvSpPr>
+          <p:cNvPr id="142" name="CaixaDeTexto 141">
+            <a:extLst>
+              <a:ext uri="{FF2B5EF4-FFF2-40B4-BE49-F238E27FC236}">
+                <a16:creationId xmlns:a16="http://schemas.microsoft.com/office/drawing/2014/main" id="{D0865088-777C-9BC9-972E-5B3864497F21}"/>
+              </a:ext>
+            </a:extLst>
+          </p:cNvPr>
+          <p:cNvSpPr txBox="1"/>
+          <p:nvPr/>
+        </p:nvSpPr>
+        <p:spPr>
+          <a:xfrm>
+            <a:off x="11554537" y="0"/>
+            <a:ext cx="1247063" cy="584775"/>
+          </a:xfrm>
+          <a:prstGeom prst="rect">
+            <a:avLst/>
+          </a:prstGeom>
+          <a:noFill/>
+        </p:spPr>
+        <p:txBody>
+          <a:bodyPr wrap="square" rtlCol="0">
+            <a:spAutoFit/>
+          </a:bodyPr>
+          <a:lstStyle/>
+          <a:p>
+            <a:r>
+              <a:rPr lang="pt-BR" sz="1600" b="1" dirty="0">
+                <a:ln w="0"/>
+                <a:solidFill>
+                  <a:schemeClr val="accent1"/>
+                </a:solidFill>
+                <a:effectLst>
+                  <a:outerShdw blurRad="38100" dist="25400" dir="5400000" algn="ctr" rotWithShape="0">
+                    <a:srgbClr val="6E747A">
+                      <a:alpha val="43000"/>
+                    </a:srgbClr>
+                  </a:outerShdw>
+                </a:effectLst>
+              </a:rPr>
+              <a:t>      DATA</a:t>
+            </a:r>
+            <a:r>
+              <a:rPr lang="pt-BR" sz="1600" b="1" dirty="0"/>
+              <a:t>         </a:t>
+            </a:r>
+            <a:r>
+              <a:rPr lang="pt-BR" sz="1600" b="1" dirty="0">
+                <a:ln w="0"/>
+                <a:solidFill>
+                  <a:schemeClr val="accent1"/>
+                </a:solidFill>
+                <a:effectLst>
+                  <a:outerShdw blurRad="38100" dist="25400" dir="5400000" algn="ctr" rotWithShape="0">
+                    <a:srgbClr val="6E747A">
+                      <a:alpha val="43000"/>
+                    </a:srgbClr>
+                  </a:outerShdw>
+                </a:effectLst>
+              </a:rPr>
+              <a:t>27/10/2026</a:t>
+            </a:r>
+          </a:p>
+        </p:txBody>
+      </p:sp>
+      <p:grpSp>
+        <p:nvGrpSpPr>
+          <p:cNvPr id="2" name="Agrupar 1">
+            <a:extLst>
+              <a:ext uri="{FF2B5EF4-FFF2-40B4-BE49-F238E27FC236}">
+                <a16:creationId xmlns:a16="http://schemas.microsoft.com/office/drawing/2014/main" id="{88571073-2313-A559-87B4-1578F8C75C08}"/>
+              </a:ext>
+            </a:extLst>
+          </p:cNvPr>
+          <p:cNvGrpSpPr>
+            <a:grpSpLocks noGrp="1" noUngrp="1" noRot="1" noMove="1" noResize="1"/>
+          </p:cNvGrpSpPr>
+          <p:nvPr/>
+        </p:nvGrpSpPr>
+        <p:grpSpPr>
+          <a:xfrm>
+            <a:off x="123527" y="543530"/>
+            <a:ext cx="12678073" cy="3892750"/>
+            <a:chOff x="123527" y="673549"/>
+            <a:chExt cx="12678073" cy="3892750"/>
+          </a:xfrm>
+        </p:grpSpPr>
+        <p:pic>
+          <p:nvPicPr>
+            <p:cNvPr id="3" name="Imagem 2">
+              <a:extLst>
+                <a:ext uri="{FF2B5EF4-FFF2-40B4-BE49-F238E27FC236}">
+                  <a16:creationId xmlns:a16="http://schemas.microsoft.com/office/drawing/2014/main" id="{6DBB5C58-151D-8F42-F027-A6721079CAE2}"/>
+                </a:ext>
+              </a:extLst>
+            </p:cNvPr>
+            <p:cNvPicPr>
+              <a:picLocks noGrp="1" noRot="1" noChangeAspect="1" noMove="1" noResize="1" noEditPoints="1" noAdjustHandles="1" noChangeArrowheads="1" noChangeShapeType="1" noCrop="1"/>
+            </p:cNvPicPr>
+            <p:nvPr/>
+          </p:nvPicPr>
+          <p:blipFill>
+            <a:blip r:embed="rId3"/>
+            <a:stretch>
+              <a:fillRect/>
+            </a:stretch>
+          </p:blipFill>
+          <p:spPr>
+            <a:xfrm>
+              <a:off x="123527" y="673549"/>
+              <a:ext cx="11589346" cy="3892750"/>
+            </a:xfrm>
+            <a:prstGeom prst="rect">
+              <a:avLst/>
+            </a:prstGeom>
+          </p:spPr>
+        </p:pic>
+        <p:pic>
+          <p:nvPicPr>
+            <p:cNvPr id="4" name="Imagem 3">
+              <a:extLst>
+                <a:ext uri="{FF2B5EF4-FFF2-40B4-BE49-F238E27FC236}">
+                  <a16:creationId xmlns:a16="http://schemas.microsoft.com/office/drawing/2014/main" id="{A80E72BE-CB2F-8D3F-93D8-4377103A04AB}"/>
+                </a:ext>
+              </a:extLst>
+            </p:cNvPr>
+            <p:cNvPicPr>
+              <a:picLocks noGrp="1" noRot="1" noChangeAspect="1" noMove="1" noResize="1" noEditPoints="1" noAdjustHandles="1" noChangeArrowheads="1" noChangeShapeType="1" noCrop="1"/>
+            </p:cNvPicPr>
+            <p:nvPr/>
+          </p:nvPicPr>
+          <p:blipFill>
+            <a:blip r:embed="rId4"/>
+            <a:stretch>
+              <a:fillRect/>
+            </a:stretch>
+          </p:blipFill>
+          <p:spPr>
+            <a:xfrm>
+              <a:off x="10991757" y="752391"/>
+              <a:ext cx="1809843" cy="3245017"/>
+            </a:xfrm>
+            <a:prstGeom prst="rect">
+              <a:avLst/>
+            </a:prstGeom>
+          </p:spPr>
+        </p:pic>
+      </p:grpSp>
+      <p:sp>
+        <p:nvSpPr>
+          <p:cNvPr id="5" name="Retângulo 4">
+            <a:extLst>
+              <a:ext uri="{FF2B5EF4-FFF2-40B4-BE49-F238E27FC236}">
+                <a16:creationId xmlns:a16="http://schemas.microsoft.com/office/drawing/2014/main" id="{96293B18-7B71-C69D-6E2E-FA2526B7572E}"/>
+              </a:ext>
+            </a:extLst>
+          </p:cNvPr>
+          <p:cNvSpPr/>
+          <p:nvPr/>
+        </p:nvSpPr>
+        <p:spPr>
+          <a:xfrm>
+            <a:off x="476250" y="711200"/>
+            <a:ext cx="2273300" cy="1822450"/>
+          </a:xfrm>
+          <a:prstGeom prst="rect">
+            <a:avLst/>
+          </a:prstGeom>
+          <a:solidFill>
+            <a:srgbClr val="FFFF00">
+              <a:alpha val="25000"/>
+            </a:srgbClr>
+          </a:solidFill>
+          <a:ln>
+            <a:solidFill>
+              <a:srgbClr val="FFC000"/>
+            </a:solidFill>
+          </a:ln>
+        </p:spPr>
+        <p:style>
+          <a:lnRef idx="2">
+            <a:schemeClr val="accent1">
+              <a:shade val="15000"/>
+            </a:schemeClr>
+          </a:lnRef>
+          <a:fillRef idx="1">
+            <a:schemeClr val="accent1"/>
+          </a:fillRef>
+          <a:effectRef idx="0">
+            <a:schemeClr val="accent1"/>
+          </a:effectRef>
+          <a:fontRef idx="minor">
+            <a:schemeClr val="lt1"/>
+          </a:fontRef>
+        </p:style>
+        <p:txBody>
+          <a:bodyPr rtlCol="0" anchor="ctr"/>
+          <a:lstStyle/>
+          <a:p>
+            <a:pPr algn="ctr"/>
+            <a:endParaRPr lang="pt-BR"/>
+          </a:p>
+        </p:txBody>
+      </p:sp>
+      <p:sp>
+        <p:nvSpPr>
+          <p:cNvPr id="6" name="Retângulo 5">
+            <a:extLst>
+              <a:ext uri="{FF2B5EF4-FFF2-40B4-BE49-F238E27FC236}">
+                <a16:creationId xmlns:a16="http://schemas.microsoft.com/office/drawing/2014/main" id="{3A4C96F1-74E9-5C08-1D68-DBF967CCC241}"/>
+              </a:ext>
+            </a:extLst>
+          </p:cNvPr>
+          <p:cNvSpPr/>
+          <p:nvPr/>
+        </p:nvSpPr>
+        <p:spPr>
+          <a:xfrm>
+            <a:off x="2749550" y="711200"/>
+            <a:ext cx="2012950" cy="1822450"/>
+          </a:xfrm>
+          <a:prstGeom prst="rect">
+            <a:avLst/>
+          </a:prstGeom>
+          <a:solidFill>
+            <a:srgbClr val="FFFF00">
+              <a:alpha val="25000"/>
+            </a:srgbClr>
+          </a:solidFill>
+          <a:ln>
+            <a:solidFill>
+              <a:srgbClr val="FFC000"/>
+            </a:solidFill>
+          </a:ln>
+        </p:spPr>
+        <p:style>
+          <a:lnRef idx="2">
+            <a:schemeClr val="accent1">
+              <a:shade val="15000"/>
+            </a:schemeClr>
+          </a:lnRef>
+          <a:fillRef idx="1">
+            <a:schemeClr val="accent1"/>
+          </a:fillRef>
+          <a:effectRef idx="0">
+            <a:schemeClr val="accent1"/>
+          </a:effectRef>
+          <a:fontRef idx="minor">
+            <a:schemeClr val="lt1"/>
+          </a:fontRef>
+        </p:style>
+        <p:txBody>
+          <a:bodyPr rtlCol="0" anchor="ctr"/>
+          <a:lstStyle/>
+          <a:p>
+            <a:pPr algn="ctr"/>
+            <a:endParaRPr lang="pt-BR"/>
+          </a:p>
+        </p:txBody>
+      </p:sp>
+      <p:sp>
+        <p:nvSpPr>
+          <p:cNvPr id="7" name="Retângulo 6">
+            <a:extLst>
+              <a:ext uri="{FF2B5EF4-FFF2-40B4-BE49-F238E27FC236}">
+                <a16:creationId xmlns:a16="http://schemas.microsoft.com/office/drawing/2014/main" id="{52D99D53-8F42-6D36-1A33-29BAC5B357C0}"/>
+              </a:ext>
+            </a:extLst>
+          </p:cNvPr>
+          <p:cNvSpPr/>
+          <p:nvPr/>
+        </p:nvSpPr>
+        <p:spPr>
+          <a:xfrm>
+            <a:off x="4762500" y="711200"/>
+            <a:ext cx="1085850" cy="1822450"/>
+          </a:xfrm>
+          <a:prstGeom prst="rect">
+            <a:avLst/>
+          </a:prstGeom>
+          <a:solidFill>
+            <a:srgbClr val="FFFF00">
+              <a:alpha val="25000"/>
+            </a:srgbClr>
+          </a:solidFill>
+          <a:ln>
+            <a:solidFill>
+              <a:srgbClr val="FFC000"/>
+            </a:solidFill>
+          </a:ln>
+        </p:spPr>
+        <p:style>
+          <a:lnRef idx="2">
+            <a:schemeClr val="accent1">
+              <a:shade val="15000"/>
+            </a:schemeClr>
+          </a:lnRef>
+          <a:fillRef idx="1">
+            <a:schemeClr val="accent1"/>
+          </a:fillRef>
+          <a:effectRef idx="0">
+            <a:schemeClr val="accent1"/>
+          </a:effectRef>
+          <a:fontRef idx="minor">
+            <a:schemeClr val="lt1"/>
+          </a:fontRef>
+        </p:style>
+        <p:txBody>
+          <a:bodyPr rtlCol="0" anchor="ctr"/>
+          <a:lstStyle/>
+          <a:p>
+            <a:pPr algn="ctr"/>
+            <a:endParaRPr lang="pt-BR"/>
+          </a:p>
+        </p:txBody>
+      </p:sp>
+      <p:sp>
+        <p:nvSpPr>
+          <p:cNvPr id="8" name="Retângulo 7">
+            <a:extLst>
+              <a:ext uri="{FF2B5EF4-FFF2-40B4-BE49-F238E27FC236}">
+                <a16:creationId xmlns:a16="http://schemas.microsoft.com/office/drawing/2014/main" id="{60143CA3-B044-F749-4C15-C9DF83D9D7F6}"/>
+              </a:ext>
+            </a:extLst>
+          </p:cNvPr>
+          <p:cNvSpPr/>
+          <p:nvPr/>
+        </p:nvSpPr>
+        <p:spPr>
+          <a:xfrm>
+            <a:off x="5857875" y="711200"/>
+            <a:ext cx="1008480" cy="1822450"/>
+          </a:xfrm>
+          <a:prstGeom prst="rect">
+            <a:avLst/>
+          </a:prstGeom>
+          <a:solidFill>
+            <a:srgbClr val="FFFF00">
+              <a:alpha val="25000"/>
+            </a:srgbClr>
+          </a:solidFill>
+          <a:ln>
+            <a:solidFill>
+              <a:srgbClr val="FFC000"/>
+            </a:solidFill>
+          </a:ln>
+        </p:spPr>
+        <p:style>
+          <a:lnRef idx="2">
+            <a:schemeClr val="accent1">
+              <a:shade val="15000"/>
+            </a:schemeClr>
+          </a:lnRef>
+          <a:fillRef idx="1">
+            <a:schemeClr val="accent1"/>
+          </a:fillRef>
+          <a:effectRef idx="0">
+            <a:schemeClr val="accent1"/>
+          </a:effectRef>
+          <a:fontRef idx="minor">
+            <a:schemeClr val="lt1"/>
+          </a:fontRef>
+        </p:style>
+        <p:txBody>
+          <a:bodyPr rtlCol="0" anchor="ctr"/>
+          <a:lstStyle/>
+          <a:p>
+            <a:pPr algn="ctr"/>
+            <a:endParaRPr lang="pt-BR"/>
+          </a:p>
+        </p:txBody>
+      </p:sp>
+      <p:sp>
+        <p:nvSpPr>
+          <p:cNvPr id="10" name="Retângulo 9">
+            <a:extLst>
+              <a:ext uri="{FF2B5EF4-FFF2-40B4-BE49-F238E27FC236}">
+                <a16:creationId xmlns:a16="http://schemas.microsoft.com/office/drawing/2014/main" id="{92A1C9D0-D42B-F78C-16C2-6342D0285361}"/>
+              </a:ext>
+            </a:extLst>
+          </p:cNvPr>
+          <p:cNvSpPr/>
+          <p:nvPr/>
+        </p:nvSpPr>
+        <p:spPr>
+          <a:xfrm>
+            <a:off x="476250" y="3054350"/>
+            <a:ext cx="844550" cy="1333500"/>
+          </a:xfrm>
+          <a:prstGeom prst="rect">
+            <a:avLst/>
+          </a:prstGeom>
+          <a:solidFill>
+            <a:srgbClr val="FFFF00">
+              <a:alpha val="25000"/>
+            </a:srgbClr>
+          </a:solidFill>
+          <a:ln>
+            <a:solidFill>
+              <a:srgbClr val="FFC000"/>
+            </a:solidFill>
+          </a:ln>
+        </p:spPr>
+        <p:style>
+          <a:lnRef idx="2">
+            <a:schemeClr val="accent1">
+              <a:shade val="15000"/>
+            </a:schemeClr>
+          </a:lnRef>
+          <a:fillRef idx="1">
+            <a:schemeClr val="accent1"/>
+          </a:fillRef>
+          <a:effectRef idx="0">
+            <a:schemeClr val="accent1"/>
+          </a:effectRef>
+          <a:fontRef idx="minor">
+            <a:schemeClr val="lt1"/>
+          </a:fontRef>
+        </p:style>
+        <p:txBody>
+          <a:bodyPr rtlCol="0" anchor="ctr"/>
+          <a:lstStyle/>
+          <a:p>
+            <a:pPr algn="ctr"/>
+            <a:endParaRPr lang="pt-BR"/>
+          </a:p>
+        </p:txBody>
+      </p:sp>
+      <p:sp>
+        <p:nvSpPr>
+          <p:cNvPr id="12" name="Retângulo 11">
+            <a:extLst>
+              <a:ext uri="{FF2B5EF4-FFF2-40B4-BE49-F238E27FC236}">
+                <a16:creationId xmlns:a16="http://schemas.microsoft.com/office/drawing/2014/main" id="{74601284-9156-CA93-6178-923052AD35C8}"/>
+              </a:ext>
+            </a:extLst>
+          </p:cNvPr>
+          <p:cNvSpPr/>
+          <p:nvPr/>
+        </p:nvSpPr>
+        <p:spPr>
+          <a:xfrm>
+            <a:off x="3708400" y="3054350"/>
+            <a:ext cx="1660432" cy="1333500"/>
+          </a:xfrm>
+          <a:prstGeom prst="rect">
+            <a:avLst/>
+          </a:prstGeom>
+          <a:solidFill>
+            <a:srgbClr val="FFFF00">
+              <a:alpha val="25000"/>
+            </a:srgbClr>
+          </a:solidFill>
+          <a:ln>
+            <a:solidFill>
+              <a:srgbClr val="FFC000"/>
+            </a:solidFill>
+          </a:ln>
+        </p:spPr>
+        <p:style>
+          <a:lnRef idx="2">
+            <a:schemeClr val="accent1">
+              <a:shade val="15000"/>
+            </a:schemeClr>
+          </a:lnRef>
+          <a:fillRef idx="1">
+            <a:schemeClr val="accent1"/>
+          </a:fillRef>
+          <a:effectRef idx="0">
+            <a:schemeClr val="accent1"/>
+          </a:effectRef>
+          <a:fontRef idx="minor">
+            <a:schemeClr val="lt1"/>
+          </a:fontRef>
+        </p:style>
+        <p:txBody>
+          <a:bodyPr rtlCol="0" anchor="ctr"/>
+          <a:lstStyle/>
+          <a:p>
+            <a:pPr algn="ctr"/>
+            <a:endParaRPr lang="pt-BR"/>
+          </a:p>
+        </p:txBody>
+      </p:sp>
+      <p:sp>
+        <p:nvSpPr>
+          <p:cNvPr id="13" name="Retângulo 12">
+            <a:extLst>
+              <a:ext uri="{FF2B5EF4-FFF2-40B4-BE49-F238E27FC236}">
+                <a16:creationId xmlns:a16="http://schemas.microsoft.com/office/drawing/2014/main" id="{A8832B61-C350-821E-ACA4-70DB33771917}"/>
+              </a:ext>
+            </a:extLst>
+          </p:cNvPr>
+          <p:cNvSpPr/>
+          <p:nvPr/>
+        </p:nvSpPr>
+        <p:spPr>
+          <a:xfrm>
+            <a:off x="5368832" y="3054350"/>
+            <a:ext cx="619218" cy="1333500"/>
+          </a:xfrm>
+          <a:prstGeom prst="rect">
+            <a:avLst/>
+          </a:prstGeom>
+          <a:solidFill>
+            <a:srgbClr val="FFFF00">
+              <a:alpha val="25000"/>
+            </a:srgbClr>
+          </a:solidFill>
+          <a:ln>
+            <a:solidFill>
+              <a:srgbClr val="FFC000"/>
+            </a:solidFill>
+          </a:ln>
+        </p:spPr>
+        <p:style>
+          <a:lnRef idx="2">
+            <a:schemeClr val="accent1">
+              <a:shade val="15000"/>
+            </a:schemeClr>
+          </a:lnRef>
+          <a:fillRef idx="1">
+            <a:schemeClr val="accent1"/>
+          </a:fillRef>
+          <a:effectRef idx="0">
+            <a:schemeClr val="accent1"/>
+          </a:effectRef>
+          <a:fontRef idx="minor">
+            <a:schemeClr val="lt1"/>
+          </a:fontRef>
+        </p:style>
+        <p:txBody>
+          <a:bodyPr rtlCol="0" anchor="ctr"/>
+          <a:lstStyle/>
+          <a:p>
+            <a:pPr algn="ctr"/>
+            <a:endParaRPr lang="pt-BR"/>
+          </a:p>
+        </p:txBody>
+      </p:sp>
+      <p:sp>
+        <p:nvSpPr>
+          <p:cNvPr id="14" name="Retângulo 13">
+            <a:extLst>
+              <a:ext uri="{FF2B5EF4-FFF2-40B4-BE49-F238E27FC236}">
+                <a16:creationId xmlns:a16="http://schemas.microsoft.com/office/drawing/2014/main" id="{CB842D0A-C579-E440-E1B5-C4B6FC9F63BD}"/>
+              </a:ext>
+            </a:extLst>
+          </p:cNvPr>
+          <p:cNvSpPr/>
+          <p:nvPr/>
+        </p:nvSpPr>
+        <p:spPr>
+          <a:xfrm>
+            <a:off x="5988050" y="3054350"/>
+            <a:ext cx="619218" cy="1333500"/>
+          </a:xfrm>
+          <a:prstGeom prst="rect">
+            <a:avLst/>
+          </a:prstGeom>
+          <a:solidFill>
+            <a:srgbClr val="FFFF00">
+              <a:alpha val="25000"/>
+            </a:srgbClr>
+          </a:solidFill>
+          <a:ln>
+            <a:solidFill>
+              <a:srgbClr val="FFC000"/>
+            </a:solidFill>
+          </a:ln>
+        </p:spPr>
+        <p:style>
+          <a:lnRef idx="2">
+            <a:schemeClr val="accent1">
+              <a:shade val="15000"/>
+            </a:schemeClr>
+          </a:lnRef>
+          <a:fillRef idx="1">
+            <a:schemeClr val="accent1"/>
+          </a:fillRef>
+          <a:effectRef idx="0">
+            <a:schemeClr val="accent1"/>
+          </a:effectRef>
+          <a:fontRef idx="minor">
+            <a:schemeClr val="lt1"/>
+          </a:fontRef>
+        </p:style>
+        <p:txBody>
+          <a:bodyPr rtlCol="0" anchor="ctr"/>
+          <a:lstStyle/>
+          <a:p>
+            <a:pPr algn="ctr"/>
+            <a:endParaRPr lang="pt-BR"/>
+          </a:p>
+        </p:txBody>
+      </p:sp>
+      <p:sp>
+        <p:nvSpPr>
+          <p:cNvPr id="15" name="Retângulo 14">
+            <a:extLst>
+              <a:ext uri="{FF2B5EF4-FFF2-40B4-BE49-F238E27FC236}">
+                <a16:creationId xmlns:a16="http://schemas.microsoft.com/office/drawing/2014/main" id="{02CF2F32-81B4-BC1D-8282-1A1577716B40}"/>
+              </a:ext>
+            </a:extLst>
+          </p:cNvPr>
+          <p:cNvSpPr/>
+          <p:nvPr/>
+        </p:nvSpPr>
+        <p:spPr>
+          <a:xfrm>
+            <a:off x="6607267" y="3054350"/>
+            <a:ext cx="1435099" cy="1333500"/>
+          </a:xfrm>
+          <a:prstGeom prst="rect">
+            <a:avLst/>
+          </a:prstGeom>
+          <a:solidFill>
+            <a:srgbClr val="FFFF00">
+              <a:alpha val="25000"/>
+            </a:srgbClr>
+          </a:solidFill>
+          <a:ln>
+            <a:solidFill>
+              <a:srgbClr val="FFC000"/>
+            </a:solidFill>
+          </a:ln>
+        </p:spPr>
+        <p:style>
+          <a:lnRef idx="2">
+            <a:schemeClr val="accent1">
+              <a:shade val="15000"/>
+            </a:schemeClr>
+          </a:lnRef>
+          <a:fillRef idx="1">
+            <a:schemeClr val="accent1"/>
+          </a:fillRef>
+          <a:effectRef idx="0">
+            <a:schemeClr val="accent1"/>
+          </a:effectRef>
+          <a:fontRef idx="minor">
+            <a:schemeClr val="lt1"/>
+          </a:fontRef>
+        </p:style>
+        <p:txBody>
+          <a:bodyPr rtlCol="0" anchor="ctr"/>
+          <a:lstStyle/>
+          <a:p>
+            <a:pPr algn="ctr"/>
+            <a:endParaRPr lang="pt-BR"/>
+          </a:p>
+        </p:txBody>
+      </p:sp>
+      <p:grpSp>
+        <p:nvGrpSpPr>
+          <p:cNvPr id="25" name="Agrupar 24">
+            <a:extLst>
+              <a:ext uri="{FF2B5EF4-FFF2-40B4-BE49-F238E27FC236}">
+                <a16:creationId xmlns:a16="http://schemas.microsoft.com/office/drawing/2014/main" id="{0A7B2DC8-6487-E04A-AC3F-FC6344E31629}"/>
+              </a:ext>
+            </a:extLst>
+          </p:cNvPr>
+          <p:cNvGrpSpPr>
+            <a:grpSpLocks noGrp="1" noUngrp="1" noRot="1" noMove="1" noResize="1"/>
+          </p:cNvGrpSpPr>
+          <p:nvPr/>
+        </p:nvGrpSpPr>
+        <p:grpSpPr>
+          <a:xfrm>
+            <a:off x="6032225" y="4436280"/>
+            <a:ext cx="6582003" cy="1748271"/>
+            <a:chOff x="284352" y="4402319"/>
+            <a:chExt cx="6582003" cy="1748271"/>
+          </a:xfrm>
+        </p:grpSpPr>
+        <p:pic>
+          <p:nvPicPr>
+            <p:cNvPr id="22" name="Imagem 21">
+              <a:extLst>
+                <a:ext uri="{FF2B5EF4-FFF2-40B4-BE49-F238E27FC236}">
+                  <a16:creationId xmlns:a16="http://schemas.microsoft.com/office/drawing/2014/main" id="{1B0B7002-028B-ABE9-5C31-134A6D476F21}"/>
+                </a:ext>
+              </a:extLst>
+            </p:cNvPr>
+            <p:cNvPicPr>
+              <a:picLocks noGrp="1" noRot="1" noChangeAspect="1" noMove="1" noResize="1" noEditPoints="1" noAdjustHandles="1" noChangeArrowheads="1" noChangeShapeType="1" noCrop="1"/>
+            </p:cNvPicPr>
+            <p:nvPr/>
+          </p:nvPicPr>
+          <p:blipFill>
+            <a:blip r:embed="rId5"/>
+            <a:stretch>
+              <a:fillRect/>
+            </a:stretch>
+          </p:blipFill>
+          <p:spPr>
+            <a:xfrm>
+              <a:off x="284352" y="4402319"/>
+              <a:ext cx="6582003" cy="1748271"/>
+            </a:xfrm>
+            <a:prstGeom prst="rect">
+              <a:avLst/>
+            </a:prstGeom>
+          </p:spPr>
+        </p:pic>
+        <p:sp>
+          <p:nvSpPr>
+            <p:cNvPr id="26" name="Retângulo 25">
+              <a:extLst>
+                <a:ext uri="{FF2B5EF4-FFF2-40B4-BE49-F238E27FC236}">
+                  <a16:creationId xmlns:a16="http://schemas.microsoft.com/office/drawing/2014/main" id="{0BBBFEF5-E6E5-F634-B824-9C45B7FB83C6}"/>
+                </a:ext>
+              </a:extLst>
+            </p:cNvPr>
+            <p:cNvSpPr>
+              <a:spLocks noGrp="1" noRot="1" noMove="1" noResize="1" noEditPoints="1" noAdjustHandles="1" noChangeArrowheads="1" noChangeShapeType="1"/>
+            </p:cNvSpPr>
+            <p:nvPr/>
+          </p:nvSpPr>
+          <p:spPr>
+            <a:xfrm>
+              <a:off x="763587" y="4940896"/>
+              <a:ext cx="1649414" cy="393104"/>
+            </a:xfrm>
+            <a:prstGeom prst="rect">
+              <a:avLst/>
+            </a:prstGeom>
+            <a:solidFill>
+              <a:schemeClr val="accent6">
+                <a:lumMod val="60000"/>
+                <a:lumOff val="40000"/>
+                <a:alpha val="25000"/>
+              </a:schemeClr>
+            </a:solidFill>
+            <a:ln>
+              <a:solidFill>
+                <a:srgbClr val="00B050"/>
+              </a:solidFill>
+            </a:ln>
+          </p:spPr>
+          <p:style>
+            <a:lnRef idx="2">
+              <a:schemeClr val="accent1">
+                <a:shade val="15000"/>
+              </a:schemeClr>
+            </a:lnRef>
+            <a:fillRef idx="1">
+              <a:schemeClr val="accent1"/>
+            </a:fillRef>
+            <a:effectRef idx="0">
+              <a:schemeClr val="accent1"/>
+            </a:effectRef>
+            <a:fontRef idx="minor">
+              <a:schemeClr val="lt1"/>
+            </a:fontRef>
+          </p:style>
+          <p:txBody>
+            <a:bodyPr rtlCol="0" anchor="ctr"/>
+            <a:lstStyle/>
+            <a:p>
+              <a:pPr algn="ctr"/>
+              <a:endParaRPr lang="pt-BR">
+                <a:highlight>
+                  <a:srgbClr val="00FF00"/>
+                </a:highlight>
+              </a:endParaRPr>
+            </a:p>
+          </p:txBody>
+        </p:sp>
+      </p:grpSp>
+      <p:sp>
+        <p:nvSpPr>
+          <p:cNvPr id="30" name="CaixaDeTexto 29">
+            <a:extLst>
+              <a:ext uri="{FF2B5EF4-FFF2-40B4-BE49-F238E27FC236}">
+                <a16:creationId xmlns:a16="http://schemas.microsoft.com/office/drawing/2014/main" id="{7F9EBDC7-3E14-7970-004A-0D4F34183E8D}"/>
+              </a:ext>
+            </a:extLst>
+          </p:cNvPr>
+          <p:cNvSpPr txBox="1"/>
+          <p:nvPr/>
+        </p:nvSpPr>
+        <p:spPr>
+          <a:xfrm>
+            <a:off x="1249939" y="1535251"/>
+            <a:ext cx="795865" cy="584775"/>
+          </a:xfrm>
+          <a:prstGeom prst="rect">
+            <a:avLst/>
+          </a:prstGeom>
+          <a:solidFill>
+            <a:schemeClr val="bg1">
+              <a:alpha val="78000"/>
+            </a:schemeClr>
+          </a:solidFill>
+          <a:ln>
+            <a:solidFill>
+              <a:srgbClr val="FFC000"/>
+            </a:solidFill>
+          </a:ln>
+        </p:spPr>
+        <p:txBody>
+          <a:bodyPr wrap="square" lIns="91440" tIns="45720" rIns="91440" bIns="45720" rtlCol="0" anchor="t">
+            <a:spAutoFit/>
+          </a:bodyPr>
+          <a:lstStyle/>
+          <a:p>
+            <a:pPr algn="ctr"/>
+            <a:r>
+              <a:rPr lang="pt-BR" sz="800" b="1"/>
+              <a:t>110</a:t>
+            </a:r>
+            <a:br>
+              <a:rPr lang="pt-BR" sz="800" b="1"/>
+            </a:br>
+            <a:r>
+              <a:rPr lang="pt-BR" sz="800" b="1"/>
+              <a:t>74,81% (1640 m² de 2192,31 m²)</a:t>
+            </a:r>
+          </a:p>
+        </p:txBody>
+      </p:sp>
+      <p:sp>
+        <p:nvSpPr>
+          <p:cNvPr id="33" name="CaixaDeTexto 32">
+            <a:extLst>
+              <a:ext uri="{FF2B5EF4-FFF2-40B4-BE49-F238E27FC236}">
+                <a16:creationId xmlns:a16="http://schemas.microsoft.com/office/drawing/2014/main" id="{1E8DB77E-E9E6-4C7C-32E1-0D8E53D815B4}"/>
+              </a:ext>
+            </a:extLst>
+          </p:cNvPr>
+          <p:cNvSpPr txBox="1"/>
+          <p:nvPr/>
+        </p:nvSpPr>
+        <p:spPr>
+          <a:xfrm>
+            <a:off x="3358092" y="1453148"/>
+            <a:ext cx="795865" cy="584775"/>
+          </a:xfrm>
+          <a:prstGeom prst="rect">
+            <a:avLst/>
+          </a:prstGeom>
+          <a:solidFill>
+            <a:schemeClr val="bg1">
+              <a:alpha val="78000"/>
+            </a:schemeClr>
+          </a:solidFill>
+          <a:ln>
+            <a:solidFill>
+              <a:srgbClr val="FFC000"/>
+            </a:solidFill>
+          </a:ln>
+        </p:spPr>
+        <p:txBody>
+          <a:bodyPr wrap="square" lIns="91440" tIns="45720" rIns="91440" bIns="45720" rtlCol="0" anchor="t">
+            <a:spAutoFit/>
+          </a:bodyPr>
+          <a:lstStyle/>
+          <a:p>
+            <a:pPr algn="ctr"/>
+            <a:r>
+              <a:rPr lang="pt-BR" sz="800" b="1"/>
+              <a:t>120</a:t>
+            </a:r>
+            <a:br>
+              <a:rPr lang="pt-BR" sz="800" b="1"/>
+            </a:br>
+            <a:r>
+              <a:rPr lang="pt-BR" sz="800" b="1"/>
+              <a:t>0% (416,90m²)</a:t>
+            </a:r>
+            <a:endParaRPr lang="pt-BR" sz="800"/>
+          </a:p>
+          <a:p>
+            <a:pPr algn="ctr"/>
+            <a:endParaRPr lang="pt-BR" sz="800" b="1"/>
+          </a:p>
+        </p:txBody>
+      </p:sp>
+      <p:sp>
+        <p:nvSpPr>
+          <p:cNvPr id="34" name="CaixaDeTexto 33">
+            <a:extLst>
+              <a:ext uri="{FF2B5EF4-FFF2-40B4-BE49-F238E27FC236}">
+                <a16:creationId xmlns:a16="http://schemas.microsoft.com/office/drawing/2014/main" id="{7076BD9F-172F-DD98-9A1B-0193B1785B65}"/>
+              </a:ext>
+            </a:extLst>
+          </p:cNvPr>
+          <p:cNvSpPr txBox="1"/>
+          <p:nvPr/>
+        </p:nvSpPr>
+        <p:spPr>
+          <a:xfrm>
+            <a:off x="4897874" y="1448904"/>
+            <a:ext cx="795865" cy="707886"/>
+          </a:xfrm>
+          <a:prstGeom prst="rect">
+            <a:avLst/>
+          </a:prstGeom>
+          <a:solidFill>
+            <a:schemeClr val="bg1">
+              <a:alpha val="78000"/>
+            </a:schemeClr>
+          </a:solidFill>
+          <a:ln>
+            <a:solidFill>
+              <a:srgbClr val="FFC000"/>
+            </a:solidFill>
+          </a:ln>
+        </p:spPr>
+        <p:txBody>
+          <a:bodyPr wrap="square" lIns="91440" tIns="45720" rIns="91440" bIns="45720" rtlCol="0" anchor="t">
+            <a:spAutoFit/>
+          </a:bodyPr>
+          <a:lstStyle/>
+          <a:p>
+            <a:pPr algn="ctr"/>
+            <a:r>
+              <a:rPr lang="pt-BR" sz="800" b="1"/>
+              <a:t>130</a:t>
+            </a:r>
+            <a:br>
+              <a:rPr lang="pt-BR" sz="800" b="1"/>
+            </a:br>
+            <a:r>
+              <a:rPr lang="pt-BR" sz="800" b="1"/>
+              <a:t>98,61%(284,3m²de 288,3m²  )</a:t>
+            </a:r>
+            <a:endParaRPr lang="pt-BR" sz="800"/>
+          </a:p>
+          <a:p>
+            <a:pPr algn="ctr"/>
+            <a:endParaRPr lang="pt-BR" sz="800" b="1"/>
+          </a:p>
+        </p:txBody>
+      </p:sp>
+      <p:sp>
+        <p:nvSpPr>
+          <p:cNvPr id="35" name="CaixaDeTexto 34">
+            <a:extLst>
+              <a:ext uri="{FF2B5EF4-FFF2-40B4-BE49-F238E27FC236}">
+                <a16:creationId xmlns:a16="http://schemas.microsoft.com/office/drawing/2014/main" id="{C928DB64-1AE4-8107-741F-744014461FA0}"/>
+              </a:ext>
+            </a:extLst>
+          </p:cNvPr>
+          <p:cNvSpPr txBox="1"/>
+          <p:nvPr/>
+        </p:nvSpPr>
+        <p:spPr>
+          <a:xfrm>
+            <a:off x="6032225" y="1479773"/>
+            <a:ext cx="795865" cy="584775"/>
+          </a:xfrm>
+          <a:prstGeom prst="rect">
+            <a:avLst/>
+          </a:prstGeom>
+          <a:solidFill>
+            <a:schemeClr val="bg1">
+              <a:alpha val="78000"/>
+            </a:schemeClr>
+          </a:solidFill>
+          <a:ln>
+            <a:solidFill>
+              <a:srgbClr val="FFC000"/>
+            </a:solidFill>
+          </a:ln>
+        </p:spPr>
+        <p:txBody>
+          <a:bodyPr wrap="square" lIns="91440" tIns="45720" rIns="91440" bIns="45720" rtlCol="0" anchor="t">
+            <a:spAutoFit/>
+          </a:bodyPr>
+          <a:lstStyle/>
+          <a:p>
+            <a:pPr algn="ctr"/>
+            <a:r>
+              <a:rPr lang="pt-BR" sz="800" b="1" dirty="0"/>
+              <a:t>140</a:t>
+            </a:r>
+            <a:br>
+              <a:rPr lang="pt-BR" sz="800" b="1" dirty="0"/>
+            </a:br>
+            <a:r>
+              <a:rPr lang="pt-BR" sz="800" b="1" dirty="0"/>
+              <a:t>52,61% (635,00m² de 1207m²)</a:t>
+            </a:r>
+          </a:p>
+        </p:txBody>
+      </p:sp>
+      <p:sp>
+        <p:nvSpPr>
+          <p:cNvPr id="38" name="CaixaDeTexto 37">
+            <a:extLst>
+              <a:ext uri="{FF2B5EF4-FFF2-40B4-BE49-F238E27FC236}">
+                <a16:creationId xmlns:a16="http://schemas.microsoft.com/office/drawing/2014/main" id="{9300191E-E9C5-85A9-EE7B-3CD5BA311632}"/>
+              </a:ext>
+            </a:extLst>
+          </p:cNvPr>
+          <p:cNvSpPr txBox="1"/>
+          <p:nvPr/>
+        </p:nvSpPr>
+        <p:spPr>
+          <a:xfrm>
+            <a:off x="510489" y="3460895"/>
+            <a:ext cx="795865" cy="461665"/>
+          </a:xfrm>
+          <a:prstGeom prst="rect">
+            <a:avLst/>
+          </a:prstGeom>
+          <a:solidFill>
+            <a:schemeClr val="bg1">
+              <a:alpha val="78000"/>
+            </a:schemeClr>
+          </a:solidFill>
+          <a:ln>
+            <a:solidFill>
+              <a:srgbClr val="FFC000"/>
+            </a:solidFill>
+          </a:ln>
+        </p:spPr>
+        <p:txBody>
+          <a:bodyPr wrap="square" lIns="91440" tIns="45720" rIns="91440" bIns="45720" rtlCol="0" anchor="t">
+            <a:spAutoFit/>
+          </a:bodyPr>
+          <a:lstStyle/>
+          <a:p>
+            <a:pPr algn="ctr"/>
+            <a:r>
+              <a:rPr lang="pt-BR" sz="800" b="1"/>
+              <a:t>210</a:t>
+            </a:r>
+            <a:br>
+              <a:rPr lang="pt-BR" sz="800" b="1"/>
+            </a:br>
+            <a:r>
+              <a:rPr lang="pt-BR" sz="800" b="1"/>
+              <a:t>0%(12,33m²)</a:t>
+            </a:r>
+            <a:endParaRPr lang="pt-BR" sz="800"/>
+          </a:p>
+          <a:p>
+            <a:pPr algn="ctr"/>
+            <a:endParaRPr lang="pt-BR" sz="800" b="1"/>
+          </a:p>
+        </p:txBody>
+      </p:sp>
+      <p:sp>
+        <p:nvSpPr>
+          <p:cNvPr id="40" name="CaixaDeTexto 39">
+            <a:extLst>
+              <a:ext uri="{FF2B5EF4-FFF2-40B4-BE49-F238E27FC236}">
+                <a16:creationId xmlns:a16="http://schemas.microsoft.com/office/drawing/2014/main" id="{178084C6-3D1B-7CD5-436E-3726AE8FA0BB}"/>
+              </a:ext>
+            </a:extLst>
+          </p:cNvPr>
+          <p:cNvSpPr txBox="1"/>
+          <p:nvPr/>
+        </p:nvSpPr>
+        <p:spPr>
+          <a:xfrm>
+            <a:off x="4158905" y="3425024"/>
+            <a:ext cx="881209" cy="461665"/>
+          </a:xfrm>
+          <a:prstGeom prst="rect">
+            <a:avLst/>
+          </a:prstGeom>
+          <a:solidFill>
+            <a:schemeClr val="bg1">
+              <a:alpha val="78000"/>
+            </a:schemeClr>
+          </a:solidFill>
+          <a:ln>
+            <a:solidFill>
+              <a:srgbClr val="FFC000"/>
+            </a:solidFill>
+          </a:ln>
+        </p:spPr>
+        <p:txBody>
+          <a:bodyPr wrap="square" lIns="91440" tIns="45720" rIns="91440" bIns="45720" rtlCol="0" anchor="t">
+            <a:spAutoFit/>
+          </a:bodyPr>
+          <a:lstStyle/>
+          <a:p>
+            <a:pPr algn="ctr"/>
+            <a:r>
+              <a:rPr lang="pt-BR" sz="800" b="1"/>
+              <a:t>230</a:t>
+            </a:r>
+          </a:p>
+          <a:p>
+            <a:pPr algn="ctr"/>
+            <a:r>
+              <a:rPr lang="pt-BR" sz="800" b="1"/>
+              <a:t>90,48%(19,00m² de 21m² )</a:t>
+            </a:r>
+          </a:p>
+        </p:txBody>
+      </p:sp>
+      <p:sp>
+        <p:nvSpPr>
+          <p:cNvPr id="41" name="CaixaDeTexto 40">
+            <a:extLst>
+              <a:ext uri="{FF2B5EF4-FFF2-40B4-BE49-F238E27FC236}">
+                <a16:creationId xmlns:a16="http://schemas.microsoft.com/office/drawing/2014/main" id="{92D7CE93-2895-0328-39CE-4D156BD509FA}"/>
+              </a:ext>
+            </a:extLst>
+          </p:cNvPr>
+          <p:cNvSpPr txBox="1"/>
+          <p:nvPr/>
+        </p:nvSpPr>
+        <p:spPr>
+          <a:xfrm>
+            <a:off x="5259071" y="3090686"/>
+            <a:ext cx="795865" cy="584775"/>
+          </a:xfrm>
+          <a:prstGeom prst="rect">
+            <a:avLst/>
+          </a:prstGeom>
+          <a:solidFill>
+            <a:schemeClr val="bg1">
+              <a:alpha val="78000"/>
+            </a:schemeClr>
+          </a:solidFill>
+          <a:ln>
+            <a:solidFill>
+              <a:srgbClr val="FFC000"/>
+            </a:solidFill>
+          </a:ln>
+        </p:spPr>
+        <p:txBody>
+          <a:bodyPr wrap="square" lIns="91440" tIns="45720" rIns="91440" bIns="45720" rtlCol="0" anchor="t">
+            <a:spAutoFit/>
+          </a:bodyPr>
+          <a:lstStyle/>
+          <a:p>
+            <a:pPr algn="ctr"/>
+            <a:r>
+              <a:rPr lang="pt-BR" sz="800" b="1"/>
+              <a:t>240</a:t>
+            </a:r>
+            <a:br>
+              <a:rPr lang="pt-BR" sz="800" b="1"/>
+            </a:br>
+            <a:r>
+              <a:rPr lang="pt-BR" sz="800" b="1"/>
+              <a:t>60,01%(130 m² de 216,63m²)</a:t>
+            </a:r>
+          </a:p>
+        </p:txBody>
+      </p:sp>
+      <p:sp>
+        <p:nvSpPr>
+          <p:cNvPr id="42" name="CaixaDeTexto 41">
+            <a:extLst>
+              <a:ext uri="{FF2B5EF4-FFF2-40B4-BE49-F238E27FC236}">
+                <a16:creationId xmlns:a16="http://schemas.microsoft.com/office/drawing/2014/main" id="{B9602022-581F-E2F6-2814-9E9BDAA2E999}"/>
+              </a:ext>
+            </a:extLst>
+          </p:cNvPr>
+          <p:cNvSpPr txBox="1"/>
+          <p:nvPr/>
+        </p:nvSpPr>
+        <p:spPr>
+          <a:xfrm>
+            <a:off x="5918200" y="3698111"/>
+            <a:ext cx="795865" cy="584775"/>
+          </a:xfrm>
+          <a:prstGeom prst="rect">
+            <a:avLst/>
+          </a:prstGeom>
+          <a:solidFill>
+            <a:schemeClr val="bg1">
+              <a:alpha val="78000"/>
+            </a:schemeClr>
+          </a:solidFill>
+          <a:ln>
+            <a:solidFill>
+              <a:srgbClr val="FFC000"/>
+            </a:solidFill>
+          </a:ln>
+        </p:spPr>
+        <p:txBody>
+          <a:bodyPr wrap="square" lIns="91440" tIns="45720" rIns="91440" bIns="45720" rtlCol="0" anchor="t">
+            <a:spAutoFit/>
+          </a:bodyPr>
+          <a:lstStyle/>
+          <a:p>
+            <a:pPr algn="ctr"/>
+            <a:r>
+              <a:rPr lang="pt-BR" sz="800" b="1"/>
+              <a:t>250</a:t>
+            </a:r>
+            <a:br>
+              <a:rPr lang="pt-BR" sz="800" b="1"/>
+            </a:br>
+            <a:r>
+              <a:rPr lang="pt-BR" sz="800" b="1"/>
+              <a:t>20,82%(42,0m² de 201,76m²)</a:t>
+            </a:r>
+          </a:p>
+        </p:txBody>
+      </p:sp>
+      <p:sp>
+        <p:nvSpPr>
+          <p:cNvPr id="43" name="CaixaDeTexto 42">
+            <a:extLst>
+              <a:ext uri="{FF2B5EF4-FFF2-40B4-BE49-F238E27FC236}">
+                <a16:creationId xmlns:a16="http://schemas.microsoft.com/office/drawing/2014/main" id="{369D5219-7A01-8FB5-8E69-4608D7663AF2}"/>
+              </a:ext>
+            </a:extLst>
+          </p:cNvPr>
+          <p:cNvSpPr txBox="1"/>
+          <p:nvPr/>
+        </p:nvSpPr>
+        <p:spPr>
+          <a:xfrm>
+            <a:off x="6989048" y="3426245"/>
+            <a:ext cx="795865" cy="584775"/>
+          </a:xfrm>
+          <a:prstGeom prst="rect">
+            <a:avLst/>
+          </a:prstGeom>
+          <a:solidFill>
+            <a:schemeClr val="bg1">
+              <a:alpha val="78000"/>
+            </a:schemeClr>
+          </a:solidFill>
+          <a:ln>
+            <a:solidFill>
+              <a:srgbClr val="FFC000"/>
+            </a:solidFill>
+          </a:ln>
+        </p:spPr>
+        <p:txBody>
+          <a:bodyPr wrap="square" lIns="91440" tIns="45720" rIns="91440" bIns="45720" rtlCol="0" anchor="t">
+            <a:spAutoFit/>
+          </a:bodyPr>
+          <a:lstStyle/>
+          <a:p>
+            <a:pPr algn="ctr"/>
+            <a:r>
+              <a:rPr lang="pt-BR" sz="800" b="1"/>
+              <a:t>260</a:t>
+            </a:r>
+            <a:br>
+              <a:rPr lang="pt-BR" sz="800" b="1"/>
+            </a:br>
+            <a:r>
+              <a:rPr lang="pt-BR" sz="800" b="1"/>
+              <a:t>32,25%(47,24 m² de 146,48 m²)</a:t>
+            </a:r>
+            <a:endParaRPr lang="pt-BR"/>
+          </a:p>
+        </p:txBody>
+      </p:sp>
+      <p:sp>
+        <p:nvSpPr>
+          <p:cNvPr id="49" name="CaixaDeTexto 48">
+            <a:extLst>
+              <a:ext uri="{FF2B5EF4-FFF2-40B4-BE49-F238E27FC236}">
+                <a16:creationId xmlns:a16="http://schemas.microsoft.com/office/drawing/2014/main" id="{6282F9A8-A4C8-9064-6472-73B82BAF1FDC}"/>
+              </a:ext>
+            </a:extLst>
+          </p:cNvPr>
+          <p:cNvSpPr txBox="1"/>
+          <p:nvPr/>
+        </p:nvSpPr>
+        <p:spPr>
+          <a:xfrm>
+            <a:off x="6834851" y="4976443"/>
+            <a:ext cx="966553" cy="338554"/>
+          </a:xfrm>
+          <a:prstGeom prst="rect">
+            <a:avLst/>
+          </a:prstGeom>
+          <a:solidFill>
+            <a:schemeClr val="bg1">
+              <a:alpha val="78000"/>
+            </a:schemeClr>
+          </a:solidFill>
+          <a:ln>
+            <a:solidFill>
+              <a:srgbClr val="00B050"/>
+            </a:solidFill>
+          </a:ln>
+        </p:spPr>
+        <p:txBody>
+          <a:bodyPr wrap="square" lIns="91440" tIns="45720" rIns="91440" bIns="45720" rtlCol="0" anchor="t">
+            <a:spAutoFit/>
+          </a:bodyPr>
+          <a:lstStyle/>
+          <a:p>
+            <a:pPr algn="ctr"/>
+            <a:r>
+              <a:rPr lang="pt-BR" sz="800" b="1"/>
+              <a:t>410</a:t>
+            </a:r>
+            <a:br>
+              <a:rPr lang="pt-BR" sz="800" b="1"/>
+            </a:br>
+            <a:r>
+              <a:rPr lang="pt-BR" sz="800" b="1"/>
+              <a:t>100% (11,23m²)</a:t>
+            </a:r>
+            <a:endParaRPr lang="pt-BR" sz="800"/>
+          </a:p>
+        </p:txBody>
+      </p:sp>
+      <p:sp>
+        <p:nvSpPr>
+          <p:cNvPr id="19" name="Retângulo 18">
+            <a:extLst>
+              <a:ext uri="{FF2B5EF4-FFF2-40B4-BE49-F238E27FC236}">
+                <a16:creationId xmlns:a16="http://schemas.microsoft.com/office/drawing/2014/main" id="{EC7B53BB-EFC0-51C6-1E79-54B9C99456CB}"/>
+              </a:ext>
+            </a:extLst>
+          </p:cNvPr>
+          <p:cNvSpPr/>
+          <p:nvPr/>
+        </p:nvSpPr>
+        <p:spPr>
+          <a:xfrm>
+            <a:off x="1355039" y="3038266"/>
+            <a:ext cx="2332310" cy="1333500"/>
+          </a:xfrm>
+          <a:prstGeom prst="rect">
+            <a:avLst/>
+          </a:prstGeom>
+          <a:solidFill>
+            <a:srgbClr val="FFFF00">
+              <a:alpha val="25000"/>
+            </a:srgbClr>
+          </a:solidFill>
+          <a:ln>
+            <a:solidFill>
+              <a:srgbClr val="FFC000"/>
+            </a:solidFill>
+          </a:ln>
+        </p:spPr>
+        <p:style>
+          <a:lnRef idx="2">
+            <a:schemeClr val="accent1">
+              <a:shade val="15000"/>
+            </a:schemeClr>
+          </a:lnRef>
+          <a:fillRef idx="1">
+            <a:schemeClr val="accent1"/>
+          </a:fillRef>
+          <a:effectRef idx="0">
+            <a:schemeClr val="accent1"/>
+          </a:effectRef>
+          <a:fontRef idx="minor">
+            <a:schemeClr val="lt1"/>
+          </a:fontRef>
+        </p:style>
+        <p:txBody>
+          <a:bodyPr rtlCol="0" anchor="ctr"/>
+          <a:lstStyle/>
+          <a:p>
+            <a:pPr algn="ctr"/>
+            <a:endParaRPr lang="pt-BR"/>
+          </a:p>
+        </p:txBody>
+      </p:sp>
+      <p:sp>
+        <p:nvSpPr>
+          <p:cNvPr id="23" name="CaixaDeTexto 22">
+            <a:extLst>
+              <a:ext uri="{FF2B5EF4-FFF2-40B4-BE49-F238E27FC236}">
+                <a16:creationId xmlns:a16="http://schemas.microsoft.com/office/drawing/2014/main" id="{297EB338-A0F6-5CD9-8F46-FD824836D7A1}"/>
+              </a:ext>
+            </a:extLst>
+          </p:cNvPr>
+          <p:cNvSpPr txBox="1"/>
+          <p:nvPr/>
+        </p:nvSpPr>
+        <p:spPr>
+          <a:xfrm>
+            <a:off x="1993901" y="3152240"/>
+            <a:ext cx="874044" cy="461665"/>
+          </a:xfrm>
+          <a:prstGeom prst="rect">
+            <a:avLst/>
+          </a:prstGeom>
+          <a:solidFill>
+            <a:schemeClr val="bg1">
+              <a:alpha val="78000"/>
+            </a:schemeClr>
+          </a:solidFill>
+          <a:ln>
+            <a:solidFill>
+              <a:srgbClr val="FFC000"/>
+            </a:solidFill>
+          </a:ln>
+        </p:spPr>
+        <p:txBody>
+          <a:bodyPr wrap="square" lIns="91440" tIns="45720" rIns="91440" bIns="45720" rtlCol="0" anchor="t">
+            <a:spAutoFit/>
+          </a:bodyPr>
+          <a:lstStyle/>
+          <a:p>
+            <a:pPr algn="ctr"/>
+            <a:r>
+              <a:rPr lang="pt-BR" sz="800" b="1"/>
+              <a:t>220</a:t>
+            </a:r>
+            <a:br>
+              <a:rPr lang="pt-BR" sz="800" b="1"/>
+            </a:br>
+            <a:r>
+              <a:rPr lang="pt-BR" sz="800" b="1"/>
+              <a:t>0%(228,18m²)</a:t>
+            </a:r>
+            <a:endParaRPr lang="pt-BR" sz="800"/>
+          </a:p>
+          <a:p>
+            <a:pPr algn="ctr"/>
+            <a:endParaRPr lang="pt-BR" sz="800" b="1"/>
+          </a:p>
+        </p:txBody>
+      </p:sp>
+      <p:graphicFrame>
+        <p:nvGraphicFramePr>
+          <p:cNvPr id="18" name="Tabela 17">
+            <a:extLst>
+              <a:ext uri="{FF2B5EF4-FFF2-40B4-BE49-F238E27FC236}">
+                <a16:creationId xmlns:a16="http://schemas.microsoft.com/office/drawing/2014/main" id="{05C6D86D-AEC3-A9B4-E234-D74939C6F2CB}"/>
+              </a:ext>
+            </a:extLst>
+          </p:cNvPr>
+          <p:cNvGraphicFramePr>
+            <a:graphicFrameLocks noGrp="1"/>
+          </p:cNvGraphicFramePr>
+          <p:nvPr>
+            <p:extLst>
+              <p:ext uri="{D42A27DB-BD31-4B8C-83A1-F6EECF244321}">
+                <p14:modId xmlns:p14="http://schemas.microsoft.com/office/powerpoint/2010/main" val="692810446"/>
+              </p:ext>
+            </p:extLst>
+          </p:nvPr>
+        </p:nvGraphicFramePr>
+        <p:xfrm>
+          <a:off x="565970" y="5266801"/>
+          <a:ext cx="2959667" cy="4018049"/>
+        </p:xfrm>
+        <a:graphic>
+          <a:graphicData uri="http://schemas.openxmlformats.org/drawingml/2006/table">
+            <a:tbl>
+              <a:tblPr/>
+              <a:tblGrid>
+                <a:gridCol w="652238">
+                  <a:extLst>
+                    <a:ext uri="{9D8B030D-6E8A-4147-A177-3AD203B41FA5}">
+                      <a16:colId xmlns:a16="http://schemas.microsoft.com/office/drawing/2014/main" val="4271829472"/>
+                    </a:ext>
+                  </a:extLst>
+                </a:gridCol>
+                <a:gridCol w="968375">
+                  <a:extLst>
+                    <a:ext uri="{9D8B030D-6E8A-4147-A177-3AD203B41FA5}">
+                      <a16:colId xmlns:a16="http://schemas.microsoft.com/office/drawing/2014/main" val="1661459327"/>
+                    </a:ext>
+                  </a:extLst>
+                </a:gridCol>
+                <a:gridCol w="1339054">
+                  <a:extLst>
+                    <a:ext uri="{9D8B030D-6E8A-4147-A177-3AD203B41FA5}">
+                      <a16:colId xmlns:a16="http://schemas.microsoft.com/office/drawing/2014/main" val="2961903840"/>
+                    </a:ext>
+                  </a:extLst>
+                </a:gridCol>
+              </a:tblGrid>
+              <a:tr h="275774">
+                <a:tc>
+                  <a:txBody>
+                    <a:bodyPr/>
+                    <a:lstStyle/>
+                    <a:p>
+                      <a:pPr algn="ctr" fontAlgn="b">
+                        <a:buNone/>
+                      </a:pPr>
+                      <a:r>
+                        <a:rPr lang="pt-BR" sz="1100" b="1" i="0" u="none" strike="noStrike">
+                          <a:solidFill>
+                            <a:srgbClr val="000000"/>
+                          </a:solidFill>
+                          <a:effectLst/>
+                          <a:latin typeface="Aptos Narrow" panose="020B0004020202020204" pitchFamily="34" charset="0"/>
+                        </a:rPr>
+                        <a:t>ÁREA</a:t>
+                      </a:r>
+                    </a:p>
+                  </a:txBody>
+                  <a:tcPr marL="0" marR="0" marT="0" marB="0" anchor="b">
+                    <a:lnL w="6350" cap="flat" cmpd="sng" algn="ctr">
+                      <a:solidFill>
+                        <a:srgbClr val="000000"/>
+                      </a:solidFill>
+                      <a:prstDash val="solid"/>
+                      <a:round/>
+                      <a:headEnd type="none" w="med" len="med"/>
+                      <a:tailEnd type="none" w="med" len="med"/>
+                    </a:lnL>
+                    <a:lnR w="6350" cap="flat" cmpd="sng" algn="ctr">
+                      <a:solidFill>
+                        <a:srgbClr val="000000"/>
+                      </a:solidFill>
+                      <a:prstDash val="solid"/>
+                      <a:round/>
+                      <a:headEnd type="none" w="med" len="med"/>
+                      <a:tailEnd type="none" w="med" len="med"/>
+                    </a:lnR>
+                    <a:lnT w="6350" cap="flat" cmpd="sng" algn="ctr">
+                      <a:solidFill>
+                        <a:srgbClr val="000000"/>
+                      </a:solidFill>
+                      <a:prstDash val="solid"/>
+                      <a:round/>
+                      <a:headEnd type="none" w="med" len="med"/>
+                      <a:tailEnd type="none" w="med" len="med"/>
+                    </a:lnT>
+                    <a:lnB w="6350" cap="flat" cmpd="sng" algn="ctr">
+                      <a:solidFill>
+                        <a:srgbClr val="000000"/>
+                      </a:solidFill>
+                      <a:prstDash val="solid"/>
+                      <a:round/>
+                      <a:headEnd type="none" w="med" len="med"/>
+                      <a:tailEnd type="none" w="med" len="med"/>
+                    </a:lnB>
+                    <a:noFill/>
+                  </a:tcPr>
+                </a:tc>
+                <a:tc>
+                  <a:txBody>
+                    <a:bodyPr/>
+                    <a:lstStyle/>
+                    <a:p>
+                      <a:pPr algn="ctr" fontAlgn="b">
+                        <a:buNone/>
+                      </a:pPr>
+                      <a:r>
+                        <a:rPr lang="pt-BR" sz="1100" b="1" i="0" u="none" strike="noStrike">
+                          <a:solidFill>
+                            <a:srgbClr val="000000"/>
+                          </a:solidFill>
+                          <a:effectLst/>
+                          <a:latin typeface="Aptos Narrow" panose="020B0004020202020204" pitchFamily="34" charset="0"/>
+                        </a:rPr>
+                        <a:t>STATUS</a:t>
+                      </a:r>
+                    </a:p>
+                  </a:txBody>
+                  <a:tcPr marL="0" marR="0" marT="0" marB="0" anchor="b">
+                    <a:lnL w="6350" cap="flat" cmpd="sng" algn="ctr">
+                      <a:solidFill>
+                        <a:srgbClr val="000000"/>
+                      </a:solidFill>
+                      <a:prstDash val="solid"/>
+                      <a:round/>
+                      <a:headEnd type="none" w="med" len="med"/>
+                      <a:tailEnd type="none" w="med" len="med"/>
+                    </a:lnL>
+                    <a:lnR w="6350" cap="flat" cmpd="sng" algn="ctr">
+                      <a:solidFill>
+                        <a:srgbClr val="000000"/>
+                      </a:solidFill>
+                      <a:prstDash val="solid"/>
+                      <a:round/>
+                      <a:headEnd type="none" w="med" len="med"/>
+                      <a:tailEnd type="none" w="med" len="med"/>
+                    </a:lnR>
+                    <a:lnT w="6350" cap="flat" cmpd="sng" algn="ctr">
+                      <a:solidFill>
+                        <a:srgbClr val="000000"/>
+                      </a:solidFill>
+                      <a:prstDash val="solid"/>
+                      <a:round/>
+                      <a:headEnd type="none" w="med" len="med"/>
+                      <a:tailEnd type="none" w="med" len="med"/>
+                    </a:lnT>
+                    <a:lnB w="6350" cap="flat" cmpd="sng" algn="ctr">
+                      <a:solidFill>
+                        <a:srgbClr val="000000"/>
+                      </a:solidFill>
+                      <a:prstDash val="solid"/>
+                      <a:round/>
+                      <a:headEnd type="none" w="med" len="med"/>
+                      <a:tailEnd type="none" w="med" len="med"/>
+                    </a:lnB>
+                    <a:noFill/>
+                  </a:tcPr>
+                </a:tc>
+                <a:tc>
+                  <a:txBody>
+                    <a:bodyPr/>
+                    <a:lstStyle/>
+                    <a:p>
+                      <a:pPr algn="ctr" fontAlgn="b">
+                        <a:buNone/>
+                      </a:pPr>
+                      <a:r>
+                        <a:rPr lang="pt-BR" sz="1100" b="1" i="0" u="none" strike="noStrike">
+                          <a:solidFill>
+                            <a:srgbClr val="000000"/>
+                          </a:solidFill>
+                          <a:effectLst/>
+                          <a:latin typeface="Aptos Narrow" panose="020B0004020202020204" pitchFamily="34" charset="0"/>
+                        </a:rPr>
+                        <a:t>CONCLUSÃO</a:t>
+                      </a:r>
+                    </a:p>
+                  </a:txBody>
+                  <a:tcPr marL="0" marR="0" marT="0" marB="0" anchor="b">
+                    <a:lnL w="6350" cap="flat" cmpd="sng" algn="ctr">
+                      <a:solidFill>
+                        <a:srgbClr val="000000"/>
+                      </a:solidFill>
+                      <a:prstDash val="solid"/>
+                      <a:round/>
+                      <a:headEnd type="none" w="med" len="med"/>
+                      <a:tailEnd type="none" w="med" len="med"/>
+                    </a:lnL>
+                    <a:lnR w="6350" cap="flat" cmpd="sng" algn="ctr">
+                      <a:solidFill>
+                        <a:srgbClr val="000000"/>
+                      </a:solidFill>
+                      <a:prstDash val="solid"/>
+                      <a:round/>
+                      <a:headEnd type="none" w="med" len="med"/>
+                      <a:tailEnd type="none" w="med" len="med"/>
+                    </a:lnR>
+                    <a:lnT w="6350" cap="flat" cmpd="sng" algn="ctr">
+                      <a:solidFill>
+                        <a:srgbClr val="000000"/>
+                      </a:solidFill>
+                      <a:prstDash val="solid"/>
+                      <a:round/>
+                      <a:headEnd type="none" w="med" len="med"/>
+                      <a:tailEnd type="none" w="med" len="med"/>
+                    </a:lnT>
+                    <a:lnB w="6350" cap="flat" cmpd="sng" algn="ctr">
+                      <a:solidFill>
+                        <a:srgbClr val="000000"/>
+                      </a:solidFill>
+                      <a:prstDash val="solid"/>
+                      <a:round/>
+                      <a:headEnd type="none" w="med" len="med"/>
+                      <a:tailEnd type="none" w="med" len="med"/>
+                    </a:lnB>
+                    <a:noFill/>
+                  </a:tcPr>
+                </a:tc>
+                <a:extLst>
+                  <a:ext uri="{0D108BD9-81ED-4DB2-BD59-A6C34878D82A}">
+                    <a16:rowId xmlns:a16="http://schemas.microsoft.com/office/drawing/2014/main" val="225243027"/>
+                  </a:ext>
+                </a:extLst>
+              </a:tr>
+              <a:tr h="337119">
+                <a:tc>
+                  <a:txBody>
+                    <a:bodyPr/>
+                    <a:lstStyle/>
+                    <a:p>
+                      <a:pPr algn="ctr" fontAlgn="b">
+                        <a:buNone/>
+                      </a:pPr>
+                      <a:r>
+                        <a:rPr lang="pt-BR" sz="1100" b="0" i="0" u="none" strike="noStrike">
+                          <a:solidFill>
+                            <a:srgbClr val="000000"/>
+                          </a:solidFill>
+                          <a:effectLst/>
+                          <a:latin typeface="Aptos Narrow" panose="020B0004020202020204" pitchFamily="34" charset="0"/>
+                        </a:rPr>
+                        <a:t>110</a:t>
+                      </a:r>
+                    </a:p>
+                  </a:txBody>
+                  <a:tcPr marL="0" marR="0" marT="0" marB="0" anchor="b">
+                    <a:lnL w="6350" cap="flat" cmpd="sng" algn="ctr">
+                      <a:solidFill>
+                        <a:srgbClr val="000000"/>
+                      </a:solidFill>
+                      <a:prstDash val="solid"/>
+                      <a:round/>
+                      <a:headEnd type="none" w="med" len="med"/>
+                      <a:tailEnd type="none" w="med" len="med"/>
+                    </a:lnL>
+                    <a:lnR w="6350" cap="flat" cmpd="sng" algn="ctr">
+                      <a:solidFill>
+                        <a:srgbClr val="000000"/>
+                      </a:solidFill>
+                      <a:prstDash val="solid"/>
+                      <a:round/>
+                      <a:headEnd type="none" w="med" len="med"/>
+                      <a:tailEnd type="none" w="med" len="med"/>
+                    </a:lnR>
+                    <a:lnT w="6350" cap="flat" cmpd="sng" algn="ctr">
+                      <a:solidFill>
+                        <a:srgbClr val="000000"/>
+                      </a:solidFill>
+                      <a:prstDash val="solid"/>
+                      <a:round/>
+                      <a:headEnd type="none" w="med" len="med"/>
+                      <a:tailEnd type="none" w="med" len="med"/>
+                    </a:lnT>
+                    <a:lnB w="6350" cap="flat" cmpd="sng" algn="ctr">
+                      <a:solidFill>
+                        <a:srgbClr val="000000"/>
+                      </a:solidFill>
+                      <a:prstDash val="solid"/>
+                      <a:round/>
+                      <a:headEnd type="none" w="med" len="med"/>
+                      <a:tailEnd type="none" w="med" len="med"/>
+                    </a:lnB>
+                    <a:noFill/>
+                  </a:tcPr>
+                </a:tc>
+                <a:tc>
+                  <a:txBody>
+                    <a:bodyPr/>
+                    <a:lstStyle/>
+                    <a:p>
+                      <a:pPr algn="ctr" fontAlgn="b">
+                        <a:buNone/>
+                      </a:pPr>
+                      <a:r>
+                        <a:rPr lang="pt-BR" sz="1100" b="0" i="0" u="none" strike="noStrike">
+                          <a:solidFill>
+                            <a:srgbClr val="9C5700"/>
+                          </a:solidFill>
+                          <a:effectLst/>
+                          <a:latin typeface="Aptos Narrow" panose="020B0004020202020204" pitchFamily="34" charset="0"/>
+                        </a:rPr>
+                        <a:t>EM ANDAMENTO</a:t>
+                      </a:r>
+                    </a:p>
+                  </a:txBody>
+                  <a:tcPr marL="0" marR="0" marT="0" marB="0" anchor="b">
+                    <a:lnL w="6350" cap="flat" cmpd="sng" algn="ctr">
+                      <a:solidFill>
+                        <a:srgbClr val="000000"/>
+                      </a:solidFill>
+                      <a:prstDash val="solid"/>
+                      <a:round/>
+                      <a:headEnd type="none" w="med" len="med"/>
+                      <a:tailEnd type="none" w="med" len="med"/>
+                    </a:lnL>
+                    <a:lnR w="6350" cap="flat" cmpd="sng" algn="ctr">
+                      <a:solidFill>
+                        <a:srgbClr val="000000"/>
+                      </a:solidFill>
+                      <a:prstDash val="solid"/>
+                      <a:round/>
+                      <a:headEnd type="none" w="med" len="med"/>
+                      <a:tailEnd type="none" w="med" len="med"/>
+                    </a:lnR>
+                    <a:lnT w="6350" cap="flat" cmpd="sng" algn="ctr">
+                      <a:solidFill>
+                        <a:srgbClr val="000000"/>
+                      </a:solidFill>
+                      <a:prstDash val="solid"/>
+                      <a:round/>
+                      <a:headEnd type="none" w="med" len="med"/>
+                      <a:tailEnd type="none" w="med" len="med"/>
+                    </a:lnT>
+                    <a:lnB w="6350" cap="flat" cmpd="sng" algn="ctr">
+                      <a:solidFill>
+                        <a:srgbClr val="000000"/>
+                      </a:solidFill>
+                      <a:prstDash val="solid"/>
+                      <a:round/>
+                      <a:headEnd type="none" w="med" len="med"/>
+                      <a:tailEnd type="none" w="med" len="med"/>
+                    </a:lnB>
+                    <a:solidFill>
+                      <a:srgbClr val="FFEB9C"/>
+                    </a:solidFill>
+                  </a:tcPr>
+                </a:tc>
+                <a:tc>
+                  <a:txBody>
+                    <a:bodyPr/>
+                    <a:lstStyle/>
+                    <a:p>
+                      <a:pPr algn="ctr" fontAlgn="b">
+                        <a:buNone/>
+                      </a:pPr>
+                      <a:r>
+                        <a:rPr lang="pt-BR" sz="1100" b="0" i="0" u="none" strike="noStrike">
+                          <a:solidFill>
+                            <a:srgbClr val="000000"/>
+                          </a:solidFill>
+                          <a:effectLst/>
+                          <a:latin typeface="Aptos Narrow"/>
+                        </a:rPr>
+                        <a:t>17/12/2026</a:t>
+                      </a:r>
+                    </a:p>
+                  </a:txBody>
+                  <a:tcPr marL="0" marR="0" marT="0" marB="0" anchor="b">
+                    <a:lnL w="6350" cap="flat" cmpd="sng" algn="ctr">
+                      <a:solidFill>
+                        <a:srgbClr val="000000"/>
+                      </a:solidFill>
+                      <a:prstDash val="solid"/>
+                      <a:round/>
+                      <a:headEnd type="none" w="med" len="med"/>
+                      <a:tailEnd type="none" w="med" len="med"/>
+                    </a:lnL>
+                    <a:lnR w="6350" cap="flat" cmpd="sng" algn="ctr">
+                      <a:solidFill>
+                        <a:srgbClr val="000000"/>
+                      </a:solidFill>
+                      <a:prstDash val="solid"/>
+                      <a:round/>
+                      <a:headEnd type="none" w="med" len="med"/>
+                      <a:tailEnd type="none" w="med" len="med"/>
+                    </a:lnR>
+                    <a:lnT w="6350" cap="flat" cmpd="sng" algn="ctr">
+                      <a:solidFill>
+                        <a:srgbClr val="000000"/>
+                      </a:solidFill>
+                      <a:prstDash val="solid"/>
+                      <a:round/>
+                      <a:headEnd type="none" w="med" len="med"/>
+                      <a:tailEnd type="none" w="med" len="med"/>
+                    </a:lnT>
+                    <a:lnB w="6350" cap="flat" cmpd="sng" algn="ctr">
+                      <a:solidFill>
+                        <a:srgbClr val="000000"/>
+                      </a:solidFill>
+                      <a:prstDash val="solid"/>
+                      <a:round/>
+                      <a:headEnd type="none" w="med" len="med"/>
+                      <a:tailEnd type="none" w="med" len="med"/>
+                    </a:lnB>
+                    <a:noFill/>
+                  </a:tcPr>
+                </a:tc>
+                <a:extLst>
+                  <a:ext uri="{0D108BD9-81ED-4DB2-BD59-A6C34878D82A}">
+                    <a16:rowId xmlns:a16="http://schemas.microsoft.com/office/drawing/2014/main" val="4030658630"/>
+                  </a:ext>
+                </a:extLst>
+              </a:tr>
+              <a:tr h="337119">
+                <a:tc>
+                  <a:txBody>
+                    <a:bodyPr/>
+                    <a:lstStyle/>
+                    <a:p>
+                      <a:pPr algn="ctr" fontAlgn="b">
+                        <a:buNone/>
+                      </a:pPr>
+                      <a:r>
+                        <a:rPr lang="pt-BR" sz="1100" b="0" i="0" u="none" strike="noStrike">
+                          <a:solidFill>
+                            <a:srgbClr val="000000"/>
+                          </a:solidFill>
+                          <a:effectLst/>
+                          <a:latin typeface="Aptos Narrow" panose="020B0004020202020204" pitchFamily="34" charset="0"/>
+                        </a:rPr>
+                        <a:t>120</a:t>
+                      </a:r>
+                    </a:p>
+                  </a:txBody>
+                  <a:tcPr marL="0" marR="0" marT="0" marB="0" anchor="b">
+                    <a:lnL w="6350" cap="flat" cmpd="sng" algn="ctr">
+                      <a:solidFill>
+                        <a:srgbClr val="000000"/>
+                      </a:solidFill>
+                      <a:prstDash val="solid"/>
+                      <a:round/>
+                      <a:headEnd type="none" w="med" len="med"/>
+                      <a:tailEnd type="none" w="med" len="med"/>
+                    </a:lnL>
+                    <a:lnR w="6350" cap="flat" cmpd="sng" algn="ctr">
+                      <a:solidFill>
+                        <a:srgbClr val="000000"/>
+                      </a:solidFill>
+                      <a:prstDash val="solid"/>
+                      <a:round/>
+                      <a:headEnd type="none" w="med" len="med"/>
+                      <a:tailEnd type="none" w="med" len="med"/>
+                    </a:lnR>
+                    <a:lnT w="6350" cap="flat" cmpd="sng" algn="ctr">
+                      <a:solidFill>
+                        <a:srgbClr val="000000"/>
+                      </a:solidFill>
+                      <a:prstDash val="solid"/>
+                      <a:round/>
+                      <a:headEnd type="none" w="med" len="med"/>
+                      <a:tailEnd type="none" w="med" len="med"/>
+                    </a:lnT>
+                    <a:lnB w="6350" cap="flat" cmpd="sng" algn="ctr">
+                      <a:solidFill>
+                        <a:srgbClr val="000000"/>
+                      </a:solidFill>
+                      <a:prstDash val="solid"/>
+                      <a:round/>
+                      <a:headEnd type="none" w="med" len="med"/>
+                      <a:tailEnd type="none" w="med" len="med"/>
+                    </a:lnB>
+                    <a:noFill/>
+                  </a:tcPr>
+                </a:tc>
+                <a:tc>
+                  <a:txBody>
+                    <a:bodyPr/>
+                    <a:lstStyle/>
+                    <a:p>
+                      <a:pPr algn="ctr" fontAlgn="b">
+                        <a:buNone/>
+                      </a:pPr>
+                      <a:r>
+                        <a:rPr lang="pt-BR" sz="1100" b="0" i="0" u="none" strike="noStrike">
+                          <a:solidFill>
+                            <a:srgbClr val="C00000"/>
+                          </a:solidFill>
+                          <a:effectLst/>
+                          <a:latin typeface="Aptos Narrow" panose="020B0004020202020204" pitchFamily="34" charset="0"/>
+                        </a:rPr>
+                        <a:t>NÃO INICIADA</a:t>
+                      </a:r>
+                    </a:p>
+                  </a:txBody>
+                  <a:tcPr marL="0" marR="0" marT="0" marB="0" anchor="b">
+                    <a:lnL w="6350" cap="flat" cmpd="sng" algn="ctr">
+                      <a:solidFill>
+                        <a:srgbClr val="000000"/>
+                      </a:solidFill>
+                      <a:prstDash val="solid"/>
+                      <a:round/>
+                      <a:headEnd type="none" w="med" len="med"/>
+                      <a:tailEnd type="none" w="med" len="med"/>
+                    </a:lnL>
+                    <a:lnR w="6350" cap="flat" cmpd="sng" algn="ctr">
+                      <a:solidFill>
+                        <a:srgbClr val="000000"/>
+                      </a:solidFill>
+                      <a:prstDash val="solid"/>
+                      <a:round/>
+                      <a:headEnd type="none" w="med" len="med"/>
+                      <a:tailEnd type="none" w="med" len="med"/>
+                    </a:lnR>
+                    <a:lnT w="6350" cap="flat" cmpd="sng" algn="ctr">
+                      <a:solidFill>
+                        <a:srgbClr val="000000"/>
+                      </a:solidFill>
+                      <a:prstDash val="solid"/>
+                      <a:round/>
+                      <a:headEnd type="none" w="med" len="med"/>
+                      <a:tailEnd type="none" w="med" len="med"/>
+                    </a:lnT>
+                    <a:lnB w="6350" cap="flat" cmpd="sng" algn="ctr">
+                      <a:solidFill>
+                        <a:srgbClr val="000000"/>
+                      </a:solidFill>
+                      <a:prstDash val="solid"/>
+                      <a:round/>
+                      <a:headEnd type="none" w="med" len="med"/>
+                      <a:tailEnd type="none" w="med" len="med"/>
+                    </a:lnB>
+                    <a:solidFill>
+                      <a:srgbClr val="FFC1C1"/>
+                    </a:solidFill>
+                  </a:tcPr>
+                </a:tc>
+                <a:tc>
+                  <a:txBody>
+                    <a:bodyPr/>
+                    <a:lstStyle/>
+                    <a:p>
+                      <a:pPr algn="ctr" fontAlgn="b">
+                        <a:buNone/>
+                      </a:pPr>
+                      <a:r>
+                        <a:rPr lang="pt-BR" sz="1100" b="0" i="0" u="none" strike="noStrike">
+                          <a:solidFill>
+                            <a:srgbClr val="000000"/>
+                          </a:solidFill>
+                          <a:effectLst/>
+                          <a:latin typeface="Aptos Narrow"/>
+                        </a:rPr>
+                        <a:t>17/12/2026</a:t>
+                      </a:r>
+                    </a:p>
+                  </a:txBody>
+                  <a:tcPr marL="0" marR="0" marT="0" marB="0" anchor="b">
+                    <a:lnL w="6350" cap="flat" cmpd="sng" algn="ctr">
+                      <a:solidFill>
+                        <a:srgbClr val="000000"/>
+                      </a:solidFill>
+                      <a:prstDash val="solid"/>
+                      <a:round/>
+                      <a:headEnd type="none" w="med" len="med"/>
+                      <a:tailEnd type="none" w="med" len="med"/>
+                    </a:lnL>
+                    <a:lnR w="6350" cap="flat" cmpd="sng" algn="ctr">
+                      <a:solidFill>
+                        <a:srgbClr val="000000"/>
+                      </a:solidFill>
+                      <a:prstDash val="solid"/>
+                      <a:round/>
+                      <a:headEnd type="none" w="med" len="med"/>
+                      <a:tailEnd type="none" w="med" len="med"/>
+                    </a:lnR>
+                    <a:lnT w="6350" cap="flat" cmpd="sng" algn="ctr">
+                      <a:solidFill>
+                        <a:srgbClr val="000000"/>
+                      </a:solidFill>
+                      <a:prstDash val="solid"/>
+                      <a:round/>
+                      <a:headEnd type="none" w="med" len="med"/>
+                      <a:tailEnd type="none" w="med" len="med"/>
+                    </a:lnT>
+                    <a:lnB w="6350" cap="flat" cmpd="sng" algn="ctr">
+                      <a:solidFill>
+                        <a:srgbClr val="000000"/>
+                      </a:solidFill>
+                      <a:prstDash val="solid"/>
+                      <a:round/>
+                      <a:headEnd type="none" w="med" len="med"/>
+                      <a:tailEnd type="none" w="med" len="med"/>
+                    </a:lnB>
+                    <a:noFill/>
+                  </a:tcPr>
+                </a:tc>
+                <a:extLst>
+                  <a:ext uri="{0D108BD9-81ED-4DB2-BD59-A6C34878D82A}">
+                    <a16:rowId xmlns:a16="http://schemas.microsoft.com/office/drawing/2014/main" val="514938079"/>
+                  </a:ext>
+                </a:extLst>
+              </a:tr>
+              <a:tr h="337119">
+                <a:tc>
+                  <a:txBody>
+                    <a:bodyPr/>
+                    <a:lstStyle/>
+                    <a:p>
+                      <a:pPr algn="ctr" fontAlgn="b">
+                        <a:buNone/>
+                      </a:pPr>
+                      <a:r>
+                        <a:rPr lang="pt-BR" sz="1100" b="0" i="0" u="none" strike="noStrike">
+                          <a:solidFill>
+                            <a:srgbClr val="000000"/>
+                          </a:solidFill>
+                          <a:effectLst/>
+                          <a:latin typeface="Aptos Narrow" panose="020B0004020202020204" pitchFamily="34" charset="0"/>
+                        </a:rPr>
+                        <a:t>130</a:t>
+                      </a:r>
+                    </a:p>
+                  </a:txBody>
+                  <a:tcPr marL="0" marR="0" marT="0" marB="0" anchor="b">
+                    <a:lnL w="6350" cap="flat" cmpd="sng" algn="ctr">
+                      <a:solidFill>
+                        <a:srgbClr val="000000"/>
+                      </a:solidFill>
+                      <a:prstDash val="solid"/>
+                      <a:round/>
+                      <a:headEnd type="none" w="med" len="med"/>
+                      <a:tailEnd type="none" w="med" len="med"/>
+                    </a:lnL>
+                    <a:lnR w="6350" cap="flat" cmpd="sng" algn="ctr">
+                      <a:solidFill>
+                        <a:srgbClr val="000000"/>
+                      </a:solidFill>
+                      <a:prstDash val="solid"/>
+                      <a:round/>
+                      <a:headEnd type="none" w="med" len="med"/>
+                      <a:tailEnd type="none" w="med" len="med"/>
+                    </a:lnR>
+                    <a:lnT w="6350" cap="flat" cmpd="sng" algn="ctr">
+                      <a:solidFill>
+                        <a:srgbClr val="000000"/>
+                      </a:solidFill>
+                      <a:prstDash val="solid"/>
+                      <a:round/>
+                      <a:headEnd type="none" w="med" len="med"/>
+                      <a:tailEnd type="none" w="med" len="med"/>
+                    </a:lnT>
+                    <a:lnB w="6350" cap="flat" cmpd="sng" algn="ctr">
+                      <a:solidFill>
+                        <a:srgbClr val="000000"/>
+                      </a:solidFill>
+                      <a:prstDash val="solid"/>
+                      <a:round/>
+                      <a:headEnd type="none" w="med" len="med"/>
+                      <a:tailEnd type="none" w="med" len="med"/>
+                    </a:lnB>
+                    <a:noFill/>
+                  </a:tcPr>
+                </a:tc>
+                <a:tc>
+                  <a:txBody>
+                    <a:bodyPr/>
+                    <a:lstStyle/>
+                    <a:p>
+                      <a:pPr algn="ctr" fontAlgn="b">
+                        <a:buNone/>
+                      </a:pPr>
+                      <a:r>
+                        <a:rPr lang="pt-BR" sz="1100" b="0" i="0" u="none" strike="noStrike" dirty="0">
+                          <a:solidFill>
+                            <a:srgbClr val="9C5700"/>
+                          </a:solidFill>
+                          <a:effectLst/>
+                          <a:latin typeface="Aptos Narrow" panose="020B0004020202020204" pitchFamily="34" charset="0"/>
+                        </a:rPr>
+                        <a:t>EM ANDAMENTO</a:t>
+                      </a:r>
+                    </a:p>
+                  </a:txBody>
+                  <a:tcPr marL="0" marR="0" marT="0" marB="0" anchor="b">
+                    <a:lnL w="6350" cap="flat" cmpd="sng" algn="ctr">
+                      <a:solidFill>
+                        <a:srgbClr val="000000"/>
+                      </a:solidFill>
+                      <a:prstDash val="solid"/>
+                      <a:round/>
+                      <a:headEnd type="none" w="med" len="med"/>
+                      <a:tailEnd type="none" w="med" len="med"/>
+                    </a:lnL>
+                    <a:lnR w="6350" cap="flat" cmpd="sng" algn="ctr">
+                      <a:solidFill>
+                        <a:srgbClr val="000000"/>
+                      </a:solidFill>
+                      <a:prstDash val="solid"/>
+                      <a:round/>
+                      <a:headEnd type="none" w="med" len="med"/>
+                      <a:tailEnd type="none" w="med" len="med"/>
+                    </a:lnR>
+                    <a:lnT w="6350" cap="flat" cmpd="sng" algn="ctr">
+                      <a:solidFill>
+                        <a:srgbClr val="000000"/>
+                      </a:solidFill>
+                      <a:prstDash val="solid"/>
+                      <a:round/>
+                      <a:headEnd type="none" w="med" len="med"/>
+                      <a:tailEnd type="none" w="med" len="med"/>
+                    </a:lnT>
+                    <a:lnB w="6350" cap="flat" cmpd="sng" algn="ctr">
+                      <a:solidFill>
+                        <a:srgbClr val="000000"/>
+                      </a:solidFill>
+                      <a:prstDash val="solid"/>
+                      <a:round/>
+                      <a:headEnd type="none" w="med" len="med"/>
+                      <a:tailEnd type="none" w="med" len="med"/>
+                    </a:lnB>
+                    <a:solidFill>
+                      <a:srgbClr val="FFEB9C"/>
+                    </a:solidFill>
+                  </a:tcPr>
+                </a:tc>
+                <a:tc>
+                  <a:txBody>
+                    <a:bodyPr/>
+                    <a:lstStyle/>
+                    <a:p>
+                      <a:pPr algn="ctr" fontAlgn="b">
+                        <a:buNone/>
+                      </a:pPr>
+                      <a:r>
+                        <a:rPr lang="pt-BR" sz="1100" b="0" i="0" u="none" strike="noStrike">
+                          <a:solidFill>
+                            <a:srgbClr val="000000"/>
+                          </a:solidFill>
+                          <a:effectLst/>
+                          <a:latin typeface="Aptos Narrow"/>
+                        </a:rPr>
+                        <a:t>24/11/2026</a:t>
+                      </a:r>
+                    </a:p>
+                  </a:txBody>
+                  <a:tcPr marL="0" marR="0" marT="0" marB="0" anchor="b">
+                    <a:lnL w="6350" cap="flat" cmpd="sng" algn="ctr">
+                      <a:solidFill>
+                        <a:srgbClr val="000000"/>
+                      </a:solidFill>
+                      <a:prstDash val="solid"/>
+                      <a:round/>
+                      <a:headEnd type="none" w="med" len="med"/>
+                      <a:tailEnd type="none" w="med" len="med"/>
+                    </a:lnL>
+                    <a:lnR w="6350" cap="flat" cmpd="sng" algn="ctr">
+                      <a:solidFill>
+                        <a:srgbClr val="000000"/>
+                      </a:solidFill>
+                      <a:prstDash val="solid"/>
+                      <a:round/>
+                      <a:headEnd type="none" w="med" len="med"/>
+                      <a:tailEnd type="none" w="med" len="med"/>
+                    </a:lnR>
+                    <a:lnT w="6350" cap="flat" cmpd="sng" algn="ctr">
+                      <a:solidFill>
+                        <a:srgbClr val="000000"/>
+                      </a:solidFill>
+                      <a:prstDash val="solid"/>
+                      <a:round/>
+                      <a:headEnd type="none" w="med" len="med"/>
+                      <a:tailEnd type="none" w="med" len="med"/>
+                    </a:lnT>
+                    <a:lnB w="6350" cap="flat" cmpd="sng" algn="ctr">
+                      <a:solidFill>
+                        <a:srgbClr val="000000"/>
+                      </a:solidFill>
+                      <a:prstDash val="solid"/>
+                      <a:round/>
+                      <a:headEnd type="none" w="med" len="med"/>
+                      <a:tailEnd type="none" w="med" len="med"/>
+                    </a:lnB>
+                    <a:noFill/>
+                  </a:tcPr>
+                </a:tc>
+                <a:extLst>
+                  <a:ext uri="{0D108BD9-81ED-4DB2-BD59-A6C34878D82A}">
+                    <a16:rowId xmlns:a16="http://schemas.microsoft.com/office/drawing/2014/main" val="1395619014"/>
+                  </a:ext>
+                </a:extLst>
+              </a:tr>
+              <a:tr h="371085">
+                <a:tc>
+                  <a:txBody>
+                    <a:bodyPr/>
+                    <a:lstStyle/>
+                    <a:p>
+                      <a:pPr algn="ctr" fontAlgn="b">
+                        <a:buNone/>
+                      </a:pPr>
+                      <a:r>
+                        <a:rPr lang="pt-BR" sz="1100" b="0" i="0" u="none" strike="noStrike">
+                          <a:solidFill>
+                            <a:srgbClr val="000000"/>
+                          </a:solidFill>
+                          <a:effectLst/>
+                          <a:latin typeface="Aptos Narrow" panose="020B0004020202020204" pitchFamily="34" charset="0"/>
+                        </a:rPr>
+                        <a:t>140</a:t>
+                      </a:r>
+                    </a:p>
+                  </a:txBody>
+                  <a:tcPr marL="0" marR="0" marT="0" marB="0" anchor="b">
+                    <a:lnL w="6350" cap="flat" cmpd="sng" algn="ctr">
+                      <a:solidFill>
+                        <a:srgbClr val="000000"/>
+                      </a:solidFill>
+                      <a:prstDash val="solid"/>
+                      <a:round/>
+                      <a:headEnd type="none" w="med" len="med"/>
+                      <a:tailEnd type="none" w="med" len="med"/>
+                    </a:lnL>
+                    <a:lnR w="6350" cap="flat" cmpd="sng" algn="ctr">
+                      <a:solidFill>
+                        <a:srgbClr val="000000"/>
+                      </a:solidFill>
+                      <a:prstDash val="solid"/>
+                      <a:round/>
+                      <a:headEnd type="none" w="med" len="med"/>
+                      <a:tailEnd type="none" w="med" len="med"/>
+                    </a:lnR>
+                    <a:lnT w="6350" cap="flat" cmpd="sng" algn="ctr">
+                      <a:solidFill>
+                        <a:srgbClr val="000000"/>
+                      </a:solidFill>
+                      <a:prstDash val="solid"/>
+                      <a:round/>
+                      <a:headEnd type="none" w="med" len="med"/>
+                      <a:tailEnd type="none" w="med" len="med"/>
+                    </a:lnT>
+                    <a:lnB w="6350" cap="flat" cmpd="sng" algn="ctr">
+                      <a:solidFill>
+                        <a:srgbClr val="000000"/>
+                      </a:solidFill>
+                      <a:prstDash val="solid"/>
+                      <a:round/>
+                      <a:headEnd type="none" w="med" len="med"/>
+                      <a:tailEnd type="none" w="med" len="med"/>
+                    </a:lnB>
+                    <a:noFill/>
+                  </a:tcPr>
+                </a:tc>
+                <a:tc>
+                  <a:txBody>
+                    <a:bodyPr/>
+                    <a:lstStyle/>
+                    <a:p>
+                      <a:pPr marL="0" algn="ctr" defTabSz="1280160" rtl="0" eaLnBrk="1" fontAlgn="b" latinLnBrk="0" hangingPunct="1">
+                        <a:buNone/>
+                      </a:pPr>
+                      <a:r>
+                        <a:rPr lang="pt-BR" sz="1100" b="0" i="0" u="none" strike="noStrike" kern="1200">
+                          <a:solidFill>
+                            <a:srgbClr val="9C5700"/>
+                          </a:solidFill>
+                          <a:effectLst/>
+                          <a:latin typeface="Aptos Narrow" panose="020B0004020202020204" pitchFamily="34" charset="0"/>
+                          <a:ea typeface="+mn-ea"/>
+                          <a:cs typeface="+mn-cs"/>
+                        </a:rPr>
+                        <a:t>EM ANDAMENTO</a:t>
+                      </a:r>
+                    </a:p>
+                  </a:txBody>
+                  <a:tcPr marL="0" marR="0" marT="0" marB="0" anchor="b">
+                    <a:lnL w="6350" cap="flat" cmpd="sng" algn="ctr">
+                      <a:solidFill>
+                        <a:srgbClr val="000000"/>
+                      </a:solidFill>
+                      <a:prstDash val="solid"/>
+                      <a:round/>
+                      <a:headEnd type="none" w="med" len="med"/>
+                      <a:tailEnd type="none" w="med" len="med"/>
+                    </a:lnL>
+                    <a:lnR w="6350" cap="flat" cmpd="sng" algn="ctr">
+                      <a:solidFill>
+                        <a:srgbClr val="000000"/>
+                      </a:solidFill>
+                      <a:prstDash val="solid"/>
+                      <a:round/>
+                      <a:headEnd type="none" w="med" len="med"/>
+                      <a:tailEnd type="none" w="med" len="med"/>
+                    </a:lnR>
+                    <a:lnT w="6350" cap="flat" cmpd="sng" algn="ctr">
+                      <a:solidFill>
+                        <a:srgbClr val="000000"/>
+                      </a:solidFill>
+                      <a:prstDash val="solid"/>
+                      <a:round/>
+                      <a:headEnd type="none" w="med" len="med"/>
+                      <a:tailEnd type="none" w="med" len="med"/>
+                    </a:lnT>
+                    <a:lnB w="6350" cap="flat" cmpd="sng" algn="ctr">
+                      <a:solidFill>
+                        <a:srgbClr val="000000"/>
+                      </a:solidFill>
+                      <a:prstDash val="solid"/>
+                      <a:round/>
+                      <a:headEnd type="none" w="med" len="med"/>
+                      <a:tailEnd type="none" w="med" len="med"/>
+                    </a:lnB>
+                    <a:solidFill>
+                      <a:srgbClr val="FFFF99"/>
+                    </a:solidFill>
+                  </a:tcPr>
+                </a:tc>
+                <a:tc>
+                  <a:txBody>
+                    <a:bodyPr/>
+                    <a:lstStyle/>
+                    <a:p>
+                      <a:pPr algn="ctr" fontAlgn="b">
+                        <a:buNone/>
+                      </a:pPr>
+                      <a:r>
+                        <a:rPr lang="pt-BR" sz="1100" b="0" i="0" u="none" strike="noStrike" dirty="0">
+                          <a:solidFill>
+                            <a:srgbClr val="000000"/>
+                          </a:solidFill>
+                          <a:effectLst/>
+                          <a:latin typeface="Aptos Narrow" panose="020B0004020202020204" pitchFamily="34" charset="0"/>
+                        </a:rPr>
+                        <a:t>06/11/2026</a:t>
+                      </a:r>
+                    </a:p>
+                  </a:txBody>
+                  <a:tcPr marL="0" marR="0" marT="0" marB="0" anchor="b">
+                    <a:lnL w="6350" cap="flat" cmpd="sng" algn="ctr">
+                      <a:solidFill>
+                        <a:srgbClr val="000000"/>
+                      </a:solidFill>
+                      <a:prstDash val="solid"/>
+                      <a:round/>
+                      <a:headEnd type="none" w="med" len="med"/>
+                      <a:tailEnd type="none" w="med" len="med"/>
+                    </a:lnL>
+                    <a:lnR w="6350" cap="flat" cmpd="sng" algn="ctr">
+                      <a:solidFill>
+                        <a:srgbClr val="000000"/>
+                      </a:solidFill>
+                      <a:prstDash val="solid"/>
+                      <a:round/>
+                      <a:headEnd type="none" w="med" len="med"/>
+                      <a:tailEnd type="none" w="med" len="med"/>
+                    </a:lnR>
+                    <a:lnT w="6350" cap="flat" cmpd="sng" algn="ctr">
+                      <a:solidFill>
+                        <a:srgbClr val="000000"/>
+                      </a:solidFill>
+                      <a:prstDash val="solid"/>
+                      <a:round/>
+                      <a:headEnd type="none" w="med" len="med"/>
+                      <a:tailEnd type="none" w="med" len="med"/>
+                    </a:lnT>
+                    <a:lnB w="6350" cap="flat" cmpd="sng" algn="ctr">
+                      <a:solidFill>
+                        <a:srgbClr val="000000"/>
+                      </a:solidFill>
+                      <a:prstDash val="solid"/>
+                      <a:round/>
+                      <a:headEnd type="none" w="med" len="med"/>
+                      <a:tailEnd type="none" w="med" len="med"/>
+                    </a:lnB>
+                    <a:noFill/>
+                  </a:tcPr>
+                </a:tc>
+                <a:extLst>
+                  <a:ext uri="{0D108BD9-81ED-4DB2-BD59-A6C34878D82A}">
+                    <a16:rowId xmlns:a16="http://schemas.microsoft.com/office/drawing/2014/main" val="1329518401"/>
+                  </a:ext>
+                </a:extLst>
+              </a:tr>
+              <a:tr h="337119">
+                <a:tc>
+                  <a:txBody>
+                    <a:bodyPr/>
+                    <a:lstStyle/>
+                    <a:p>
+                      <a:pPr algn="ctr" fontAlgn="b">
+                        <a:buNone/>
+                      </a:pPr>
+                      <a:r>
+                        <a:rPr lang="pt-BR" sz="1100" b="0" i="0" u="none" strike="noStrike">
+                          <a:solidFill>
+                            <a:srgbClr val="000000"/>
+                          </a:solidFill>
+                          <a:effectLst/>
+                          <a:latin typeface="Aptos Narrow" panose="020B0004020202020204" pitchFamily="34" charset="0"/>
+                        </a:rPr>
+                        <a:t>210</a:t>
+                      </a:r>
+                    </a:p>
+                  </a:txBody>
+                  <a:tcPr marL="0" marR="0" marT="0" marB="0" anchor="b">
+                    <a:lnL w="6350" cap="flat" cmpd="sng" algn="ctr">
+                      <a:solidFill>
+                        <a:srgbClr val="000000"/>
+                      </a:solidFill>
+                      <a:prstDash val="solid"/>
+                      <a:round/>
+                      <a:headEnd type="none" w="med" len="med"/>
+                      <a:tailEnd type="none" w="med" len="med"/>
+                    </a:lnL>
+                    <a:lnR w="6350" cap="flat" cmpd="sng" algn="ctr">
+                      <a:solidFill>
+                        <a:srgbClr val="000000"/>
+                      </a:solidFill>
+                      <a:prstDash val="solid"/>
+                      <a:round/>
+                      <a:headEnd type="none" w="med" len="med"/>
+                      <a:tailEnd type="none" w="med" len="med"/>
+                    </a:lnR>
+                    <a:lnT w="6350" cap="flat" cmpd="sng" algn="ctr">
+                      <a:solidFill>
+                        <a:srgbClr val="000000"/>
+                      </a:solidFill>
+                      <a:prstDash val="solid"/>
+                      <a:round/>
+                      <a:headEnd type="none" w="med" len="med"/>
+                      <a:tailEnd type="none" w="med" len="med"/>
+                    </a:lnT>
+                    <a:lnB w="6350" cap="flat" cmpd="sng" algn="ctr">
+                      <a:solidFill>
+                        <a:srgbClr val="000000"/>
+                      </a:solidFill>
+                      <a:prstDash val="solid"/>
+                      <a:round/>
+                      <a:headEnd type="none" w="med" len="med"/>
+                      <a:tailEnd type="none" w="med" len="med"/>
+                    </a:lnB>
+                    <a:noFill/>
+                  </a:tcPr>
+                </a:tc>
+                <a:tc>
+                  <a:txBody>
+                    <a:bodyPr/>
+                    <a:lstStyle/>
+                    <a:p>
+                      <a:pPr algn="ctr" fontAlgn="b">
+                        <a:buNone/>
+                      </a:pPr>
+                      <a:r>
+                        <a:rPr lang="pt-BR" sz="1100" b="0" i="0" u="none" strike="noStrike">
+                          <a:solidFill>
+                            <a:srgbClr val="C00000"/>
+                          </a:solidFill>
+                          <a:effectLst/>
+                          <a:latin typeface="Aptos Narrow" panose="020B0004020202020204" pitchFamily="34" charset="0"/>
+                        </a:rPr>
+                        <a:t>NÃO INICIADA</a:t>
+                      </a:r>
+                    </a:p>
+                  </a:txBody>
+                  <a:tcPr marL="0" marR="0" marT="0" marB="0" anchor="b">
+                    <a:lnL w="6350" cap="flat" cmpd="sng" algn="ctr">
+                      <a:solidFill>
+                        <a:srgbClr val="000000"/>
+                      </a:solidFill>
+                      <a:prstDash val="solid"/>
+                      <a:round/>
+                      <a:headEnd type="none" w="med" len="med"/>
+                      <a:tailEnd type="none" w="med" len="med"/>
+                    </a:lnL>
+                    <a:lnR w="6350" cap="flat" cmpd="sng" algn="ctr">
+                      <a:solidFill>
+                        <a:srgbClr val="000000"/>
+                      </a:solidFill>
+                      <a:prstDash val="solid"/>
+                      <a:round/>
+                      <a:headEnd type="none" w="med" len="med"/>
+                      <a:tailEnd type="none" w="med" len="med"/>
+                    </a:lnR>
+                    <a:lnT w="6350" cap="flat" cmpd="sng" algn="ctr">
+                      <a:solidFill>
+                        <a:srgbClr val="000000"/>
+                      </a:solidFill>
+                      <a:prstDash val="solid"/>
+                      <a:round/>
+                      <a:headEnd type="none" w="med" len="med"/>
+                      <a:tailEnd type="none" w="med" len="med"/>
+                    </a:lnT>
+                    <a:lnB w="6350" cap="flat" cmpd="sng" algn="ctr">
+                      <a:solidFill>
+                        <a:srgbClr val="000000"/>
+                      </a:solidFill>
+                      <a:prstDash val="solid"/>
+                      <a:round/>
+                      <a:headEnd type="none" w="med" len="med"/>
+                      <a:tailEnd type="none" w="med" len="med"/>
+                    </a:lnB>
+                    <a:solidFill>
+                      <a:srgbClr val="FFC1C1"/>
+                    </a:solidFill>
+                  </a:tcPr>
+                </a:tc>
+                <a:tc>
+                  <a:txBody>
+                    <a:bodyPr/>
+                    <a:lstStyle/>
+                    <a:p>
+                      <a:pPr algn="ctr" fontAlgn="b">
+                        <a:buNone/>
+                      </a:pPr>
+                      <a:r>
+                        <a:rPr lang="pt-BR" sz="1100" b="0" i="0" u="none" strike="noStrike">
+                          <a:solidFill>
+                            <a:srgbClr val="000000"/>
+                          </a:solidFill>
+                          <a:effectLst/>
+                          <a:latin typeface="Aptos Narrow"/>
+                        </a:rPr>
+                        <a:t>24/11/2026</a:t>
+                      </a:r>
+                    </a:p>
+                  </a:txBody>
+                  <a:tcPr marL="0" marR="0" marT="0" marB="0" anchor="b">
+                    <a:lnL w="6350" cap="flat" cmpd="sng" algn="ctr">
+                      <a:solidFill>
+                        <a:srgbClr val="000000"/>
+                      </a:solidFill>
+                      <a:prstDash val="solid"/>
+                      <a:round/>
+                      <a:headEnd type="none" w="med" len="med"/>
+                      <a:tailEnd type="none" w="med" len="med"/>
+                    </a:lnL>
+                    <a:lnR w="6350" cap="flat" cmpd="sng" algn="ctr">
+                      <a:solidFill>
+                        <a:srgbClr val="000000"/>
+                      </a:solidFill>
+                      <a:prstDash val="solid"/>
+                      <a:round/>
+                      <a:headEnd type="none" w="med" len="med"/>
+                      <a:tailEnd type="none" w="med" len="med"/>
+                    </a:lnR>
+                    <a:lnT w="6350" cap="flat" cmpd="sng" algn="ctr">
+                      <a:solidFill>
+                        <a:srgbClr val="000000"/>
+                      </a:solidFill>
+                      <a:prstDash val="solid"/>
+                      <a:round/>
+                      <a:headEnd type="none" w="med" len="med"/>
+                      <a:tailEnd type="none" w="med" len="med"/>
+                    </a:lnT>
+                    <a:lnB w="6350" cap="flat" cmpd="sng" algn="ctr">
+                      <a:solidFill>
+                        <a:srgbClr val="000000"/>
+                      </a:solidFill>
+                      <a:prstDash val="solid"/>
+                      <a:round/>
+                      <a:headEnd type="none" w="med" len="med"/>
+                      <a:tailEnd type="none" w="med" len="med"/>
+                    </a:lnB>
+                    <a:noFill/>
+                  </a:tcPr>
+                </a:tc>
+                <a:extLst>
+                  <a:ext uri="{0D108BD9-81ED-4DB2-BD59-A6C34878D82A}">
+                    <a16:rowId xmlns:a16="http://schemas.microsoft.com/office/drawing/2014/main" val="2633541965"/>
+                  </a:ext>
+                </a:extLst>
+              </a:tr>
+              <a:tr h="337119">
+                <a:tc>
+                  <a:txBody>
+                    <a:bodyPr/>
+                    <a:lstStyle/>
+                    <a:p>
+                      <a:pPr algn="ctr" fontAlgn="b">
+                        <a:buNone/>
+                      </a:pPr>
+                      <a:r>
+                        <a:rPr lang="pt-BR" sz="1100" b="0" i="0" u="none" strike="noStrike">
+                          <a:solidFill>
+                            <a:srgbClr val="000000"/>
+                          </a:solidFill>
+                          <a:effectLst/>
+                          <a:latin typeface="Aptos Narrow" panose="020B0004020202020204" pitchFamily="34" charset="0"/>
+                        </a:rPr>
+                        <a:t>220</a:t>
+                      </a:r>
+                    </a:p>
+                  </a:txBody>
+                  <a:tcPr marL="0" marR="0" marT="0" marB="0" anchor="b">
+                    <a:lnL w="6350" cap="flat" cmpd="sng" algn="ctr">
+                      <a:solidFill>
+                        <a:srgbClr val="000000"/>
+                      </a:solidFill>
+                      <a:prstDash val="solid"/>
+                      <a:round/>
+                      <a:headEnd type="none" w="med" len="med"/>
+                      <a:tailEnd type="none" w="med" len="med"/>
+                    </a:lnL>
+                    <a:lnR w="6350" cap="flat" cmpd="sng" algn="ctr">
+                      <a:solidFill>
+                        <a:srgbClr val="000000"/>
+                      </a:solidFill>
+                      <a:prstDash val="solid"/>
+                      <a:round/>
+                      <a:headEnd type="none" w="med" len="med"/>
+                      <a:tailEnd type="none" w="med" len="med"/>
+                    </a:lnR>
+                    <a:lnT w="6350" cap="flat" cmpd="sng" algn="ctr">
+                      <a:solidFill>
+                        <a:srgbClr val="000000"/>
+                      </a:solidFill>
+                      <a:prstDash val="solid"/>
+                      <a:round/>
+                      <a:headEnd type="none" w="med" len="med"/>
+                      <a:tailEnd type="none" w="med" len="med"/>
+                    </a:lnT>
+                    <a:lnB w="6350" cap="flat" cmpd="sng" algn="ctr">
+                      <a:solidFill>
+                        <a:srgbClr val="000000"/>
+                      </a:solidFill>
+                      <a:prstDash val="solid"/>
+                      <a:round/>
+                      <a:headEnd type="none" w="med" len="med"/>
+                      <a:tailEnd type="none" w="med" len="med"/>
+                    </a:lnB>
+                    <a:noFill/>
+                  </a:tcPr>
+                </a:tc>
+                <a:tc>
+                  <a:txBody>
+                    <a:bodyPr/>
+                    <a:lstStyle/>
+                    <a:p>
+                      <a:pPr marL="0" marR="0" lvl="0" indent="0" algn="ctr" defTabSz="1280160" rtl="0" eaLnBrk="1" fontAlgn="b" latinLnBrk="0" hangingPunct="1">
+                        <a:lnSpc>
+                          <a:spcPct val="100000"/>
+                        </a:lnSpc>
+                        <a:spcBef>
+                          <a:spcPts val="0"/>
+                        </a:spcBef>
+                        <a:spcAft>
+                          <a:spcPts val="0"/>
+                        </a:spcAft>
+                        <a:buClrTx/>
+                        <a:buSzTx/>
+                        <a:buFontTx/>
+                        <a:buNone/>
+                        <a:tabLst/>
+                        <a:defRPr/>
+                      </a:pPr>
+                      <a:r>
+                        <a:rPr lang="pt-BR" sz="1100" b="0" i="0" u="none" strike="noStrike">
+                          <a:solidFill>
+                            <a:srgbClr val="C00000"/>
+                          </a:solidFill>
+                          <a:effectLst/>
+                          <a:latin typeface="Aptos Narrow" panose="020B0004020202020204" pitchFamily="34" charset="0"/>
+                        </a:rPr>
+                        <a:t>NÃO INICIADA</a:t>
+                      </a:r>
+                    </a:p>
+                  </a:txBody>
+                  <a:tcPr marL="0" marR="0" marT="0" marB="0" anchor="b">
+                    <a:lnL w="6350" cap="flat" cmpd="sng" algn="ctr">
+                      <a:solidFill>
+                        <a:srgbClr val="000000"/>
+                      </a:solidFill>
+                      <a:prstDash val="solid"/>
+                      <a:round/>
+                      <a:headEnd type="none" w="med" len="med"/>
+                      <a:tailEnd type="none" w="med" len="med"/>
+                    </a:lnL>
+                    <a:lnR w="6350" cap="flat" cmpd="sng" algn="ctr">
+                      <a:solidFill>
+                        <a:srgbClr val="000000"/>
+                      </a:solidFill>
+                      <a:prstDash val="solid"/>
+                      <a:round/>
+                      <a:headEnd type="none" w="med" len="med"/>
+                      <a:tailEnd type="none" w="med" len="med"/>
+                    </a:lnR>
+                    <a:lnT w="6350" cap="flat" cmpd="sng" algn="ctr">
+                      <a:solidFill>
+                        <a:srgbClr val="000000"/>
+                      </a:solidFill>
+                      <a:prstDash val="solid"/>
+                      <a:round/>
+                      <a:headEnd type="none" w="med" len="med"/>
+                      <a:tailEnd type="none" w="med" len="med"/>
+                    </a:lnT>
+                    <a:lnB w="6350" cap="flat" cmpd="sng" algn="ctr">
+                      <a:solidFill>
+                        <a:srgbClr val="000000"/>
+                      </a:solidFill>
+                      <a:prstDash val="solid"/>
+                      <a:round/>
+                      <a:headEnd type="none" w="med" len="med"/>
+                      <a:tailEnd type="none" w="med" len="med"/>
+                    </a:lnB>
+                    <a:solidFill>
+                      <a:srgbClr val="FFC1C1"/>
+                    </a:solidFill>
+                  </a:tcPr>
+                </a:tc>
+                <a:tc>
+                  <a:txBody>
+                    <a:bodyPr/>
+                    <a:lstStyle/>
+                    <a:p>
+                      <a:pPr algn="ctr" fontAlgn="b">
+                        <a:buNone/>
+                      </a:pPr>
+                      <a:r>
+                        <a:rPr lang="pt-BR" sz="1100" b="0" i="0" u="none" strike="noStrike">
+                          <a:solidFill>
+                            <a:srgbClr val="000000"/>
+                          </a:solidFill>
+                          <a:effectLst/>
+                          <a:latin typeface="Aptos Narrow"/>
+                        </a:rPr>
+                        <a:t>17/12/2026</a:t>
+                      </a:r>
+                    </a:p>
+                  </a:txBody>
+                  <a:tcPr marL="0" marR="0" marT="0" marB="0" anchor="b">
+                    <a:lnL w="6350" cap="flat" cmpd="sng" algn="ctr">
+                      <a:solidFill>
+                        <a:srgbClr val="000000"/>
+                      </a:solidFill>
+                      <a:prstDash val="solid"/>
+                      <a:round/>
+                      <a:headEnd type="none" w="med" len="med"/>
+                      <a:tailEnd type="none" w="med" len="med"/>
+                    </a:lnL>
+                    <a:lnR w="6350" cap="flat" cmpd="sng" algn="ctr">
+                      <a:solidFill>
+                        <a:srgbClr val="000000"/>
+                      </a:solidFill>
+                      <a:prstDash val="solid"/>
+                      <a:round/>
+                      <a:headEnd type="none" w="med" len="med"/>
+                      <a:tailEnd type="none" w="med" len="med"/>
+                    </a:lnR>
+                    <a:lnT w="6350" cap="flat" cmpd="sng" algn="ctr">
+                      <a:solidFill>
+                        <a:srgbClr val="000000"/>
+                      </a:solidFill>
+                      <a:prstDash val="solid"/>
+                      <a:round/>
+                      <a:headEnd type="none" w="med" len="med"/>
+                      <a:tailEnd type="none" w="med" len="med"/>
+                    </a:lnT>
+                    <a:lnB w="6350" cap="flat" cmpd="sng" algn="ctr">
+                      <a:solidFill>
+                        <a:srgbClr val="000000"/>
+                      </a:solidFill>
+                      <a:prstDash val="solid"/>
+                      <a:round/>
+                      <a:headEnd type="none" w="med" len="med"/>
+                      <a:tailEnd type="none" w="med" len="med"/>
+                    </a:lnB>
+                    <a:noFill/>
+                  </a:tcPr>
+                </a:tc>
+                <a:extLst>
+                  <a:ext uri="{0D108BD9-81ED-4DB2-BD59-A6C34878D82A}">
+                    <a16:rowId xmlns:a16="http://schemas.microsoft.com/office/drawing/2014/main" val="3732560414"/>
+                  </a:ext>
+                </a:extLst>
+              </a:tr>
+              <a:tr h="337119">
+                <a:tc>
+                  <a:txBody>
+                    <a:bodyPr/>
+                    <a:lstStyle/>
+                    <a:p>
+                      <a:pPr algn="ctr" fontAlgn="b">
+                        <a:buNone/>
+                      </a:pPr>
+                      <a:r>
+                        <a:rPr lang="pt-BR" sz="1100" b="0" i="0" u="none" strike="noStrike">
+                          <a:solidFill>
+                            <a:srgbClr val="000000"/>
+                          </a:solidFill>
+                          <a:effectLst/>
+                          <a:latin typeface="Aptos Narrow" panose="020B0004020202020204" pitchFamily="34" charset="0"/>
+                        </a:rPr>
+                        <a:t>230</a:t>
+                      </a:r>
+                    </a:p>
+                  </a:txBody>
+                  <a:tcPr marL="0" marR="0" marT="0" marB="0" anchor="b">
+                    <a:lnL w="6350" cap="flat" cmpd="sng" algn="ctr">
+                      <a:solidFill>
+                        <a:srgbClr val="000000"/>
+                      </a:solidFill>
+                      <a:prstDash val="solid"/>
+                      <a:round/>
+                      <a:headEnd type="none" w="med" len="med"/>
+                      <a:tailEnd type="none" w="med" len="med"/>
+                    </a:lnL>
+                    <a:lnR w="6350" cap="flat" cmpd="sng" algn="ctr">
+                      <a:solidFill>
+                        <a:srgbClr val="000000"/>
+                      </a:solidFill>
+                      <a:prstDash val="solid"/>
+                      <a:round/>
+                      <a:headEnd type="none" w="med" len="med"/>
+                      <a:tailEnd type="none" w="med" len="med"/>
+                    </a:lnR>
+                    <a:lnT w="6350" cap="flat" cmpd="sng" algn="ctr">
+                      <a:solidFill>
+                        <a:srgbClr val="000000"/>
+                      </a:solidFill>
+                      <a:prstDash val="solid"/>
+                      <a:round/>
+                      <a:headEnd type="none" w="med" len="med"/>
+                      <a:tailEnd type="none" w="med" len="med"/>
+                    </a:lnT>
+                    <a:lnB w="6350" cap="flat" cmpd="sng" algn="ctr">
+                      <a:solidFill>
+                        <a:srgbClr val="000000"/>
+                      </a:solidFill>
+                      <a:prstDash val="solid"/>
+                      <a:round/>
+                      <a:headEnd type="none" w="med" len="med"/>
+                      <a:tailEnd type="none" w="med" len="med"/>
+                    </a:lnB>
+                    <a:noFill/>
+                  </a:tcPr>
+                </a:tc>
+                <a:tc>
+                  <a:txBody>
+                    <a:bodyPr/>
+                    <a:lstStyle/>
+                    <a:p>
+                      <a:pPr algn="ctr" fontAlgn="b">
+                        <a:buNone/>
+                      </a:pPr>
+                      <a:r>
+                        <a:rPr lang="pt-BR" sz="1100" b="0" i="0" u="none" strike="noStrike">
+                          <a:solidFill>
+                            <a:srgbClr val="9C5700"/>
+                          </a:solidFill>
+                          <a:effectLst/>
+                          <a:latin typeface="Aptos Narrow" panose="020B0004020202020204" pitchFamily="34" charset="0"/>
+                        </a:rPr>
+                        <a:t>EM ANDAMENTO</a:t>
+                      </a:r>
+                    </a:p>
+                  </a:txBody>
+                  <a:tcPr marL="0" marR="0" marT="0" marB="0" anchor="b">
+                    <a:lnL w="6350" cap="flat" cmpd="sng" algn="ctr">
+                      <a:solidFill>
+                        <a:srgbClr val="000000"/>
+                      </a:solidFill>
+                      <a:prstDash val="solid"/>
+                      <a:round/>
+                      <a:headEnd type="none" w="med" len="med"/>
+                      <a:tailEnd type="none" w="med" len="med"/>
+                    </a:lnL>
+                    <a:lnR w="6350" cap="flat" cmpd="sng" algn="ctr">
+                      <a:solidFill>
+                        <a:srgbClr val="000000"/>
+                      </a:solidFill>
+                      <a:prstDash val="solid"/>
+                      <a:round/>
+                      <a:headEnd type="none" w="med" len="med"/>
+                      <a:tailEnd type="none" w="med" len="med"/>
+                    </a:lnR>
+                    <a:lnT w="6350" cap="flat" cmpd="sng" algn="ctr">
+                      <a:solidFill>
+                        <a:srgbClr val="000000"/>
+                      </a:solidFill>
+                      <a:prstDash val="solid"/>
+                      <a:round/>
+                      <a:headEnd type="none" w="med" len="med"/>
+                      <a:tailEnd type="none" w="med" len="med"/>
+                    </a:lnT>
+                    <a:lnB w="6350" cap="flat" cmpd="sng" algn="ctr">
+                      <a:solidFill>
+                        <a:srgbClr val="000000"/>
+                      </a:solidFill>
+                      <a:prstDash val="solid"/>
+                      <a:round/>
+                      <a:headEnd type="none" w="med" len="med"/>
+                      <a:tailEnd type="none" w="med" len="med"/>
+                    </a:lnB>
+                    <a:solidFill>
+                      <a:srgbClr val="FFEB9C"/>
+                    </a:solidFill>
+                  </a:tcPr>
+                </a:tc>
+                <a:tc>
+                  <a:txBody>
+                    <a:bodyPr/>
+                    <a:lstStyle/>
+                    <a:p>
+                      <a:pPr algn="ctr" fontAlgn="b">
+                        <a:buNone/>
+                      </a:pPr>
+                      <a:r>
+                        <a:rPr lang="pt-BR" sz="1100" b="0" i="0" u="none" strike="noStrike">
+                          <a:solidFill>
+                            <a:srgbClr val="000000"/>
+                          </a:solidFill>
+                          <a:effectLst/>
+                          <a:latin typeface="Aptos Narrow"/>
+                        </a:rPr>
+                        <a:t>10/11/2026</a:t>
+                      </a:r>
+                    </a:p>
+                  </a:txBody>
+                  <a:tcPr marL="0" marR="0" marT="0" marB="0" anchor="b">
+                    <a:lnL w="6350" cap="flat" cmpd="sng" algn="ctr">
+                      <a:solidFill>
+                        <a:srgbClr val="000000"/>
+                      </a:solidFill>
+                      <a:prstDash val="solid"/>
+                      <a:round/>
+                      <a:headEnd type="none" w="med" len="med"/>
+                      <a:tailEnd type="none" w="med" len="med"/>
+                    </a:lnL>
+                    <a:lnR w="6350" cap="flat" cmpd="sng" algn="ctr">
+                      <a:solidFill>
+                        <a:srgbClr val="000000"/>
+                      </a:solidFill>
+                      <a:prstDash val="solid"/>
+                      <a:round/>
+                      <a:headEnd type="none" w="med" len="med"/>
+                      <a:tailEnd type="none" w="med" len="med"/>
+                    </a:lnR>
+                    <a:lnT w="6350" cap="flat" cmpd="sng" algn="ctr">
+                      <a:solidFill>
+                        <a:srgbClr val="000000"/>
+                      </a:solidFill>
+                      <a:prstDash val="solid"/>
+                      <a:round/>
+                      <a:headEnd type="none" w="med" len="med"/>
+                      <a:tailEnd type="none" w="med" len="med"/>
+                    </a:lnT>
+                    <a:lnB w="6350" cap="flat" cmpd="sng" algn="ctr">
+                      <a:solidFill>
+                        <a:srgbClr val="000000"/>
+                      </a:solidFill>
+                      <a:prstDash val="solid"/>
+                      <a:round/>
+                      <a:headEnd type="none" w="med" len="med"/>
+                      <a:tailEnd type="none" w="med" len="med"/>
+                    </a:lnB>
+                    <a:noFill/>
+                  </a:tcPr>
+                </a:tc>
+                <a:extLst>
+                  <a:ext uri="{0D108BD9-81ED-4DB2-BD59-A6C34878D82A}">
+                    <a16:rowId xmlns:a16="http://schemas.microsoft.com/office/drawing/2014/main" val="2349738729"/>
+                  </a:ext>
+                </a:extLst>
+              </a:tr>
+              <a:tr h="337119">
+                <a:tc>
+                  <a:txBody>
+                    <a:bodyPr/>
+                    <a:lstStyle/>
+                    <a:p>
+                      <a:pPr algn="ctr" fontAlgn="b">
+                        <a:buNone/>
+                      </a:pPr>
+                      <a:r>
+                        <a:rPr lang="pt-BR" sz="1100" b="0" i="0" u="none" strike="noStrike">
+                          <a:solidFill>
+                            <a:srgbClr val="000000"/>
+                          </a:solidFill>
+                          <a:effectLst/>
+                          <a:latin typeface="Aptos Narrow" panose="020B0004020202020204" pitchFamily="34" charset="0"/>
+                        </a:rPr>
+                        <a:t>240</a:t>
+                      </a:r>
+                    </a:p>
+                  </a:txBody>
+                  <a:tcPr marL="0" marR="0" marT="0" marB="0" anchor="b">
+                    <a:lnL w="6350" cap="flat" cmpd="sng" algn="ctr">
+                      <a:solidFill>
+                        <a:srgbClr val="000000"/>
+                      </a:solidFill>
+                      <a:prstDash val="solid"/>
+                      <a:round/>
+                      <a:headEnd type="none" w="med" len="med"/>
+                      <a:tailEnd type="none" w="med" len="med"/>
+                    </a:lnL>
+                    <a:lnR w="6350" cap="flat" cmpd="sng" algn="ctr">
+                      <a:solidFill>
+                        <a:srgbClr val="000000"/>
+                      </a:solidFill>
+                      <a:prstDash val="solid"/>
+                      <a:round/>
+                      <a:headEnd type="none" w="med" len="med"/>
+                      <a:tailEnd type="none" w="med" len="med"/>
+                    </a:lnR>
+                    <a:lnT w="6350" cap="flat" cmpd="sng" algn="ctr">
+                      <a:solidFill>
+                        <a:srgbClr val="000000"/>
+                      </a:solidFill>
+                      <a:prstDash val="solid"/>
+                      <a:round/>
+                      <a:headEnd type="none" w="med" len="med"/>
+                      <a:tailEnd type="none" w="med" len="med"/>
+                    </a:lnT>
+                    <a:lnB w="6350" cap="flat" cmpd="sng" algn="ctr">
+                      <a:solidFill>
+                        <a:srgbClr val="000000"/>
+                      </a:solidFill>
+                      <a:prstDash val="solid"/>
+                      <a:round/>
+                      <a:headEnd type="none" w="med" len="med"/>
+                      <a:tailEnd type="none" w="med" len="med"/>
+                    </a:lnB>
+                    <a:noFill/>
+                  </a:tcPr>
+                </a:tc>
+                <a:tc>
+                  <a:txBody>
+                    <a:bodyPr/>
+                    <a:lstStyle/>
+                    <a:p>
+                      <a:pPr algn="ctr" fontAlgn="b">
+                        <a:buNone/>
+                      </a:pPr>
+                      <a:r>
+                        <a:rPr lang="pt-BR" sz="1100" b="0" i="0" u="none" strike="noStrike">
+                          <a:solidFill>
+                            <a:srgbClr val="9C5700"/>
+                          </a:solidFill>
+                          <a:effectLst/>
+                          <a:latin typeface="Aptos Narrow" panose="020B0004020202020204" pitchFamily="34" charset="0"/>
+                        </a:rPr>
+                        <a:t>EM ANDAMENTO</a:t>
+                      </a:r>
+                    </a:p>
+                  </a:txBody>
+                  <a:tcPr marL="0" marR="0" marT="0" marB="0" anchor="b">
+                    <a:lnL w="6350" cap="flat" cmpd="sng" algn="ctr">
+                      <a:solidFill>
+                        <a:srgbClr val="000000"/>
+                      </a:solidFill>
+                      <a:prstDash val="solid"/>
+                      <a:round/>
+                      <a:headEnd type="none" w="med" len="med"/>
+                      <a:tailEnd type="none" w="med" len="med"/>
+                    </a:lnL>
+                    <a:lnR w="6350" cap="flat" cmpd="sng" algn="ctr">
+                      <a:solidFill>
+                        <a:srgbClr val="000000"/>
+                      </a:solidFill>
+                      <a:prstDash val="solid"/>
+                      <a:round/>
+                      <a:headEnd type="none" w="med" len="med"/>
+                      <a:tailEnd type="none" w="med" len="med"/>
+                    </a:lnR>
+                    <a:lnT w="6350" cap="flat" cmpd="sng" algn="ctr">
+                      <a:solidFill>
+                        <a:srgbClr val="000000"/>
+                      </a:solidFill>
+                      <a:prstDash val="solid"/>
+                      <a:round/>
+                      <a:headEnd type="none" w="med" len="med"/>
+                      <a:tailEnd type="none" w="med" len="med"/>
+                    </a:lnT>
+                    <a:lnB w="6350" cap="flat" cmpd="sng" algn="ctr">
+                      <a:solidFill>
+                        <a:srgbClr val="000000"/>
+                      </a:solidFill>
+                      <a:prstDash val="solid"/>
+                      <a:round/>
+                      <a:headEnd type="none" w="med" len="med"/>
+                      <a:tailEnd type="none" w="med" len="med"/>
+                    </a:lnB>
+                    <a:solidFill>
+                      <a:srgbClr val="FFEB9C"/>
+                    </a:solidFill>
+                  </a:tcPr>
+                </a:tc>
+                <a:tc>
+                  <a:txBody>
+                    <a:bodyPr/>
+                    <a:lstStyle/>
+                    <a:p>
+                      <a:pPr algn="ctr" fontAlgn="b">
+                        <a:buNone/>
+                      </a:pPr>
+                      <a:r>
+                        <a:rPr lang="pt-BR" sz="1100" b="0" i="0" u="none" strike="noStrike">
+                          <a:solidFill>
+                            <a:srgbClr val="000000"/>
+                          </a:solidFill>
+                          <a:effectLst/>
+                          <a:latin typeface="Aptos Narrow"/>
+                        </a:rPr>
+                        <a:t>24/11/2026</a:t>
+                      </a:r>
+                    </a:p>
+                  </a:txBody>
+                  <a:tcPr marL="0" marR="0" marT="0" marB="0" anchor="b">
+                    <a:lnL w="6350" cap="flat" cmpd="sng" algn="ctr">
+                      <a:solidFill>
+                        <a:srgbClr val="000000"/>
+                      </a:solidFill>
+                      <a:prstDash val="solid"/>
+                      <a:round/>
+                      <a:headEnd type="none" w="med" len="med"/>
+                      <a:tailEnd type="none" w="med" len="med"/>
+                    </a:lnL>
+                    <a:lnR w="6350" cap="flat" cmpd="sng" algn="ctr">
+                      <a:solidFill>
+                        <a:srgbClr val="000000"/>
+                      </a:solidFill>
+                      <a:prstDash val="solid"/>
+                      <a:round/>
+                      <a:headEnd type="none" w="med" len="med"/>
+                      <a:tailEnd type="none" w="med" len="med"/>
+                    </a:lnR>
+                    <a:lnT w="6350" cap="flat" cmpd="sng" algn="ctr">
+                      <a:solidFill>
+                        <a:srgbClr val="000000"/>
+                      </a:solidFill>
+                      <a:prstDash val="solid"/>
+                      <a:round/>
+                      <a:headEnd type="none" w="med" len="med"/>
+                      <a:tailEnd type="none" w="med" len="med"/>
+                    </a:lnT>
+                    <a:lnB w="6350" cap="flat" cmpd="sng" algn="ctr">
+                      <a:solidFill>
+                        <a:srgbClr val="000000"/>
+                      </a:solidFill>
+                      <a:prstDash val="solid"/>
+                      <a:round/>
+                      <a:headEnd type="none" w="med" len="med"/>
+                      <a:tailEnd type="none" w="med" len="med"/>
+                    </a:lnB>
+                    <a:noFill/>
+                  </a:tcPr>
+                </a:tc>
+                <a:extLst>
+                  <a:ext uri="{0D108BD9-81ED-4DB2-BD59-A6C34878D82A}">
+                    <a16:rowId xmlns:a16="http://schemas.microsoft.com/office/drawing/2014/main" val="3700067961"/>
+                  </a:ext>
+                </a:extLst>
+              </a:tr>
+              <a:tr h="337119">
+                <a:tc>
+                  <a:txBody>
+                    <a:bodyPr/>
+                    <a:lstStyle/>
+                    <a:p>
+                      <a:pPr algn="ctr" fontAlgn="b">
+                        <a:buNone/>
+                      </a:pPr>
+                      <a:r>
+                        <a:rPr lang="pt-BR" sz="1100" b="0" i="0" u="none" strike="noStrike">
+                          <a:solidFill>
+                            <a:srgbClr val="000000"/>
+                          </a:solidFill>
+                          <a:effectLst/>
+                          <a:latin typeface="Aptos Narrow" panose="020B0004020202020204" pitchFamily="34" charset="0"/>
+                        </a:rPr>
+                        <a:t>250</a:t>
+                      </a:r>
+                    </a:p>
+                  </a:txBody>
+                  <a:tcPr marL="0" marR="0" marT="0" marB="0" anchor="b">
+                    <a:lnL w="6350" cap="flat" cmpd="sng" algn="ctr">
+                      <a:solidFill>
+                        <a:srgbClr val="000000"/>
+                      </a:solidFill>
+                      <a:prstDash val="solid"/>
+                      <a:round/>
+                      <a:headEnd type="none" w="med" len="med"/>
+                      <a:tailEnd type="none" w="med" len="med"/>
+                    </a:lnL>
+                    <a:lnR w="6350" cap="flat" cmpd="sng" algn="ctr">
+                      <a:solidFill>
+                        <a:srgbClr val="000000"/>
+                      </a:solidFill>
+                      <a:prstDash val="solid"/>
+                      <a:round/>
+                      <a:headEnd type="none" w="med" len="med"/>
+                      <a:tailEnd type="none" w="med" len="med"/>
+                    </a:lnR>
+                    <a:lnT w="6350" cap="flat" cmpd="sng" algn="ctr">
+                      <a:solidFill>
+                        <a:srgbClr val="000000"/>
+                      </a:solidFill>
+                      <a:prstDash val="solid"/>
+                      <a:round/>
+                      <a:headEnd type="none" w="med" len="med"/>
+                      <a:tailEnd type="none" w="med" len="med"/>
+                    </a:lnT>
+                    <a:lnB w="6350" cap="flat" cmpd="sng" algn="ctr">
+                      <a:solidFill>
+                        <a:srgbClr val="000000"/>
+                      </a:solidFill>
+                      <a:prstDash val="solid"/>
+                      <a:round/>
+                      <a:headEnd type="none" w="med" len="med"/>
+                      <a:tailEnd type="none" w="med" len="med"/>
+                    </a:lnB>
+                    <a:noFill/>
+                  </a:tcPr>
+                </a:tc>
+                <a:tc>
+                  <a:txBody>
+                    <a:bodyPr/>
+                    <a:lstStyle/>
+                    <a:p>
+                      <a:pPr algn="ctr" fontAlgn="b">
+                        <a:buNone/>
+                      </a:pPr>
+                      <a:r>
+                        <a:rPr lang="pt-BR" sz="1100" b="0" i="0" u="none" strike="noStrike">
+                          <a:solidFill>
+                            <a:srgbClr val="9C5700"/>
+                          </a:solidFill>
+                          <a:effectLst/>
+                          <a:latin typeface="Aptos Narrow" panose="020B0004020202020204" pitchFamily="34" charset="0"/>
+                        </a:rPr>
+                        <a:t>EM ANDAMENTO</a:t>
+                      </a:r>
+                    </a:p>
+                  </a:txBody>
+                  <a:tcPr marL="0" marR="0" marT="0" marB="0" anchor="b">
+                    <a:lnL w="6350" cap="flat" cmpd="sng" algn="ctr">
+                      <a:solidFill>
+                        <a:srgbClr val="000000"/>
+                      </a:solidFill>
+                      <a:prstDash val="solid"/>
+                      <a:round/>
+                      <a:headEnd type="none" w="med" len="med"/>
+                      <a:tailEnd type="none" w="med" len="med"/>
+                    </a:lnL>
+                    <a:lnR w="6350" cap="flat" cmpd="sng" algn="ctr">
+                      <a:solidFill>
+                        <a:srgbClr val="000000"/>
+                      </a:solidFill>
+                      <a:prstDash val="solid"/>
+                      <a:round/>
+                      <a:headEnd type="none" w="med" len="med"/>
+                      <a:tailEnd type="none" w="med" len="med"/>
+                    </a:lnR>
+                    <a:lnT w="6350" cap="flat" cmpd="sng" algn="ctr">
+                      <a:solidFill>
+                        <a:srgbClr val="000000"/>
+                      </a:solidFill>
+                      <a:prstDash val="solid"/>
+                      <a:round/>
+                      <a:headEnd type="none" w="med" len="med"/>
+                      <a:tailEnd type="none" w="med" len="med"/>
+                    </a:lnT>
+                    <a:lnB w="6350" cap="flat" cmpd="sng" algn="ctr">
+                      <a:solidFill>
+                        <a:srgbClr val="000000"/>
+                      </a:solidFill>
+                      <a:prstDash val="solid"/>
+                      <a:round/>
+                      <a:headEnd type="none" w="med" len="med"/>
+                      <a:tailEnd type="none" w="med" len="med"/>
+                    </a:lnB>
+                    <a:solidFill>
+                      <a:srgbClr val="FFEB9C"/>
+                    </a:solidFill>
+                  </a:tcPr>
+                </a:tc>
+                <a:tc>
+                  <a:txBody>
+                    <a:bodyPr/>
+                    <a:lstStyle/>
+                    <a:p>
+                      <a:pPr algn="ctr" fontAlgn="b">
+                        <a:buNone/>
+                      </a:pPr>
+                      <a:r>
+                        <a:rPr lang="pt-BR" sz="1100" b="0" i="0" u="none" strike="noStrike">
+                          <a:solidFill>
+                            <a:srgbClr val="000000"/>
+                          </a:solidFill>
+                          <a:effectLst/>
+                          <a:latin typeface="Aptos Narrow"/>
+                        </a:rPr>
+                        <a:t>17/12/2026</a:t>
+                      </a:r>
+                    </a:p>
+                  </a:txBody>
+                  <a:tcPr marL="0" marR="0" marT="0" marB="0" anchor="b">
+                    <a:lnL w="6350" cap="flat" cmpd="sng" algn="ctr">
+                      <a:solidFill>
+                        <a:srgbClr val="000000"/>
+                      </a:solidFill>
+                      <a:prstDash val="solid"/>
+                      <a:round/>
+                      <a:headEnd type="none" w="med" len="med"/>
+                      <a:tailEnd type="none" w="med" len="med"/>
+                    </a:lnL>
+                    <a:lnR w="6350" cap="flat" cmpd="sng" algn="ctr">
+                      <a:solidFill>
+                        <a:srgbClr val="000000"/>
+                      </a:solidFill>
+                      <a:prstDash val="solid"/>
+                      <a:round/>
+                      <a:headEnd type="none" w="med" len="med"/>
+                      <a:tailEnd type="none" w="med" len="med"/>
+                    </a:lnR>
+                    <a:lnT w="6350" cap="flat" cmpd="sng" algn="ctr">
+                      <a:solidFill>
+                        <a:srgbClr val="000000"/>
+                      </a:solidFill>
+                      <a:prstDash val="solid"/>
+                      <a:round/>
+                      <a:headEnd type="none" w="med" len="med"/>
+                      <a:tailEnd type="none" w="med" len="med"/>
+                    </a:lnT>
+                    <a:lnB w="6350" cap="flat" cmpd="sng" algn="ctr">
+                      <a:solidFill>
+                        <a:srgbClr val="000000"/>
+                      </a:solidFill>
+                      <a:prstDash val="solid"/>
+                      <a:round/>
+                      <a:headEnd type="none" w="med" len="med"/>
+                      <a:tailEnd type="none" w="med" len="med"/>
+                    </a:lnB>
+                    <a:noFill/>
+                  </a:tcPr>
+                </a:tc>
+                <a:extLst>
+                  <a:ext uri="{0D108BD9-81ED-4DB2-BD59-A6C34878D82A}">
+                    <a16:rowId xmlns:a16="http://schemas.microsoft.com/office/drawing/2014/main" val="3212727421"/>
+                  </a:ext>
+                </a:extLst>
+              </a:tr>
+              <a:tr h="337119">
+                <a:tc>
+                  <a:txBody>
+                    <a:bodyPr/>
+                    <a:lstStyle/>
+                    <a:p>
+                      <a:pPr algn="ctr" fontAlgn="b">
+                        <a:buNone/>
+                      </a:pPr>
+                      <a:r>
+                        <a:rPr lang="pt-BR" sz="1100" b="0" i="0" u="none" strike="noStrike">
+                          <a:solidFill>
+                            <a:srgbClr val="000000"/>
+                          </a:solidFill>
+                          <a:effectLst/>
+                          <a:latin typeface="Aptos Narrow" panose="020B0004020202020204" pitchFamily="34" charset="0"/>
+                        </a:rPr>
+                        <a:t>260</a:t>
+                      </a:r>
+                    </a:p>
+                  </a:txBody>
+                  <a:tcPr marL="0" marR="0" marT="0" marB="0" anchor="b">
+                    <a:lnL w="6350" cap="flat" cmpd="sng" algn="ctr">
+                      <a:solidFill>
+                        <a:srgbClr val="000000"/>
+                      </a:solidFill>
+                      <a:prstDash val="solid"/>
+                      <a:round/>
+                      <a:headEnd type="none" w="med" len="med"/>
+                      <a:tailEnd type="none" w="med" len="med"/>
+                    </a:lnL>
+                    <a:lnR w="6350" cap="flat" cmpd="sng" algn="ctr">
+                      <a:solidFill>
+                        <a:srgbClr val="000000"/>
+                      </a:solidFill>
+                      <a:prstDash val="solid"/>
+                      <a:round/>
+                      <a:headEnd type="none" w="med" len="med"/>
+                      <a:tailEnd type="none" w="med" len="med"/>
+                    </a:lnR>
+                    <a:lnT w="6350" cap="flat" cmpd="sng" algn="ctr">
+                      <a:solidFill>
+                        <a:srgbClr val="000000"/>
+                      </a:solidFill>
+                      <a:prstDash val="solid"/>
+                      <a:round/>
+                      <a:headEnd type="none" w="med" len="med"/>
+                      <a:tailEnd type="none" w="med" len="med"/>
+                    </a:lnT>
+                    <a:lnB w="6350" cap="flat" cmpd="sng" algn="ctr">
+                      <a:solidFill>
+                        <a:srgbClr val="000000"/>
+                      </a:solidFill>
+                      <a:prstDash val="solid"/>
+                      <a:round/>
+                      <a:headEnd type="none" w="med" len="med"/>
+                      <a:tailEnd type="none" w="med" len="med"/>
+                    </a:lnB>
+                    <a:noFill/>
+                  </a:tcPr>
+                </a:tc>
+                <a:tc>
+                  <a:txBody>
+                    <a:bodyPr/>
+                    <a:lstStyle/>
+                    <a:p>
+                      <a:pPr algn="ctr" fontAlgn="b">
+                        <a:buNone/>
+                      </a:pPr>
+                      <a:r>
+                        <a:rPr lang="pt-BR" sz="1100" b="0" i="0" u="none" strike="noStrike">
+                          <a:solidFill>
+                            <a:srgbClr val="9C5700"/>
+                          </a:solidFill>
+                          <a:effectLst/>
+                          <a:latin typeface="Aptos Narrow" panose="020B0004020202020204" pitchFamily="34" charset="0"/>
+                        </a:rPr>
+                        <a:t>EM ANDAMENTO</a:t>
+                      </a:r>
+                    </a:p>
+                  </a:txBody>
+                  <a:tcPr marL="0" marR="0" marT="0" marB="0" anchor="b">
+                    <a:lnL w="6350" cap="flat" cmpd="sng" algn="ctr">
+                      <a:solidFill>
+                        <a:srgbClr val="000000"/>
+                      </a:solidFill>
+                      <a:prstDash val="solid"/>
+                      <a:round/>
+                      <a:headEnd type="none" w="med" len="med"/>
+                      <a:tailEnd type="none" w="med" len="med"/>
+                    </a:lnL>
+                    <a:lnR w="6350" cap="flat" cmpd="sng" algn="ctr">
+                      <a:solidFill>
+                        <a:srgbClr val="000000"/>
+                      </a:solidFill>
+                      <a:prstDash val="solid"/>
+                      <a:round/>
+                      <a:headEnd type="none" w="med" len="med"/>
+                      <a:tailEnd type="none" w="med" len="med"/>
+                    </a:lnR>
+                    <a:lnT w="6350" cap="flat" cmpd="sng" algn="ctr">
+                      <a:solidFill>
+                        <a:srgbClr val="000000"/>
+                      </a:solidFill>
+                      <a:prstDash val="solid"/>
+                      <a:round/>
+                      <a:headEnd type="none" w="med" len="med"/>
+                      <a:tailEnd type="none" w="med" len="med"/>
+                    </a:lnT>
+                    <a:lnB w="6350" cap="flat" cmpd="sng" algn="ctr">
+                      <a:solidFill>
+                        <a:srgbClr val="000000"/>
+                      </a:solidFill>
+                      <a:prstDash val="solid"/>
+                      <a:round/>
+                      <a:headEnd type="none" w="med" len="med"/>
+                      <a:tailEnd type="none" w="med" len="med"/>
+                    </a:lnB>
+                    <a:solidFill>
+                      <a:srgbClr val="FFEB9C"/>
+                    </a:solidFill>
+                  </a:tcPr>
+                </a:tc>
+                <a:tc>
+                  <a:txBody>
+                    <a:bodyPr/>
+                    <a:lstStyle/>
+                    <a:p>
+                      <a:pPr algn="ctr" fontAlgn="b">
+                        <a:buNone/>
+                      </a:pPr>
+                      <a:r>
+                        <a:rPr lang="pt-BR" sz="1100" b="0" i="0" u="none" strike="noStrike">
+                          <a:solidFill>
+                            <a:srgbClr val="000000"/>
+                          </a:solidFill>
+                          <a:effectLst/>
+                          <a:latin typeface="Aptos Narrow"/>
+                        </a:rPr>
+                        <a:t>10/11/2026</a:t>
+                      </a:r>
+                    </a:p>
+                  </a:txBody>
+                  <a:tcPr marL="0" marR="0" marT="0" marB="0" anchor="b">
+                    <a:lnL w="6350" cap="flat" cmpd="sng" algn="ctr">
+                      <a:solidFill>
+                        <a:srgbClr val="000000"/>
+                      </a:solidFill>
+                      <a:prstDash val="solid"/>
+                      <a:round/>
+                      <a:headEnd type="none" w="med" len="med"/>
+                      <a:tailEnd type="none" w="med" len="med"/>
+                    </a:lnL>
+                    <a:lnR w="6350" cap="flat" cmpd="sng" algn="ctr">
+                      <a:solidFill>
+                        <a:srgbClr val="000000"/>
+                      </a:solidFill>
+                      <a:prstDash val="solid"/>
+                      <a:round/>
+                      <a:headEnd type="none" w="med" len="med"/>
+                      <a:tailEnd type="none" w="med" len="med"/>
+                    </a:lnR>
+                    <a:lnT w="6350" cap="flat" cmpd="sng" algn="ctr">
+                      <a:solidFill>
+                        <a:srgbClr val="000000"/>
+                      </a:solidFill>
+                      <a:prstDash val="solid"/>
+                      <a:round/>
+                      <a:headEnd type="none" w="med" len="med"/>
+                      <a:tailEnd type="none" w="med" len="med"/>
+                    </a:lnT>
+                    <a:lnB w="6350" cap="flat" cmpd="sng" algn="ctr">
+                      <a:solidFill>
+                        <a:srgbClr val="000000"/>
+                      </a:solidFill>
+                      <a:prstDash val="solid"/>
+                      <a:round/>
+                      <a:headEnd type="none" w="med" len="med"/>
+                      <a:tailEnd type="none" w="med" len="med"/>
+                    </a:lnB>
+                    <a:noFill/>
+                  </a:tcPr>
+                </a:tc>
+                <a:extLst>
+                  <a:ext uri="{0D108BD9-81ED-4DB2-BD59-A6C34878D82A}">
+                    <a16:rowId xmlns:a16="http://schemas.microsoft.com/office/drawing/2014/main" val="998031981"/>
+                  </a:ext>
+                </a:extLst>
+              </a:tr>
+              <a:tr h="337119">
+                <a:tc>
+                  <a:txBody>
+                    <a:bodyPr/>
+                    <a:lstStyle/>
+                    <a:p>
+                      <a:pPr algn="ctr" fontAlgn="b">
+                        <a:buNone/>
+                      </a:pPr>
+                      <a:r>
+                        <a:rPr lang="pt-BR" sz="1100" b="0" i="0" u="none" strike="noStrike">
+                          <a:solidFill>
+                            <a:srgbClr val="000000"/>
+                          </a:solidFill>
+                          <a:effectLst/>
+                          <a:latin typeface="Aptos Narrow" panose="020B0004020202020204" pitchFamily="34" charset="0"/>
+                        </a:rPr>
+                        <a:t>410</a:t>
+                      </a:r>
+                    </a:p>
+                  </a:txBody>
+                  <a:tcPr marL="0" marR="0" marT="0" marB="0" anchor="b">
+                    <a:lnL w="6350" cap="flat" cmpd="sng" algn="ctr">
+                      <a:solidFill>
+                        <a:srgbClr val="000000"/>
+                      </a:solidFill>
+                      <a:prstDash val="solid"/>
+                      <a:round/>
+                      <a:headEnd type="none" w="med" len="med"/>
+                      <a:tailEnd type="none" w="med" len="med"/>
+                    </a:lnL>
+                    <a:lnR w="6350" cap="flat" cmpd="sng" algn="ctr">
+                      <a:solidFill>
+                        <a:srgbClr val="000000"/>
+                      </a:solidFill>
+                      <a:prstDash val="solid"/>
+                      <a:round/>
+                      <a:headEnd type="none" w="med" len="med"/>
+                      <a:tailEnd type="none" w="med" len="med"/>
+                    </a:lnR>
+                    <a:lnT w="6350" cap="flat" cmpd="sng" algn="ctr">
+                      <a:solidFill>
+                        <a:srgbClr val="000000"/>
+                      </a:solidFill>
+                      <a:prstDash val="solid"/>
+                      <a:round/>
+                      <a:headEnd type="none" w="med" len="med"/>
+                      <a:tailEnd type="none" w="med" len="med"/>
+                    </a:lnT>
+                    <a:lnB w="6350" cap="flat" cmpd="sng" algn="ctr">
+                      <a:solidFill>
+                        <a:srgbClr val="000000"/>
+                      </a:solidFill>
+                      <a:prstDash val="solid"/>
+                      <a:round/>
+                      <a:headEnd type="none" w="med" len="med"/>
+                      <a:tailEnd type="none" w="med" len="med"/>
+                    </a:lnB>
+                    <a:noFill/>
+                  </a:tcPr>
+                </a:tc>
+                <a:tc>
+                  <a:txBody>
+                    <a:bodyPr/>
+                    <a:lstStyle/>
+                    <a:p>
+                      <a:pPr algn="ctr" fontAlgn="b">
+                        <a:buNone/>
+                      </a:pPr>
+                      <a:r>
+                        <a:rPr lang="pt-BR" sz="1100" b="0" i="0" u="none" strike="noStrike">
+                          <a:solidFill>
+                            <a:srgbClr val="006100"/>
+                          </a:solidFill>
+                          <a:effectLst/>
+                          <a:latin typeface="Aptos Narrow" panose="020B0004020202020204" pitchFamily="34" charset="0"/>
+                        </a:rPr>
+                        <a:t>CONCLUÍDO</a:t>
+                      </a:r>
+                    </a:p>
+                  </a:txBody>
+                  <a:tcPr marL="0" marR="0" marT="0" marB="0" anchor="b">
+                    <a:lnL w="6350" cap="flat" cmpd="sng" algn="ctr">
+                      <a:solidFill>
+                        <a:srgbClr val="000000"/>
+                      </a:solidFill>
+                      <a:prstDash val="solid"/>
+                      <a:round/>
+                      <a:headEnd type="none" w="med" len="med"/>
+                      <a:tailEnd type="none" w="med" len="med"/>
+                    </a:lnL>
+                    <a:lnR w="6350" cap="flat" cmpd="sng" algn="ctr">
+                      <a:solidFill>
+                        <a:srgbClr val="000000"/>
+                      </a:solidFill>
+                      <a:prstDash val="solid"/>
+                      <a:round/>
+                      <a:headEnd type="none" w="med" len="med"/>
+                      <a:tailEnd type="none" w="med" len="med"/>
+                    </a:lnR>
+                    <a:lnT w="6350" cap="flat" cmpd="sng" algn="ctr">
+                      <a:solidFill>
+                        <a:srgbClr val="000000"/>
+                      </a:solidFill>
+                      <a:prstDash val="solid"/>
+                      <a:round/>
+                      <a:headEnd type="none" w="med" len="med"/>
+                      <a:tailEnd type="none" w="med" len="med"/>
+                    </a:lnT>
+                    <a:lnB w="6350" cap="flat" cmpd="sng" algn="ctr">
+                      <a:solidFill>
+                        <a:srgbClr val="000000"/>
+                      </a:solidFill>
+                      <a:prstDash val="solid"/>
+                      <a:round/>
+                      <a:headEnd type="none" w="med" len="med"/>
+                      <a:tailEnd type="none" w="med" len="med"/>
+                    </a:lnB>
+                    <a:solidFill>
+                      <a:schemeClr val="accent3">
+                        <a:lumMod val="20000"/>
+                        <a:lumOff val="80000"/>
+                      </a:schemeClr>
+                    </a:solidFill>
+                  </a:tcPr>
+                </a:tc>
+                <a:tc>
+                  <a:txBody>
+                    <a:bodyPr/>
+                    <a:lstStyle/>
+                    <a:p>
+                      <a:pPr marL="0" marR="0" lvl="0" indent="0" algn="ctr" defTabSz="1280160">
+                        <a:lnSpc>
+                          <a:spcPct val="100000"/>
+                        </a:lnSpc>
+                        <a:spcBef>
+                          <a:spcPts val="0"/>
+                        </a:spcBef>
+                        <a:spcAft>
+                          <a:spcPts val="0"/>
+                        </a:spcAft>
+                        <a:buNone/>
+                        <a:tabLst/>
+                        <a:defRPr/>
+                      </a:pPr>
+                      <a:r>
+                        <a:rPr lang="pt-BR" sz="1100" b="0" i="0" u="none" strike="noStrike" dirty="0">
+                          <a:solidFill>
+                            <a:srgbClr val="000000"/>
+                          </a:solidFill>
+                          <a:effectLst/>
+                          <a:latin typeface="Aptos Narrow"/>
+                        </a:rPr>
+                        <a:t>21/08/2026</a:t>
+                      </a:r>
+                      <a:endParaRPr lang="pt-BR" sz="1100" b="0" i="0" u="none" strike="noStrike" dirty="0">
+                        <a:solidFill>
+                          <a:srgbClr val="000000"/>
+                        </a:solidFill>
+                        <a:effectLst/>
+                        <a:latin typeface="Aptos Narrow" panose="020B0004020202020204" pitchFamily="34" charset="0"/>
+                      </a:endParaRPr>
+                    </a:p>
+                  </a:txBody>
+                  <a:tcPr marL="0" marR="0" marT="0" marB="0" anchor="b">
+                    <a:lnL w="6350" cap="flat" cmpd="sng" algn="ctr">
+                      <a:solidFill>
+                        <a:srgbClr val="000000"/>
+                      </a:solidFill>
+                      <a:prstDash val="solid"/>
+                      <a:round/>
+                      <a:headEnd type="none" w="med" len="med"/>
+                      <a:tailEnd type="none" w="med" len="med"/>
+                    </a:lnL>
+                    <a:lnR w="6350" cap="flat" cmpd="sng" algn="ctr">
+                      <a:solidFill>
+                        <a:srgbClr val="000000"/>
+                      </a:solidFill>
+                      <a:prstDash val="solid"/>
+                      <a:round/>
+                      <a:headEnd type="none" w="med" len="med"/>
+                      <a:tailEnd type="none" w="med" len="med"/>
+                    </a:lnR>
+                    <a:lnT w="6350" cap="flat" cmpd="sng" algn="ctr">
+                      <a:solidFill>
+                        <a:srgbClr val="000000"/>
+                      </a:solidFill>
+                      <a:prstDash val="solid"/>
+                      <a:round/>
+                      <a:headEnd type="none" w="med" len="med"/>
+                      <a:tailEnd type="none" w="med" len="med"/>
+                    </a:lnT>
+                    <a:lnB w="6350" cap="flat" cmpd="sng" algn="ctr">
+                      <a:solidFill>
+                        <a:srgbClr val="000000"/>
+                      </a:solidFill>
+                      <a:prstDash val="solid"/>
+                      <a:round/>
+                      <a:headEnd type="none" w="med" len="med"/>
+                      <a:tailEnd type="none" w="med" len="med"/>
+                    </a:lnB>
+                    <a:noFill/>
+                  </a:tcPr>
+                </a:tc>
+                <a:extLst>
+                  <a:ext uri="{0D108BD9-81ED-4DB2-BD59-A6C34878D82A}">
+                    <a16:rowId xmlns:a16="http://schemas.microsoft.com/office/drawing/2014/main" val="579499511"/>
+                  </a:ext>
+                </a:extLst>
+              </a:tr>
+            </a:tbl>
+          </a:graphicData>
+        </a:graphic>
+      </p:graphicFrame>
+      <p:sp>
+        <p:nvSpPr>
+          <p:cNvPr id="21" name="CaixaDeTexto 20">
+            <a:extLst>
+              <a:ext uri="{FF2B5EF4-FFF2-40B4-BE49-F238E27FC236}">
+                <a16:creationId xmlns:a16="http://schemas.microsoft.com/office/drawing/2014/main" id="{82AA5D64-AA22-DBB8-8E57-CBA6FD224110}"/>
+              </a:ext>
+            </a:extLst>
+          </p:cNvPr>
+          <p:cNvSpPr txBox="1"/>
+          <p:nvPr/>
+        </p:nvSpPr>
+        <p:spPr>
+          <a:xfrm>
+            <a:off x="510489" y="4898919"/>
+            <a:ext cx="3167357" cy="276999"/>
+          </a:xfrm>
+          <a:prstGeom prst="rect">
+            <a:avLst/>
+          </a:prstGeom>
+          <a:noFill/>
+        </p:spPr>
+        <p:txBody>
+          <a:bodyPr wrap="square" rtlCol="0">
+            <a:spAutoFit/>
+          </a:bodyPr>
+          <a:lstStyle/>
+          <a:p>
+            <a:r>
+              <a:rPr lang="pt-BR" sz="1200" b="1"/>
+              <a:t>LEGENDA DE AVANÇO:</a:t>
+            </a:r>
+          </a:p>
+        </p:txBody>
+      </p:sp>
+      <p:graphicFrame>
+        <p:nvGraphicFramePr>
+          <p:cNvPr id="900" name="Grafico Avanco por Area"/>
+          <p:cNvGraphicFramePr/>
+          <p:nvPr/>
+        </p:nvGraphicFramePr>
+        <p:xfrm>
+          <a:off x="3886200" y="6146800"/>
+          <a:ext cx="8547100" cy="3098800"/>
+        </p:xfrm>
+        <a:graphic>
+          <a:graphicData uri="http://schemas.openxmlformats.org/drawingml/2006/chart">
+            <c:chart xmlns:c="http://schemas.openxmlformats.org/drawingml/2006/chart" xmlns:r="http://schemas.openxmlformats.org/officeDocument/2006/relationships" r:id="rId6"/>
+          </a:graphicData>
+        </a:graphic>
+      </p:graphicFrame>
+      <p:sp>
+        <p:nvSpPr>
+          <p:cNvPr id="901" name="Titulo Avanco por Area"/>
+          <p:cNvSpPr txBox="1"/>
+          <p:nvPr/>
+        </p:nvSpPr>
+        <p:spPr>
+          <a:xfrm>
+            <a:off x="3886200" y="5816600"/>
+            <a:ext cx="3810000" cy="304800"/>
+          </a:xfrm>
+          <a:prstGeom prst="rect">
+            <a:avLst/>
+          </a:prstGeom>
+          <a:noFill/>
+        </p:spPr>
+        <p:txBody>
+          <a:bodyPr wrap="square" lIns="0" tIns="0" rIns="0" bIns="0" anchor="ctr">
+            <a:noAutofit/>
+          </a:bodyPr>
+          <a:lstStyle/>
+          <a:p>
+            <a:r>
+              <a:rPr lang="pt-BR" sz="1300" b="1">
+                <a:solidFill>
+                  <a:srgbClr val="404040"/>
+                </a:solidFill>
+              </a:rPr>
+              <a:t>Avanço por área</a:t>
+            </a:r>
+          </a:p>
+        </p:txBody>
+      </p:sp>
+    </p:spTree>
+    <p:extLst>
+      <p:ext uri="{BB962C8B-B14F-4D97-AF65-F5344CB8AC3E}">
+        <p14:creationId xmlns:p14="http://schemas.microsoft.com/office/powerpoint/2010/main" val="4034180360"/>
+      </p:ext>
+    </p:extLst>
+  </p:cSld>
+  <p:clrMapOvr>
+    <a:masterClrMapping/>
+  </p:clrMapOvr>
+</p:sld>
+</file>
+
+<file path=ppt/slides/slide4.xml><?xml version="1.0" encoding="utf-8"?>
+<p:sld xmlns:a="http://schemas.openxmlformats.org/drawingml/2006/main" xmlns:r="http://schemas.openxmlformats.org/officeDocument/2006/relationships" xmlns:p="http://schemas.openxmlformats.org/presentationml/2006/main">
+  <p:cSld>
+    <p:spTree>
+      <p:nvGrpSpPr>
+        <p:cNvPr id="1" name="">
+          <a:extLst>
+            <a:ext uri="{FF2B5EF4-FFF2-40B4-BE49-F238E27FC236}">
               <a16:creationId xmlns:a16="http://schemas.microsoft.com/office/drawing/2014/main" id="{2B827650-D829-112D-D263-5F0283FB7CF5}"/>
             </a:ext>
           </a:extLst>
@@ -9757,7 +15072,7 @@
 </p:sld>
 </file>
 
-<file path=ppt/slides/slide3.xml><?xml version="1.0" encoding="utf-8"?>
+<file path=ppt/slides/slide5.xml><?xml version="1.0" encoding="utf-8"?>
 <p:sld xmlns:a="http://schemas.openxmlformats.org/drawingml/2006/main" xmlns:r="http://schemas.openxmlformats.org/officeDocument/2006/relationships" xmlns:p="http://schemas.openxmlformats.org/presentationml/2006/main">
   <p:cSld>
     <p:spTree>
@@ -9895,67 +15210,6 @@
           </a:p>
         </p:txBody>
       </p:sp>
-      <p:pic>
-        <p:nvPicPr>
-          <p:cNvPr id="7" name="Imagem 6">
-            <a:extLst>
-              <a:ext uri="{FF2B5EF4-FFF2-40B4-BE49-F238E27FC236}">
-                <a16:creationId xmlns:a16="http://schemas.microsoft.com/office/drawing/2014/main" id="{F935D58C-9D40-745D-F9CE-CA99C186A8C4}"/>
-              </a:ext>
-            </a:extLst>
-          </p:cNvPr>
-          <p:cNvPicPr>
-            <a:picLocks noChangeAspect="1"/>
-          </p:cNvPicPr>
-          <p:nvPr/>
-        </p:nvPicPr>
-        <p:blipFill>
-          <a:blip r:embed="rId3"/>
-          <a:srcRect l="39078" r="39779" b="94890"/>
-          <a:stretch>
-            <a:fillRect/>
-          </a:stretch>
-        </p:blipFill>
-        <p:spPr>
-          <a:xfrm>
-            <a:off x="5038440" y="1643864"/>
-            <a:ext cx="2679783" cy="409635"/>
-          </a:xfrm>
-          <a:prstGeom prst="rect">
-            <a:avLst/>
-          </a:prstGeom>
-        </p:spPr>
-      </p:pic>
-      <p:graphicFrame>
-        <p:nvGraphicFramePr>
-          <p:cNvPr id="2" name="Gráfico 1">
-            <a:extLst>
-              <a:ext uri="{FF2B5EF4-FFF2-40B4-BE49-F238E27FC236}">
-                <a16:creationId xmlns:a16="http://schemas.microsoft.com/office/drawing/2014/main" id="{7BFC7B4B-E03C-5571-B267-8CB3EA73B601}"/>
-              </a:ext>
-            </a:extLst>
-          </p:cNvPr>
-          <p:cNvGraphicFramePr>
-            <a:graphicFrameLocks/>
-          </p:cNvGraphicFramePr>
-          <p:nvPr>
-            <p:extLst>
-              <p:ext uri="{D42A27DB-BD31-4B8C-83A1-F6EECF244321}">
-                <p14:modId xmlns:p14="http://schemas.microsoft.com/office/powerpoint/2010/main" val="1739537709"/>
-              </p:ext>
-            </p:extLst>
-          </p:nvPr>
-        </p:nvGraphicFramePr>
-        <p:xfrm>
-          <a:off x="185325" y="1993900"/>
-          <a:ext cx="12616275" cy="7586990"/>
-        </p:xfrm>
-        <a:graphic>
-          <a:graphicData uri="http://schemas.openxmlformats.org/drawingml/2006/chart">
-            <c:chart xmlns:c="http://schemas.openxmlformats.org/drawingml/2006/chart" xmlns:r="http://schemas.openxmlformats.org/officeDocument/2006/relationships" r:id="rId4"/>
-          </a:graphicData>
-        </a:graphic>
-      </p:graphicFrame>
       <p:graphicFrame>
         <p:nvGraphicFramePr>
           <p:cNvPr id="5" name="Tabela 4">
@@ -10998,6 +16252,36 @@
                 </a:extLst>
               </a:tr>
             </a:tbl>
+          </a:graphicData>
+        </a:graphic>
+      </p:graphicFrame>
+      <p:graphicFrame>
+        <p:nvGraphicFramePr>
+          <p:cNvPr id="3" name="Gráfico 2">
+            <a:extLst>
+              <a:ext uri="{FF2B5EF4-FFF2-40B4-BE49-F238E27FC236}">
+                <a16:creationId xmlns:a16="http://schemas.microsoft.com/office/drawing/2014/main" id="{7BFC7B4B-E03C-5571-B267-8CB3EA73B601}"/>
+              </a:ext>
+            </a:extLst>
+          </p:cNvPr>
+          <p:cNvGraphicFramePr>
+            <a:graphicFrameLocks/>
+          </p:cNvGraphicFramePr>
+          <p:nvPr>
+            <p:extLst>
+              <p:ext uri="{D42A27DB-BD31-4B8C-83A1-F6EECF244321}">
+                <p14:modId xmlns:p14="http://schemas.microsoft.com/office/powerpoint/2010/main" val="34170488"/>
+              </p:ext>
+            </p:extLst>
+          </p:nvPr>
+        </p:nvGraphicFramePr>
+        <p:xfrm>
+          <a:off x="165100" y="1643864"/>
+          <a:ext cx="12636499" cy="7937026"/>
+        </p:xfrm>
+        <a:graphic>
+          <a:graphicData uri="http://schemas.openxmlformats.org/drawingml/2006/chart">
+            <c:chart xmlns:c="http://schemas.openxmlformats.org/drawingml/2006/chart" xmlns:r="http://schemas.openxmlformats.org/officeDocument/2006/relationships" r:id="rId3"/>
           </a:graphicData>
         </a:graphic>
       </p:graphicFrame>
@@ -11684,6 +16968,23 @@
 </file>
 
 <file path=customXml/item1.xml><?xml version="1.0" encoding="utf-8"?>
+<?mso-contentType ?>
+<FormTemplates xmlns="http://schemas.microsoft.com/sharepoint/v3/contenttype/forms">
+  <Display>DocumentLibraryForm</Display>
+  <Edit>DocumentLibraryForm</Edit>
+  <New>DocumentLibraryForm</New>
+</FormTemplates>
+</file>
+
+<file path=customXml/item2.xml><?xml version="1.0" encoding="utf-8"?>
+<p:properties xmlns:p="http://schemas.microsoft.com/office/2006/metadata/properties" xmlns:xsi="http://www.w3.org/2001/XMLSchema-instance" xmlns:pc="http://schemas.microsoft.com/office/infopath/2007/PartnerControls">
+  <documentManagement>
+    <_activity xmlns="628beee7-00d6-4a8b-9979-7711ec89862e" xsi:nil="true"/>
+  </documentManagement>
+</p:properties>
+</file>
+
+<file path=customXml/item3.xml><?xml version="1.0" encoding="utf-8"?>
 <ct:contentTypeSchema xmlns:ct="http://schemas.microsoft.com/office/2006/metadata/contentType" xmlns:ma="http://schemas.microsoft.com/office/2006/metadata/properties/metaAttributes" ct:_="" ma:_="" ma:contentTypeName="Documento" ma:contentTypeID="0x010100285B02DCC98FB146B538A7DCAAD9EAAD" ma:contentTypeVersion="16" ma:contentTypeDescription="Crie um novo documento." ma:contentTypeScope="" ma:versionID="4a01ab062f587ae806f137a3cfa13680">
   <xsd:schema xmlns:xsd="http://www.w3.org/2001/XMLSchema" xmlns:xs="http://www.w3.org/2001/XMLSchema" xmlns:p="http://schemas.microsoft.com/office/2006/metadata/properties" xmlns:ns3="628beee7-00d6-4a8b-9979-7711ec89862e" xmlns:ns4="ed8bd3c1-0ca3-4ea9-ae7f-2a031503cc49" targetNamespace="http://schemas.microsoft.com/office/2006/metadata/properties" ma:root="true" ma:fieldsID="a65f8bae13c1a2b8df685e13ad7eb54c" ns3:_="" ns4:_="">
     <xsd:import namespace="628beee7-00d6-4a8b-9979-7711ec89862e"/>
@@ -11922,24 +17223,32 @@
 </ct:contentTypeSchema>
 </file>
 
-<file path=customXml/item2.xml><?xml version="1.0" encoding="utf-8"?>
-<?mso-contentType ?>
-<FormTemplates xmlns="http://schemas.microsoft.com/sharepoint/v3/contenttype/forms">
-  <Display>DocumentLibraryForm</Display>
-  <Edit>DocumentLibraryForm</Edit>
-  <New>DocumentLibraryForm</New>
-</FormTemplates>
+<file path=customXml/itemProps1.xml><?xml version="1.0" encoding="utf-8"?>
+<ds:datastoreItem xmlns:ds="http://schemas.openxmlformats.org/officeDocument/2006/customXml" ds:itemID="{D7387192-45ED-413D-9E2E-74F589B81EB4}">
+  <ds:schemaRefs>
+    <ds:schemaRef ds:uri="http://schemas.microsoft.com/sharepoint/v3/contenttype/forms"/>
+  </ds:schemaRefs>
+</ds:datastoreItem>
 </file>
 
-<file path=customXml/item3.xml><?xml version="1.0" encoding="utf-8"?>
-<p:properties xmlns:p="http://schemas.microsoft.com/office/2006/metadata/properties" xmlns:xsi="http://www.w3.org/2001/XMLSchema-instance" xmlns:pc="http://schemas.microsoft.com/office/infopath/2007/PartnerControls">
-  <documentManagement>
-    <_activity xmlns="628beee7-00d6-4a8b-9979-7711ec89862e" xsi:nil="true"/>
-  </documentManagement>
-</p:properties>
+<file path=customXml/itemProps2.xml><?xml version="1.0" encoding="utf-8"?>
+<ds:datastoreItem xmlns:ds="http://schemas.openxmlformats.org/officeDocument/2006/customXml" ds:itemID="{75C791AD-99AA-4ECD-B311-96119F673E64}">
+  <ds:schemaRefs>
+    <ds:schemaRef ds:uri="http://www.w3.org/XML/1998/namespace"/>
+    <ds:schemaRef ds:uri="http://purl.org/dc/dcmitype/"/>
+    <ds:schemaRef ds:uri="http://purl.org/dc/terms/"/>
+    <ds:schemaRef ds:uri="http://schemas.microsoft.com/office/infopath/2007/PartnerControls"/>
+    <ds:schemaRef ds:uri="http://schemas.microsoft.com/office/2006/documentManagement/types"/>
+    <ds:schemaRef ds:uri="628beee7-00d6-4a8b-9979-7711ec89862e"/>
+    <ds:schemaRef ds:uri="http://schemas.microsoft.com/office/2006/metadata/properties"/>
+    <ds:schemaRef ds:uri="http://schemas.openxmlformats.org/package/2006/metadata/core-properties"/>
+    <ds:schemaRef ds:uri="ed8bd3c1-0ca3-4ea9-ae7f-2a031503cc49"/>
+    <ds:schemaRef ds:uri="http://purl.org/dc/elements/1.1/"/>
+  </ds:schemaRefs>
+</ds:datastoreItem>
 </file>
 
-<file path=customXml/itemProps1.xml><?xml version="1.0" encoding="utf-8"?>
+<file path=customXml/itemProps3.xml><?xml version="1.0" encoding="utf-8"?>
 <ds:datastoreItem xmlns:ds="http://schemas.openxmlformats.org/officeDocument/2006/customXml" ds:itemID="{8F84AD87-D156-44C1-AF1C-B39367CA6476}">
   <ds:schemaRefs>
     <ds:schemaRef ds:uri="http://schemas.microsoft.com/office/2006/metadata/contentType"/>
@@ -11956,29 +17265,4 @@
     <ds:schemaRef ds:uri="http://schemas.microsoft.com/internal/obd"/>
   </ds:schemaRefs>
 </ds:datastoreItem>
-</file>
-
-<file path=customXml/itemProps2.xml><?xml version="1.0" encoding="utf-8"?>
-<ds:datastoreItem xmlns:ds="http://schemas.openxmlformats.org/officeDocument/2006/customXml" ds:itemID="{D7387192-45ED-413D-9E2E-74F589B81EB4}">
-  <ds:schemaRefs>
-    <ds:schemaRef ds:uri="http://schemas.microsoft.com/sharepoint/v3/contenttype/forms"/>
-  </ds:schemaRefs>
-</ds:datastoreItem>
-</file>
-
-<file path=customXml/itemProps3.xml><?xml version="1.0" encoding="utf-8"?>
-<ds:datastoreItem xmlns:ds="http://schemas.openxmlformats.org/officeDocument/2006/customXml" ds:itemID="{75C791AD-99AA-4ECD-B311-96119F673E64}">
-  <ds:schemaRefs>
-    <ds:schemaRef ds:uri="http://schemas.microsoft.com/office/2006/documentManagement/types"/>
-    <ds:schemaRef ds:uri="http://www.w3.org/XML/1998/namespace"/>
-    <ds:schemaRef ds:uri="http://schemas.microsoft.com/office/infopath/2007/PartnerControls"/>
-    <ds:schemaRef ds:uri="http://schemas.openxmlformats.org/package/2006/metadata/core-properties"/>
-    <ds:schemaRef ds:uri="ed8bd3c1-0ca3-4ea9-ae7f-2a031503cc49"/>
-    <ds:schemaRef ds:uri="http://purl.org/dc/elements/1.1/"/>
-    <ds:schemaRef ds:uri="http://purl.org/dc/terms/"/>
-    <ds:schemaRef ds:uri="628beee7-00d6-4a8b-9979-7711ec89862e"/>
-    <ds:schemaRef ds:uri="http://schemas.microsoft.com/office/2006/metadata/properties"/>
-    <ds:schemaRef ds:uri="http://purl.org/dc/dcmitype/"/>
-  </ds:schemaRefs>
-</ds:datastoreItem>
 </file>